--- a/assets/Cr3dX_RWA_Deck_v1.pptx
+++ b/assets/Cr3dX_RWA_Deck_v1.pptx
@@ -2,22 +2,22 @@
 <file path=ppt/presentation.xml><?xml version="1.0" encoding="utf-8"?>
 <p:presentation xmlns:p="http://schemas.openxmlformats.org/presentationml/2006/main">
   <p:sldMasterIdLst>
-    <p:sldMasterId xmlns:r="http://schemas.openxmlformats.org/officeDocument/2006/relationships" id="2147483648" r:id="R1079e0b2162445c2"/>
+    <p:sldMasterId xmlns:r="http://schemas.openxmlformats.org/officeDocument/2006/relationships" id="2147483648" r:id="R41b49ed05570410d"/>
   </p:sldMasterIdLst>
   <p:notesMasterIdLst>
-    <p:notesMasterId xmlns:r="http://schemas.openxmlformats.org/officeDocument/2006/relationships" r:id="R0c30ec9bc68c431e"/>
+    <p:notesMasterId xmlns:r="http://schemas.openxmlformats.org/officeDocument/2006/relationships" r:id="R544529a3905340b0"/>
   </p:notesMasterIdLst>
   <p:sldIdLst>
-    <p:sldId xmlns:r="http://schemas.openxmlformats.org/officeDocument/2006/relationships" id="256" r:id="R6ec8a6d682294cb6"/>
-    <p:sldId xmlns:r="http://schemas.openxmlformats.org/officeDocument/2006/relationships" id="257" r:id="Rae7bf47ddf304b83"/>
-    <p:sldId xmlns:r="http://schemas.openxmlformats.org/officeDocument/2006/relationships" id="258" r:id="R48df828233ef4034"/>
-    <p:sldId xmlns:r="http://schemas.openxmlformats.org/officeDocument/2006/relationships" id="259" r:id="Rba9684c71aa64455"/>
-    <p:sldId xmlns:r="http://schemas.openxmlformats.org/officeDocument/2006/relationships" id="260" r:id="R5e7ee396884e4ab9"/>
-    <p:sldId xmlns:r="http://schemas.openxmlformats.org/officeDocument/2006/relationships" id="261" r:id="Rcb01ef3fe8b64f4e"/>
-    <p:sldId xmlns:r="http://schemas.openxmlformats.org/officeDocument/2006/relationships" id="262" r:id="R414f38d5fbd84177"/>
-    <p:sldId xmlns:r="http://schemas.openxmlformats.org/officeDocument/2006/relationships" id="263" r:id="Rc1d02bd747704c4d"/>
-    <p:sldId xmlns:r="http://schemas.openxmlformats.org/officeDocument/2006/relationships" id="264" r:id="R607040cc09a545cb"/>
-    <p:sldId xmlns:r="http://schemas.openxmlformats.org/officeDocument/2006/relationships" id="265" r:id="R0f92758f8f554100"/>
+    <p:sldId xmlns:r="http://schemas.openxmlformats.org/officeDocument/2006/relationships" id="256" r:id="Rbef3f7b1d88d4936"/>
+    <p:sldId xmlns:r="http://schemas.openxmlformats.org/officeDocument/2006/relationships" id="257" r:id="Rc63ce398935d4587"/>
+    <p:sldId xmlns:r="http://schemas.openxmlformats.org/officeDocument/2006/relationships" id="258" r:id="R7de4ea6d56a04d65"/>
+    <p:sldId xmlns:r="http://schemas.openxmlformats.org/officeDocument/2006/relationships" id="259" r:id="R03604e8cbfc44b1b"/>
+    <p:sldId xmlns:r="http://schemas.openxmlformats.org/officeDocument/2006/relationships" id="260" r:id="R7ab6f63b143a40b5"/>
+    <p:sldId xmlns:r="http://schemas.openxmlformats.org/officeDocument/2006/relationships" id="261" r:id="R8f98af2f496a4e1b"/>
+    <p:sldId xmlns:r="http://schemas.openxmlformats.org/officeDocument/2006/relationships" id="262" r:id="R9de79831a5db482d"/>
+    <p:sldId xmlns:r="http://schemas.openxmlformats.org/officeDocument/2006/relationships" id="263" r:id="Rdc9434549cd2495b"/>
+    <p:sldId xmlns:r="http://schemas.openxmlformats.org/officeDocument/2006/relationships" id="264" r:id="Rdf5da1fb234e4f61"/>
+    <p:sldId xmlns:r="http://schemas.openxmlformats.org/officeDocument/2006/relationships" id="265" r:id="R340d085f20e64cc9"/>
   </p:sldIdLst>
   <p:sldSz cx="12192000" cy="6858000"/>
   <p:notesSz cx="6858000" cy="9144000"/>
@@ -167,9 +167,9 @@
 </file>
 
 <file path=ppt/notesMasters/theme/theme3.xml><?xml version="1.0" encoding="utf-8"?>
-<a:theme xmlns:a="http://schemas.openxmlformats.org/drawingml/2006/main" name="ChatGPT">
+<a:theme xmlns:a="http://schemas.openxmlformats.org/drawingml/2006/main" name="Cr3dX">
   <a:themeElements>
-    <a:clrScheme name="ChatGPT">
+    <a:clrScheme name="Cr3dX">
       <a:dk1>
         <a:srgbClr val="000000"/>
       </a:dk1>
@@ -219,7 +219,7 @@
         <a:cs typeface="Calibri"/>
       </a:minorFont>
     </a:fontScheme>
-    <a:fmtScheme name="ChatGPT">
+    <a:fmtScheme name="Cr3dX">
       <a:fillStyleLst>
         <a:solidFill>
           <a:schemeClr val="phClr"/>
@@ -382,6 +382,9 @@
                 <a:spcPct val="100000"/>
               </a:lnSpc>
               <a:buNone/>
+              <a:tabLst>
+                <a:tab pos="0" algn="l"/>
+              </a:tabLst>
             </a:pPr>
             <a:r>
               <a:rPr sz="2000" b="0" u="none">
@@ -409,6 +412,9 @@
                 <a:spcPct val="100000"/>
               </a:lnSpc>
               <a:buNone/>
+              <a:tabLst>
+                <a:tab pos="0" algn="l"/>
+              </a:tabLst>
             </a:pPr>
             <a:r>
               <a:rPr sz="2000" b="0" u="none">
@@ -436,6 +442,9 @@
                 <a:spcPct val="100000"/>
               </a:lnSpc>
               <a:buNone/>
+              <a:tabLst>
+                <a:tab pos="0" algn="l"/>
+              </a:tabLst>
             </a:pPr>
             <a:r>
               <a:rPr sz="2000" b="0" u="none">
@@ -528,6 +537,9 @@
                 <a:spcPct val="100000"/>
               </a:lnSpc>
               <a:buNone/>
+              <a:tabLst>
+                <a:tab pos="0" algn="l"/>
+              </a:tabLst>
             </a:pPr>
             <a:r>
               <a:rPr sz="2000" b="0" u="none">
@@ -555,6 +567,9 @@
                 <a:spcPct val="100000"/>
               </a:lnSpc>
               <a:buNone/>
+              <a:tabLst>
+                <a:tab pos="0" algn="l"/>
+              </a:tabLst>
             </a:pPr>
             <a:r>
               <a:rPr sz="2000" b="0" u="none">
@@ -582,6 +597,9 @@
                 <a:spcPct val="100000"/>
               </a:lnSpc>
               <a:buNone/>
+              <a:tabLst>
+                <a:tab pos="0" algn="l"/>
+              </a:tabLst>
             </a:pPr>
             <a:r>
               <a:rPr sz="2000" b="0" u="none">
@@ -609,6 +627,9 @@
                 <a:spcPct val="100000"/>
               </a:lnSpc>
               <a:buNone/>
+              <a:tabLst>
+                <a:tab pos="0" algn="l"/>
+              </a:tabLst>
             </a:pPr>
             <a:r>
               <a:rPr sz="2000" b="0" u="none">
@@ -636,6 +657,9 @@
                 <a:spcPct val="100000"/>
               </a:lnSpc>
               <a:buNone/>
+              <a:tabLst>
+                <a:tab pos="0" algn="l"/>
+              </a:tabLst>
             </a:pPr>
             <a:r>
               <a:rPr sz="2000" b="0" u="none">
@@ -728,6 +752,9 @@
                 <a:spcPct val="100000"/>
               </a:lnSpc>
               <a:buNone/>
+              <a:tabLst>
+                <a:tab pos="0" algn="l"/>
+              </a:tabLst>
             </a:pPr>
             <a:r>
               <a:rPr sz="2000" b="0" u="none">
@@ -755,6 +782,9 @@
                 <a:spcPct val="100000"/>
               </a:lnSpc>
               <a:buNone/>
+              <a:tabLst>
+                <a:tab pos="0" algn="l"/>
+              </a:tabLst>
             </a:pPr>
             <a:r>
               <a:rPr sz="2000" b="0" u="none">
@@ -847,6 +877,9 @@
                 <a:spcPct val="100000"/>
               </a:lnSpc>
               <a:buNone/>
+              <a:tabLst>
+                <a:tab pos="0" algn="l"/>
+              </a:tabLst>
             </a:pPr>
             <a:r>
               <a:rPr sz="2000" b="0" u="none">
@@ -874,6 +907,9 @@
                 <a:spcPct val="100000"/>
               </a:lnSpc>
               <a:buNone/>
+              <a:tabLst>
+                <a:tab pos="0" algn="l"/>
+              </a:tabLst>
             </a:pPr>
             <a:r>
               <a:rPr sz="2000" b="0" u="none">
@@ -901,6 +937,9 @@
                 <a:spcPct val="100000"/>
               </a:lnSpc>
               <a:buNone/>
+              <a:tabLst>
+                <a:tab pos="0" algn="l"/>
+              </a:tabLst>
             </a:pPr>
             <a:r>
               <a:rPr sz="2000" b="0" u="none">
@@ -993,6 +1032,9 @@
                 <a:spcPct val="100000"/>
               </a:lnSpc>
               <a:buNone/>
+              <a:tabLst>
+                <a:tab pos="0" algn="l"/>
+              </a:tabLst>
             </a:pPr>
             <a:r>
               <a:rPr sz="2000" b="0" u="none">
@@ -1020,6 +1062,9 @@
                 <a:spcPct val="100000"/>
               </a:lnSpc>
               <a:buNone/>
+              <a:tabLst>
+                <a:tab pos="0" algn="l"/>
+              </a:tabLst>
             </a:pPr>
             <a:r>
               <a:rPr sz="2000" b="0" u="none">
@@ -1047,6 +1092,9 @@
                 <a:spcPct val="100000"/>
               </a:lnSpc>
               <a:buNone/>
+              <a:tabLst>
+                <a:tab pos="0" algn="l"/>
+              </a:tabLst>
             </a:pPr>
             <a:r>
               <a:rPr sz="2000" b="0" u="none">
@@ -1139,6 +1187,9 @@
                 <a:spcPct val="100000"/>
               </a:lnSpc>
               <a:buNone/>
+              <a:tabLst>
+                <a:tab pos="0" algn="l"/>
+              </a:tabLst>
             </a:pPr>
             <a:r>
               <a:rPr sz="2000" b="0" u="none">
@@ -1166,6 +1217,9 @@
                 <a:spcPct val="100000"/>
               </a:lnSpc>
               <a:buNone/>
+              <a:tabLst>
+                <a:tab pos="0" algn="l"/>
+              </a:tabLst>
             </a:pPr>
             <a:r>
               <a:rPr sz="2000" b="0" u="none">
@@ -1193,6 +1247,9 @@
                 <a:spcPct val="100000"/>
               </a:lnSpc>
               <a:buNone/>
+              <a:tabLst>
+                <a:tab pos="0" algn="l"/>
+              </a:tabLst>
             </a:pPr>
             <a:r>
               <a:rPr sz="2000" b="0" u="none">
@@ -1285,6 +1342,9 @@
                 <a:spcPct val="100000"/>
               </a:lnSpc>
               <a:buNone/>
+              <a:tabLst>
+                <a:tab pos="0" algn="l"/>
+              </a:tabLst>
             </a:pPr>
             <a:r>
               <a:rPr sz="2000" b="0" u="none">
@@ -1312,6 +1372,9 @@
                 <a:spcPct val="100000"/>
               </a:lnSpc>
               <a:buNone/>
+              <a:tabLst>
+                <a:tab pos="0" algn="l"/>
+              </a:tabLst>
             </a:pPr>
             <a:r>
               <a:rPr sz="2000" b="0" u="none">
@@ -1404,6 +1467,9 @@
                 <a:spcPct val="100000"/>
               </a:lnSpc>
               <a:buNone/>
+              <a:tabLst>
+                <a:tab pos="0" algn="l"/>
+              </a:tabLst>
             </a:pPr>
             <a:r>
               <a:rPr sz="2000" b="0" u="none">
@@ -1431,6 +1497,9 @@
                 <a:spcPct val="100000"/>
               </a:lnSpc>
               <a:buNone/>
+              <a:tabLst>
+                <a:tab pos="0" algn="l"/>
+              </a:tabLst>
             </a:pPr>
             <a:r>
               <a:rPr sz="2000" b="0" u="none">
@@ -1458,6 +1527,9 @@
                 <a:spcPct val="100000"/>
               </a:lnSpc>
               <a:buNone/>
+              <a:tabLst>
+                <a:tab pos="0" algn="l"/>
+              </a:tabLst>
             </a:pPr>
             <a:r>
               <a:rPr sz="2000" b="0" u="none">
@@ -1550,6 +1622,9 @@
                 <a:spcPct val="100000"/>
               </a:lnSpc>
               <a:buNone/>
+              <a:tabLst>
+                <a:tab pos="0" algn="l"/>
+              </a:tabLst>
             </a:pPr>
             <a:r>
               <a:rPr sz="2000" b="0" u="none">
@@ -1577,6 +1652,9 @@
                 <a:spcPct val="100000"/>
               </a:lnSpc>
               <a:buNone/>
+              <a:tabLst>
+                <a:tab pos="0" algn="l"/>
+              </a:tabLst>
             </a:pPr>
             <a:r>
               <a:rPr sz="2000" b="0" u="none">
@@ -1604,6 +1682,9 @@
                 <a:spcPct val="100000"/>
               </a:lnSpc>
               <a:buNone/>
+              <a:tabLst>
+                <a:tab pos="0" algn="l"/>
+              </a:tabLst>
             </a:pPr>
             <a:r>
               <a:rPr sz="2000" b="0" u="none">
@@ -1631,6 +1712,9 @@
                 <a:spcPct val="100000"/>
               </a:lnSpc>
               <a:buNone/>
+              <a:tabLst>
+                <a:tab pos="0" algn="l"/>
+              </a:tabLst>
             </a:pPr>
             <a:r>
               <a:rPr sz="2000" b="0" u="none">
@@ -1723,6 +1807,9 @@
                 <a:spcPct val="100000"/>
               </a:lnSpc>
               <a:buNone/>
+              <a:tabLst>
+                <a:tab pos="0" algn="l"/>
+              </a:tabLst>
             </a:pPr>
             <a:r>
               <a:rPr sz="2000" b="0" u="none">
@@ -1750,6 +1837,9 @@
                 <a:spcPct val="100000"/>
               </a:lnSpc>
               <a:buNone/>
+              <a:tabLst>
+                <a:tab pos="0" algn="l"/>
+              </a:tabLst>
             </a:pPr>
             <a:r>
               <a:rPr sz="2000" b="0" u="none">
@@ -1777,6 +1867,9 @@
                 <a:spcPct val="100000"/>
               </a:lnSpc>
               <a:buNone/>
+              <a:tabLst>
+                <a:tab pos="0" algn="l"/>
+              </a:tabLst>
             </a:pPr>
             <a:r>
               <a:rPr sz="2000" b="0" u="none">
@@ -1842,7 +1935,7 @@
           <p:cNvPr id="4" name="PlaceHolder 1">
             <a:extLst xmlns:a="http://schemas.openxmlformats.org/drawingml/2006/main">
               <a:ext uri="{FF2B5EF4-FFF2-40B4-BE49-F238E27FC236}">
-                <a16:creationId xmlns:a16="http://schemas.microsoft.com/office/drawing/2014/main" id="{F1226017-8C51-4D5D-878B-3E3BBD85A690}"/>
+                <a16:creationId xmlns:a16="http://schemas.microsoft.com/office/drawing/2014/main" id="{7971A2BA-E585-4C5F-9D2F-858E0AA92B7B}"/>
               </a:ext>
             </a:extLst>
           </p:cNvPr>
@@ -1855,8 +1948,8 @@
         </p:nvSpPr>
         <p:spPr>
           <a:xfrm xmlns:a="http://schemas.openxmlformats.org/drawingml/2006/main">
-            <a:off x="609480" y="273600"/>
-            <a:ext cx="10972440" cy="1144800"/>
+            <a:off x="609480" y="502920"/>
+            <a:ext cx="10972080" cy="686160"/>
           </a:xfrm>
           <a:prstGeom xmlns:a="http://schemas.openxmlformats.org/drawingml/2006/main" prst="rect">
             <a:avLst/>
@@ -1877,6 +1970,9 @@
                 <a:spcPct val="90000"/>
               </a:lnSpc>
               <a:buNone/>
+              <a:tabLst>
+                <a:tab pos="0" algn="l"/>
+              </a:tabLst>
             </a:pPr>
             <a:endParaRPr sz="4400" b="0" u="none">
               <a:solidFill>
@@ -1894,7 +1990,7 @@
           <p:cNvPr id="5" name="PlaceHolder 2">
             <a:extLst xmlns:a="http://schemas.openxmlformats.org/drawingml/2006/main">
               <a:ext uri="{FF2B5EF4-FFF2-40B4-BE49-F238E27FC236}">
-                <a16:creationId xmlns:a16="http://schemas.microsoft.com/office/drawing/2014/main" id="{E510F0F6-6DA3-4B70-A014-CB6158B15889}"/>
+                <a16:creationId xmlns:a16="http://schemas.microsoft.com/office/drawing/2014/main" id="{01C6CCF4-B314-47C7-A171-EB92C3C741F6}"/>
               </a:ext>
             </a:extLst>
           </p:cNvPr>
@@ -1907,8 +2003,8 @@
         </p:nvSpPr>
         <p:spPr>
           <a:xfrm xmlns:a="http://schemas.openxmlformats.org/drawingml/2006/main">
-            <a:off x="609480" y="1604520"/>
-            <a:ext cx="10972440" cy="3977280"/>
+            <a:off x="609480" y="3364920"/>
+            <a:ext cx="10972080" cy="456120"/>
           </a:xfrm>
           <a:prstGeom xmlns:a="http://schemas.openxmlformats.org/drawingml/2006/main" prst="rect">
             <a:avLst/>
@@ -1967,7 +2063,7 @@
           <p:cNvPr id="2" name="PlaceHolder 1">
             <a:extLst xmlns:a="http://schemas.openxmlformats.org/drawingml/2006/main">
               <a:ext uri="{FF2B5EF4-FFF2-40B4-BE49-F238E27FC236}">
-                <a16:creationId xmlns:a16="http://schemas.microsoft.com/office/drawing/2014/main" id="{D809A119-9A4A-4FC1-8E23-053FBFBB8D31}"/>
+                <a16:creationId xmlns:a16="http://schemas.microsoft.com/office/drawing/2014/main" id="{B11FBF1E-7B94-40F5-B234-C4BB7B8135B1}"/>
               </a:ext>
             </a:extLst>
           </p:cNvPr>
@@ -1980,8 +2076,8 @@
         </p:nvSpPr>
         <p:spPr>
           <a:xfrm xmlns:a="http://schemas.openxmlformats.org/drawingml/2006/main">
-            <a:off x="609480" y="273600"/>
-            <a:ext cx="10972440" cy="1144800"/>
+            <a:off x="609480" y="543960"/>
+            <a:ext cx="10972080" cy="603720"/>
           </a:xfrm>
           <a:prstGeom xmlns:a="http://schemas.openxmlformats.org/drawingml/2006/main" prst="rect">
             <a:avLst/>
@@ -1993,7 +2089,7 @@
         </p:spPr>
         <p:txBody>
           <a:bodyPr xmlns:a="http://schemas.openxmlformats.org/drawingml/2006/main" lIns="0" tIns="0" rIns="0" bIns="0" anchor="ctr">
-            <a:noAutofit/>
+            <a:spAutoFit/>
           </a:bodyPr>
           <a:lstStyle xmlns:a="http://schemas.openxmlformats.org/drawingml/2006/main">
             <a:lvl1pPr indent="0" algn="l">
@@ -2001,6 +2097,9 @@
                 <a:spcPct val="90000"/>
               </a:lnSpc>
               <a:buNone/>
+              <a:tabLst>
+                <a:tab pos="0" algn="l"/>
+              </a:tabLst>
               <a:defRPr sz="4400" b="0" u="none">
                 <a:solidFill>
                   <a:schemeClr val="dk1"/>
@@ -2017,6 +2116,9 @@
                 <a:spcPct val="90000"/>
               </a:lnSpc>
               <a:buNone/>
+              <a:tabLst>
+                <a:tab pos="0" algn="l"/>
+              </a:tabLst>
             </a:pPr>
             <a:r>
               <a:rPr sz="4400" b="0" u="none">
@@ -2045,7 +2147,7 @@
           <p:cNvPr id="3" name="PlaceHolder 2">
             <a:extLst xmlns:a="http://schemas.openxmlformats.org/drawingml/2006/main">
               <a:ext uri="{FF2B5EF4-FFF2-40B4-BE49-F238E27FC236}">
-                <a16:creationId xmlns:a16="http://schemas.microsoft.com/office/drawing/2014/main" id="{7A76F5D6-DD45-47DF-9A90-F1254488E094}"/>
+                <a16:creationId xmlns:a16="http://schemas.microsoft.com/office/drawing/2014/main" id="{7A3DD324-B8E8-4D11-A9AE-DBCB20F6F680}"/>
               </a:ext>
             </a:extLst>
           </p:cNvPr>
@@ -2230,7 +2332,7 @@
             </a:lvl7pPr>
           </a:lstStyle>
           <a:p xmlns:a="http://schemas.openxmlformats.org/drawingml/2006/main">
-            <a:pPr marL="432000" indent="-324000" algn="l">
+            <a:pPr indent="-324000" algn="l">
               <a:lnSpc>
                 <a:spcPct val="90000"/>
               </a:lnSpc>
@@ -2480,7 +2582,7 @@
   </p:cSld>
   <p:clrMap bg1="lt1" tx1="dk1" bg2="lt2" tx2="dk2" accent1="accent1" accent2="accent2" accent3="accent3" accent4="accent4" accent5="accent5" accent6="accent6" hlink="hlink" folHlink="folHlink"/>
   <p:sldLayoutIdLst>
-    <p:sldLayoutId xmlns:r="http://schemas.openxmlformats.org/officeDocument/2006/relationships" id="2147483649" r:id="Rdbb4536b314a4afc"/>
+    <p:sldLayoutId xmlns:r="http://schemas.openxmlformats.org/officeDocument/2006/relationships" id="2147483649" r:id="R67497f80914d4ba5"/>
   </p:sldLayoutIdLst>
 </p:sldMaster>
 </file>
@@ -2681,7 +2783,7 @@
           <p:cNvPr id="12" name="">
             <a:extLst xmlns:a="http://schemas.openxmlformats.org/drawingml/2006/main">
               <a:ext uri="{FF2B5EF4-FFF2-40B4-BE49-F238E27FC236}">
-                <a16:creationId xmlns:a16="http://schemas.microsoft.com/office/drawing/2014/main" id="{FB1FC49B-851A-4805-B3BC-6554BF3BB483}"/>
+                <a16:creationId xmlns:a16="http://schemas.microsoft.com/office/drawing/2014/main" id="{229B4484-53D6-498D-8E43-5EE2D9118F5D}"/>
               </a:ext>
             </a:extLst>
           </p:cNvPr>
@@ -2693,7 +2795,7 @@
         <p:spPr>
           <a:xfrm xmlns:a="http://schemas.openxmlformats.org/drawingml/2006/main">
             <a:off x="0" y="0"/>
-            <a:ext cx="12191760" cy="56880"/>
+            <a:ext cx="12191400" cy="56520"/>
           </a:xfrm>
           <a:prstGeom xmlns:a="http://schemas.openxmlformats.org/drawingml/2006/main" prst="rect">
             <a:avLst/>
@@ -2733,7 +2835,7 @@
           <p:cNvPr id="13" name="">
             <a:extLst xmlns:a="http://schemas.openxmlformats.org/drawingml/2006/main">
               <a:ext uri="{FF2B5EF4-FFF2-40B4-BE49-F238E27FC236}">
-                <a16:creationId xmlns:a16="http://schemas.microsoft.com/office/drawing/2014/main" id="{27DB581C-2B12-476A-90D1-8305C059CF0D}"/>
+                <a16:creationId xmlns:a16="http://schemas.microsoft.com/office/drawing/2014/main" id="{0A7A427B-D31F-41B0-8316-AFC9FA090F81}"/>
               </a:ext>
             </a:extLst>
           </p:cNvPr>
@@ -2745,7 +2847,7 @@
         <p:spPr>
           <a:xfrm xmlns:a="http://schemas.openxmlformats.org/drawingml/2006/main">
             <a:off x="9906120" y="1066680"/>
-            <a:ext cx="906480" cy="906480"/>
+            <a:ext cx="906120" cy="906120"/>
           </a:xfrm>
           <a:prstGeom xmlns:a="http://schemas.openxmlformats.org/drawingml/2006/main" prst="rect">
             <a:avLst/>
@@ -2785,7 +2887,7 @@
           <p:cNvPr id="14" name="">
             <a:extLst xmlns:a="http://schemas.openxmlformats.org/drawingml/2006/main">
               <a:ext uri="{FF2B5EF4-FFF2-40B4-BE49-F238E27FC236}">
-                <a16:creationId xmlns:a16="http://schemas.microsoft.com/office/drawing/2014/main" id="{F3C76E61-16C2-40C5-BC27-D5C208363D52}"/>
+                <a16:creationId xmlns:a16="http://schemas.microsoft.com/office/drawing/2014/main" id="{A17903AB-DD38-4A19-B5A9-9B41D7A29BC7}"/>
               </a:ext>
             </a:extLst>
           </p:cNvPr>
@@ -2797,7 +2899,7 @@
         <p:spPr>
           <a:xfrm xmlns:a="http://schemas.openxmlformats.org/drawingml/2006/main">
             <a:off x="10132560" y="964800"/>
-            <a:ext cx="906480" cy="906480"/>
+            <a:ext cx="906120" cy="906120"/>
           </a:xfrm>
           <a:prstGeom xmlns:a="http://schemas.openxmlformats.org/drawingml/2006/main" prst="rect">
             <a:avLst/>
@@ -2837,7 +2939,7 @@
           <p:cNvPr id="15" name="">
             <a:extLst xmlns:a="http://schemas.openxmlformats.org/drawingml/2006/main">
               <a:ext uri="{FF2B5EF4-FFF2-40B4-BE49-F238E27FC236}">
-                <a16:creationId xmlns:a16="http://schemas.microsoft.com/office/drawing/2014/main" id="{F9CDCB74-2060-42EA-9103-E88F56E032CA}"/>
+                <a16:creationId xmlns:a16="http://schemas.microsoft.com/office/drawing/2014/main" id="{FC983D13-7FAD-4136-9B58-AEA65F873AFF}"/>
               </a:ext>
             </a:extLst>
           </p:cNvPr>
@@ -2849,7 +2951,7 @@
         <p:spPr>
           <a:xfrm xmlns:a="http://schemas.openxmlformats.org/drawingml/2006/main">
             <a:off x="10386720" y="1547280"/>
-            <a:ext cx="226440" cy="226440"/>
+            <a:ext cx="226080" cy="226080"/>
           </a:xfrm>
           <a:prstGeom xmlns:a="http://schemas.openxmlformats.org/drawingml/2006/main" prst="rect">
             <a:avLst/>
@@ -2889,7 +2991,7 @@
           <p:cNvPr id="16" name="">
             <a:extLst xmlns:a="http://schemas.openxmlformats.org/drawingml/2006/main">
               <a:ext uri="{FF2B5EF4-FFF2-40B4-BE49-F238E27FC236}">
-                <a16:creationId xmlns:a16="http://schemas.microsoft.com/office/drawing/2014/main" id="{D4A459CD-677A-4858-933C-4C32A3EF63CF}"/>
+                <a16:creationId xmlns:a16="http://schemas.microsoft.com/office/drawing/2014/main" id="{DB349956-D1C9-4687-BE00-136FE5F0A9D3}"/>
               </a:ext>
             </a:extLst>
           </p:cNvPr>
@@ -2901,7 +3003,7 @@
         <p:spPr>
           <a:xfrm xmlns:a="http://schemas.openxmlformats.org/drawingml/2006/main">
             <a:off x="666720" y="552600"/>
-            <a:ext cx="6190920" cy="266400"/>
+            <a:ext cx="6190560" cy="266040"/>
           </a:xfrm>
           <a:prstGeom xmlns:a="http://schemas.openxmlformats.org/drawingml/2006/main" prst="rect">
             <a:avLst/>
@@ -2956,7 +3058,7 @@
           <p:cNvPr id="17" name="">
             <a:extLst xmlns:a="http://schemas.openxmlformats.org/drawingml/2006/main">
               <a:ext uri="{FF2B5EF4-FFF2-40B4-BE49-F238E27FC236}">
-                <a16:creationId xmlns:a16="http://schemas.microsoft.com/office/drawing/2014/main" id="{846118A2-FE72-4535-94C8-FDFF161EEC70}"/>
+                <a16:creationId xmlns:a16="http://schemas.microsoft.com/office/drawing/2014/main" id="{D6A2E6F6-2B23-46B1-B492-87476D5C20D1}"/>
               </a:ext>
             </a:extLst>
           </p:cNvPr>
@@ -2968,7 +3070,7 @@
         <p:spPr>
           <a:xfrm xmlns:a="http://schemas.openxmlformats.org/drawingml/2006/main">
             <a:off x="666720" y="1285920"/>
-            <a:ext cx="6857640" cy="1066320"/>
+            <a:ext cx="6857280" cy="1065960"/>
           </a:xfrm>
           <a:prstGeom xmlns:a="http://schemas.openxmlformats.org/drawingml/2006/main" prst="rect">
             <a:avLst/>
@@ -3023,7 +3125,7 @@
           <p:cNvPr id="18" name="">
             <a:extLst xmlns:a="http://schemas.openxmlformats.org/drawingml/2006/main">
               <a:ext uri="{FF2B5EF4-FFF2-40B4-BE49-F238E27FC236}">
-                <a16:creationId xmlns:a16="http://schemas.microsoft.com/office/drawing/2014/main" id="{E852A0B7-F329-49A5-B1C5-8421B080BA89}"/>
+                <a16:creationId xmlns:a16="http://schemas.microsoft.com/office/drawing/2014/main" id="{A6E69458-129F-4AFF-ADB0-114332CC21CF}"/>
               </a:ext>
             </a:extLst>
           </p:cNvPr>
@@ -3035,7 +3137,7 @@
         <p:spPr>
           <a:xfrm xmlns:a="http://schemas.openxmlformats.org/drawingml/2006/main">
             <a:off x="666720" y="2495520"/>
-            <a:ext cx="7238520" cy="1123560"/>
+            <a:ext cx="7238160" cy="1123200"/>
           </a:xfrm>
           <a:prstGeom xmlns:a="http://schemas.openxmlformats.org/drawingml/2006/main" prst="rect">
             <a:avLst/>
@@ -3117,7 +3219,7 @@
           <p:cNvPr id="19" name="">
             <a:extLst xmlns:a="http://schemas.openxmlformats.org/drawingml/2006/main">
               <a:ext uri="{FF2B5EF4-FFF2-40B4-BE49-F238E27FC236}">
-                <a16:creationId xmlns:a16="http://schemas.microsoft.com/office/drawing/2014/main" id="{581E5675-5047-4E66-BD2E-E334F04B1182}"/>
+                <a16:creationId xmlns:a16="http://schemas.microsoft.com/office/drawing/2014/main" id="{F9695007-9660-445C-8D09-334CB7EB87B5}"/>
               </a:ext>
             </a:extLst>
           </p:cNvPr>
@@ -3129,7 +3231,7 @@
         <p:spPr>
           <a:xfrm xmlns:a="http://schemas.openxmlformats.org/drawingml/2006/main">
             <a:off x="685800" y="3943440"/>
-            <a:ext cx="7524360" cy="742680"/>
+            <a:ext cx="7524000" cy="742320"/>
           </a:xfrm>
           <a:prstGeom xmlns:a="http://schemas.openxmlformats.org/drawingml/2006/main" prst="rect">
             <a:avLst/>
@@ -3211,7 +3313,7 @@
           <p:cNvPr id="20" name="">
             <a:extLst xmlns:a="http://schemas.openxmlformats.org/drawingml/2006/main">
               <a:ext uri="{FF2B5EF4-FFF2-40B4-BE49-F238E27FC236}">
-                <a16:creationId xmlns:a16="http://schemas.microsoft.com/office/drawing/2014/main" id="{8A4D01D5-5BBE-4496-8D58-5E7D7CF5BADE}"/>
+                <a16:creationId xmlns:a16="http://schemas.microsoft.com/office/drawing/2014/main" id="{020FA3A4-5BDB-4C14-B9EA-C1D145400091}"/>
               </a:ext>
             </a:extLst>
           </p:cNvPr>
@@ -3223,7 +3325,7 @@
         <p:spPr>
           <a:xfrm xmlns:a="http://schemas.openxmlformats.org/drawingml/2006/main">
             <a:off x="666720" y="5105520"/>
-            <a:ext cx="10839240" cy="9000"/>
+            <a:ext cx="10838880" cy="8640"/>
           </a:xfrm>
           <a:prstGeom xmlns:a="http://schemas.openxmlformats.org/drawingml/2006/main" prst="rect">
             <a:avLst/>
@@ -3263,7 +3365,7 @@
           <p:cNvPr id="21" name="">
             <a:extLst xmlns:a="http://schemas.openxmlformats.org/drawingml/2006/main">
               <a:ext uri="{FF2B5EF4-FFF2-40B4-BE49-F238E27FC236}">
-                <a16:creationId xmlns:a16="http://schemas.microsoft.com/office/drawing/2014/main" id="{E79FB8A0-4E29-44AC-BF7B-1590F680FDCD}"/>
+                <a16:creationId xmlns:a16="http://schemas.microsoft.com/office/drawing/2014/main" id="{5E262355-74F5-4BDD-A973-66E3093B06A6}"/>
               </a:ext>
             </a:extLst>
           </p:cNvPr>
@@ -3275,7 +3377,7 @@
         <p:spPr>
           <a:xfrm xmlns:a="http://schemas.openxmlformats.org/drawingml/2006/main">
             <a:off x="666720" y="5353200"/>
-            <a:ext cx="1523520" cy="209160"/>
+            <a:ext cx="1523160" cy="208800"/>
           </a:xfrm>
           <a:prstGeom xmlns:a="http://schemas.openxmlformats.org/drawingml/2006/main" prst="rect">
             <a:avLst/>
@@ -3330,7 +3432,7 @@
           <p:cNvPr id="22" name="">
             <a:extLst xmlns:a="http://schemas.openxmlformats.org/drawingml/2006/main">
               <a:ext uri="{FF2B5EF4-FFF2-40B4-BE49-F238E27FC236}">
-                <a16:creationId xmlns:a16="http://schemas.microsoft.com/office/drawing/2014/main" id="{79EEC140-C353-4552-833E-F2111C614667}"/>
+                <a16:creationId xmlns:a16="http://schemas.microsoft.com/office/drawing/2014/main" id="{373CCB8D-C4E3-40E5-9CD6-2C04D98738B7}"/>
               </a:ext>
             </a:extLst>
           </p:cNvPr>
@@ -3342,7 +3444,7 @@
         <p:spPr>
           <a:xfrm xmlns:a="http://schemas.openxmlformats.org/drawingml/2006/main">
             <a:off x="666720" y="5581800"/>
-            <a:ext cx="2476080" cy="266400"/>
+            <a:ext cx="2475720" cy="266040"/>
           </a:xfrm>
           <a:prstGeom xmlns:a="http://schemas.openxmlformats.org/drawingml/2006/main" prst="rect">
             <a:avLst/>
@@ -3397,7 +3499,7 @@
           <p:cNvPr id="23" name="">
             <a:extLst xmlns:a="http://schemas.openxmlformats.org/drawingml/2006/main">
               <a:ext uri="{FF2B5EF4-FFF2-40B4-BE49-F238E27FC236}">
-                <a16:creationId xmlns:a16="http://schemas.microsoft.com/office/drawing/2014/main" id="{E33E5C98-F6F4-42F4-BA25-88684DA037EF}"/>
+                <a16:creationId xmlns:a16="http://schemas.microsoft.com/office/drawing/2014/main" id="{CE3CFC37-A819-4D46-900E-9E6AB7E45133}"/>
               </a:ext>
             </a:extLst>
           </p:cNvPr>
@@ -3409,7 +3511,7 @@
         <p:spPr>
           <a:xfrm xmlns:a="http://schemas.openxmlformats.org/drawingml/2006/main">
             <a:off x="6667560" y="5524560"/>
-            <a:ext cx="4838400" cy="323640"/>
+            <a:ext cx="4838040" cy="323280"/>
           </a:xfrm>
           <a:prstGeom xmlns:a="http://schemas.openxmlformats.org/drawingml/2006/main" prst="rect">
             <a:avLst/>
@@ -3445,7 +3547,7 @@
                 <a:latin typeface="Arial"/>
                 <a:ea typeface="Arial"/>
                 <a:cs typeface="Arial"/>
-                <a:hlinkClick xmlns:r="http://schemas.openxmlformats.org/officeDocument/2006/relationships" r:id="Rf8a87c442a154c5a"/>
+                <a:hlinkClick xmlns:r="http://schemas.openxmlformats.org/officeDocument/2006/relationships" r:id="R0478b1120a2448dd"/>
               </a:rPr>
               <a:t>Repository ↗</a:t>
             </a:r>
@@ -3468,7 +3570,7 @@
                 <a:latin typeface="Arial"/>
                 <a:ea typeface="Arial"/>
                 <a:cs typeface="Arial"/>
-                <a:hlinkClick xmlns:r="http://schemas.openxmlformats.org/officeDocument/2006/relationships" r:id="Rc7dbafabbbec495c"/>
+                <a:hlinkClick xmlns:r="http://schemas.openxmlformats.org/officeDocument/2006/relationships" r:id="Rbb113e3cecb04702"/>
               </a:rPr>
               <a:t>Live dashboard ↗</a:t>
             </a:r>
@@ -3488,7 +3590,7 @@
           <p:cNvPr id="24" name="">
             <a:extLst xmlns:a="http://schemas.openxmlformats.org/drawingml/2006/main">
               <a:ext uri="{FF2B5EF4-FFF2-40B4-BE49-F238E27FC236}">
-                <a16:creationId xmlns:a16="http://schemas.microsoft.com/office/drawing/2014/main" id="{F5A3B624-3735-4723-9A14-9314706625A6}"/>
+                <a16:creationId xmlns:a16="http://schemas.microsoft.com/office/drawing/2014/main" id="{08F4EDF8-0AD5-4BA7-9506-68AF1B3141A2}"/>
               </a:ext>
             </a:extLst>
           </p:cNvPr>
@@ -3500,7 +3602,7 @@
         <p:spPr>
           <a:xfrm xmlns:a="http://schemas.openxmlformats.org/drawingml/2006/main">
             <a:off x="666720" y="6238800"/>
-            <a:ext cx="10839240" cy="228240"/>
+            <a:ext cx="10838880" cy="227880"/>
           </a:xfrm>
           <a:prstGeom xmlns:a="http://schemas.openxmlformats.org/drawingml/2006/main" prst="rect">
             <a:avLst/>
@@ -3553,7 +3655,7 @@
     </p:spTree>
     <p:extLst>
       <p:ext uri="{BB962C8B-B14F-4D97-AF65-F5344CB8AC3E}">
-        <p14:creationId xmlns:p14="http://schemas.microsoft.com/office/powerpoint/2010/main" val="267778588"/>
+        <p14:creationId xmlns:p14="http://schemas.microsoft.com/office/powerpoint/2010/main" val="1845827639"/>
       </p:ext>
     </p:extLst>
   </p:cSld>
@@ -3584,7 +3686,7 @@
           <p:cNvPr id="225" name="">
             <a:extLst xmlns:a="http://schemas.openxmlformats.org/drawingml/2006/main">
               <a:ext uri="{FF2B5EF4-FFF2-40B4-BE49-F238E27FC236}">
-                <a16:creationId xmlns:a16="http://schemas.microsoft.com/office/drawing/2014/main" id="{DA6C85B3-3EAA-4AA6-92EC-E4C4FEE487D9}"/>
+                <a16:creationId xmlns:a16="http://schemas.microsoft.com/office/drawing/2014/main" id="{6C20AAE2-CBCC-46B4-AD51-ABC04C7EB313}"/>
               </a:ext>
             </a:extLst>
           </p:cNvPr>
@@ -3596,7 +3698,7 @@
         <p:spPr>
           <a:xfrm xmlns:a="http://schemas.openxmlformats.org/drawingml/2006/main">
             <a:off x="0" y="0"/>
-            <a:ext cx="12191760" cy="47160"/>
+            <a:ext cx="12191400" cy="46800"/>
           </a:xfrm>
           <a:prstGeom xmlns:a="http://schemas.openxmlformats.org/drawingml/2006/main" prst="rect">
             <a:avLst/>
@@ -3636,7 +3738,7 @@
           <p:cNvPr id="226" name="">
             <a:extLst xmlns:a="http://schemas.openxmlformats.org/drawingml/2006/main">
               <a:ext uri="{FF2B5EF4-FFF2-40B4-BE49-F238E27FC236}">
-                <a16:creationId xmlns:a16="http://schemas.microsoft.com/office/drawing/2014/main" id="{42D270F9-4708-41B1-B28F-59B1DB34A106}"/>
+                <a16:creationId xmlns:a16="http://schemas.microsoft.com/office/drawing/2014/main" id="{3340AE76-CAA4-42AA-9DE3-FFEACA16ABEC}"/>
               </a:ext>
             </a:extLst>
           </p:cNvPr>
@@ -3648,7 +3750,7 @@
         <p:spPr>
           <a:xfrm xmlns:a="http://schemas.openxmlformats.org/drawingml/2006/main">
             <a:off x="590400" y="266760"/>
-            <a:ext cx="4190760" cy="237600"/>
+            <a:ext cx="4190400" cy="237240"/>
           </a:xfrm>
           <a:prstGeom xmlns:a="http://schemas.openxmlformats.org/drawingml/2006/main" prst="rect">
             <a:avLst/>
@@ -3703,7 +3805,7 @@
           <p:cNvPr id="227" name="">
             <a:extLst xmlns:a="http://schemas.openxmlformats.org/drawingml/2006/main">
               <a:ext uri="{FF2B5EF4-FFF2-40B4-BE49-F238E27FC236}">
-                <a16:creationId xmlns:a16="http://schemas.microsoft.com/office/drawing/2014/main" id="{727584A3-668F-4ACD-B7F5-5E09A75CE598}"/>
+                <a16:creationId xmlns:a16="http://schemas.microsoft.com/office/drawing/2014/main" id="{E79CF077-7909-4349-94C5-4080FA7AC9AA}"/>
               </a:ext>
             </a:extLst>
           </p:cNvPr>
@@ -3715,7 +3817,7 @@
         <p:spPr>
           <a:xfrm xmlns:a="http://schemas.openxmlformats.org/drawingml/2006/main">
             <a:off x="11144160" y="266760"/>
-            <a:ext cx="456840" cy="237600"/>
+            <a:ext cx="456480" cy="237240"/>
           </a:xfrm>
           <a:prstGeom xmlns:a="http://schemas.openxmlformats.org/drawingml/2006/main" prst="rect">
             <a:avLst/>
@@ -3770,7 +3872,7 @@
           <p:cNvPr id="228" name="">
             <a:extLst xmlns:a="http://schemas.openxmlformats.org/drawingml/2006/main">
               <a:ext uri="{FF2B5EF4-FFF2-40B4-BE49-F238E27FC236}">
-                <a16:creationId xmlns:a16="http://schemas.microsoft.com/office/drawing/2014/main" id="{ED1E0D44-286C-436D-9516-CC187BEBADAE}"/>
+                <a16:creationId xmlns:a16="http://schemas.microsoft.com/office/drawing/2014/main" id="{71312234-CA88-4C21-A7AF-C6BF5FE7C938}"/>
               </a:ext>
             </a:extLst>
           </p:cNvPr>
@@ -3782,7 +3884,7 @@
         <p:spPr>
           <a:xfrm xmlns:a="http://schemas.openxmlformats.org/drawingml/2006/main">
             <a:off x="590400" y="571680"/>
-            <a:ext cx="11010600" cy="9000"/>
+            <a:ext cx="11010240" cy="8640"/>
           </a:xfrm>
           <a:prstGeom xmlns:a="http://schemas.openxmlformats.org/drawingml/2006/main" prst="rect">
             <a:avLst/>
@@ -3822,7 +3924,7 @@
           <p:cNvPr id="229" name="">
             <a:extLst xmlns:a="http://schemas.openxmlformats.org/drawingml/2006/main">
               <a:ext uri="{FF2B5EF4-FFF2-40B4-BE49-F238E27FC236}">
-                <a16:creationId xmlns:a16="http://schemas.microsoft.com/office/drawing/2014/main" id="{CA4B61F5-ED80-4C10-8C62-6581F1CB49EF}"/>
+                <a16:creationId xmlns:a16="http://schemas.microsoft.com/office/drawing/2014/main" id="{5B45F723-F29D-4891-A914-8A0DCDF57F39}"/>
               </a:ext>
             </a:extLst>
           </p:cNvPr>
@@ -3834,7 +3936,7 @@
         <p:spPr>
           <a:xfrm xmlns:a="http://schemas.openxmlformats.org/drawingml/2006/main">
             <a:off x="590400" y="781200"/>
-            <a:ext cx="11010600" cy="723600"/>
+            <a:ext cx="11010240" cy="723240"/>
           </a:xfrm>
           <a:prstGeom xmlns:a="http://schemas.openxmlformats.org/drawingml/2006/main" prst="rect">
             <a:avLst/>
@@ -3889,7 +3991,7 @@
           <p:cNvPr id="230" name="">
             <a:extLst xmlns:a="http://schemas.openxmlformats.org/drawingml/2006/main">
               <a:ext uri="{FF2B5EF4-FFF2-40B4-BE49-F238E27FC236}">
-                <a16:creationId xmlns:a16="http://schemas.microsoft.com/office/drawing/2014/main" id="{5B02704C-4D86-4BD4-A6BA-B5B59D91543E}"/>
+                <a16:creationId xmlns:a16="http://schemas.microsoft.com/office/drawing/2014/main" id="{FD299199-645B-4BDF-81B6-6406F1082E3A}"/>
               </a:ext>
             </a:extLst>
           </p:cNvPr>
@@ -3901,7 +4003,7 @@
         <p:spPr>
           <a:xfrm xmlns:a="http://schemas.openxmlformats.org/drawingml/2006/main">
             <a:off x="590400" y="1619280"/>
-            <a:ext cx="4000320" cy="228240"/>
+            <a:ext cx="3999960" cy="227880"/>
           </a:xfrm>
           <a:prstGeom xmlns:a="http://schemas.openxmlformats.org/drawingml/2006/main" prst="rect">
             <a:avLst/>
@@ -3956,7 +4058,7 @@
           <p:cNvPr id="231" name="">
             <a:extLst xmlns:a="http://schemas.openxmlformats.org/drawingml/2006/main">
               <a:ext uri="{FF2B5EF4-FFF2-40B4-BE49-F238E27FC236}">
-                <a16:creationId xmlns:a16="http://schemas.microsoft.com/office/drawing/2014/main" id="{F3572A6A-C8F9-4731-B8AD-F5335272864B}"/>
+                <a16:creationId xmlns:a16="http://schemas.microsoft.com/office/drawing/2014/main" id="{09890CD3-9917-41C7-8B5C-DDC17E01A43A}"/>
               </a:ext>
             </a:extLst>
           </p:cNvPr>
@@ -3968,7 +4070,7 @@
         <p:spPr>
           <a:xfrm xmlns:a="http://schemas.openxmlformats.org/drawingml/2006/main">
             <a:off x="590400" y="2324160"/>
-            <a:ext cx="4952520" cy="9000"/>
+            <a:ext cx="4952160" cy="8640"/>
           </a:xfrm>
           <a:prstGeom xmlns:a="http://schemas.openxmlformats.org/drawingml/2006/main" prst="rect">
             <a:avLst/>
@@ -4008,7 +4110,7 @@
           <p:cNvPr id="232" name="">
             <a:extLst xmlns:a="http://schemas.openxmlformats.org/drawingml/2006/main">
               <a:ext uri="{FF2B5EF4-FFF2-40B4-BE49-F238E27FC236}">
-                <a16:creationId xmlns:a16="http://schemas.microsoft.com/office/drawing/2014/main" id="{814D126A-CD58-4501-BEF4-564FD2570A3A}"/>
+                <a16:creationId xmlns:a16="http://schemas.microsoft.com/office/drawing/2014/main" id="{52CF450B-E1DE-4E7D-8EB1-C1DE6ED8F4E0}"/>
               </a:ext>
             </a:extLst>
           </p:cNvPr>
@@ -4020,7 +4122,7 @@
         <p:spPr>
           <a:xfrm xmlns:a="http://schemas.openxmlformats.org/drawingml/2006/main">
             <a:off x="590400" y="1952640"/>
-            <a:ext cx="2714400" cy="304560"/>
+            <a:ext cx="2714040" cy="304200"/>
           </a:xfrm>
           <a:prstGeom xmlns:a="http://schemas.openxmlformats.org/drawingml/2006/main" prst="rect">
             <a:avLst/>
@@ -4038,7 +4140,7 @@
         </p:style>
         <p:txBody>
           <a:bodyPr xmlns:a="http://schemas.openxmlformats.org/drawingml/2006/main" lIns="0" tIns="0" rIns="0" bIns="0" anchor="t">
-            <a:normAutofit fontScale="100000"/>
+            <a:normAutofit/>
           </a:bodyPr>
           <a:lstStyle xmlns:a="http://schemas.openxmlformats.org/drawingml/2006/main"/>
           <a:p xmlns:a="http://schemas.openxmlformats.org/drawingml/2006/main">
@@ -4086,7 +4188,7 @@
           <p:cNvPr id="233" name="">
             <a:extLst xmlns:a="http://schemas.openxmlformats.org/drawingml/2006/main">
               <a:ext uri="{FF2B5EF4-FFF2-40B4-BE49-F238E27FC236}">
-                <a16:creationId xmlns:a16="http://schemas.microsoft.com/office/drawing/2014/main" id="{E2421353-4F91-4B48-9FE9-5F08DCD57828}"/>
+                <a16:creationId xmlns:a16="http://schemas.microsoft.com/office/drawing/2014/main" id="{7DC52F93-60CC-4DD0-8F7C-583681B5A3B4}"/>
               </a:ext>
             </a:extLst>
           </p:cNvPr>
@@ -4098,7 +4200,7 @@
         <p:spPr>
           <a:xfrm xmlns:a="http://schemas.openxmlformats.org/drawingml/2006/main">
             <a:off x="3333600" y="1952640"/>
-            <a:ext cx="1066320" cy="304560"/>
+            <a:ext cx="1065960" cy="304200"/>
           </a:xfrm>
           <a:prstGeom xmlns:a="http://schemas.openxmlformats.org/drawingml/2006/main" prst="rect">
             <a:avLst/>
@@ -4153,7 +4255,7 @@
           <p:cNvPr id="234" name="">
             <a:extLst xmlns:a="http://schemas.openxmlformats.org/drawingml/2006/main">
               <a:ext uri="{FF2B5EF4-FFF2-40B4-BE49-F238E27FC236}">
-                <a16:creationId xmlns:a16="http://schemas.microsoft.com/office/drawing/2014/main" id="{2B06B2B8-41C0-4BEE-BFBF-3F52F21B7455}"/>
+                <a16:creationId xmlns:a16="http://schemas.microsoft.com/office/drawing/2014/main" id="{A60E5CA7-1030-4800-A642-2670F93ABD86}"/>
               </a:ext>
             </a:extLst>
           </p:cNvPr>
@@ -4165,7 +4267,7 @@
         <p:spPr>
           <a:xfrm xmlns:a="http://schemas.openxmlformats.org/drawingml/2006/main">
             <a:off x="4552920" y="1971720"/>
-            <a:ext cx="990360" cy="266400"/>
+            <a:ext cx="990000" cy="266040"/>
           </a:xfrm>
           <a:prstGeom xmlns:a="http://schemas.openxmlformats.org/drawingml/2006/main" prst="rect">
             <a:avLst/>
@@ -4220,7 +4322,7 @@
           <p:cNvPr id="235" name="">
             <a:extLst xmlns:a="http://schemas.openxmlformats.org/drawingml/2006/main">
               <a:ext uri="{FF2B5EF4-FFF2-40B4-BE49-F238E27FC236}">
-                <a16:creationId xmlns:a16="http://schemas.microsoft.com/office/drawing/2014/main" id="{C67259E9-3EB9-457E-A7D4-24D9FD95050E}"/>
+                <a16:creationId xmlns:a16="http://schemas.microsoft.com/office/drawing/2014/main" id="{1499559D-D9D7-404E-987D-62BD6C81FB3A}"/>
               </a:ext>
             </a:extLst>
           </p:cNvPr>
@@ -4232,7 +4334,7 @@
         <p:spPr>
           <a:xfrm xmlns:a="http://schemas.openxmlformats.org/drawingml/2006/main">
             <a:off x="590400" y="2819520"/>
-            <a:ext cx="4952520" cy="9000"/>
+            <a:ext cx="4952160" cy="8640"/>
           </a:xfrm>
           <a:prstGeom xmlns:a="http://schemas.openxmlformats.org/drawingml/2006/main" prst="rect">
             <a:avLst/>
@@ -4272,7 +4374,7 @@
           <p:cNvPr id="236" name="">
             <a:extLst xmlns:a="http://schemas.openxmlformats.org/drawingml/2006/main">
               <a:ext uri="{FF2B5EF4-FFF2-40B4-BE49-F238E27FC236}">
-                <a16:creationId xmlns:a16="http://schemas.microsoft.com/office/drawing/2014/main" id="{6A54DEEE-6086-4039-80AC-403E882E66F4}"/>
+                <a16:creationId xmlns:a16="http://schemas.microsoft.com/office/drawing/2014/main" id="{CCA52C6C-15DB-4E00-9177-7220A619D808}"/>
               </a:ext>
             </a:extLst>
           </p:cNvPr>
@@ -4284,7 +4386,7 @@
         <p:spPr>
           <a:xfrm xmlns:a="http://schemas.openxmlformats.org/drawingml/2006/main">
             <a:off x="590400" y="2448000"/>
-            <a:ext cx="2714400" cy="304560"/>
+            <a:ext cx="2714040" cy="304200"/>
           </a:xfrm>
           <a:prstGeom xmlns:a="http://schemas.openxmlformats.org/drawingml/2006/main" prst="rect">
             <a:avLst/>
@@ -4302,7 +4404,7 @@
         </p:style>
         <p:txBody>
           <a:bodyPr xmlns:a="http://schemas.openxmlformats.org/drawingml/2006/main" lIns="0" tIns="0" rIns="0" bIns="0" anchor="t">
-            <a:normAutofit fontScale="100000"/>
+            <a:normAutofit/>
           </a:bodyPr>
           <a:lstStyle xmlns:a="http://schemas.openxmlformats.org/drawingml/2006/main"/>
           <a:p xmlns:a="http://schemas.openxmlformats.org/drawingml/2006/main">
@@ -4350,7 +4452,7 @@
           <p:cNvPr id="237" name="">
             <a:extLst xmlns:a="http://schemas.openxmlformats.org/drawingml/2006/main">
               <a:ext uri="{FF2B5EF4-FFF2-40B4-BE49-F238E27FC236}">
-                <a16:creationId xmlns:a16="http://schemas.microsoft.com/office/drawing/2014/main" id="{69E00F84-EEB2-48EC-B4B5-987976B6E744}"/>
+                <a16:creationId xmlns:a16="http://schemas.microsoft.com/office/drawing/2014/main" id="{723DF591-D6F1-4F32-B68E-98022C681F9E}"/>
               </a:ext>
             </a:extLst>
           </p:cNvPr>
@@ -4362,7 +4464,7 @@
         <p:spPr>
           <a:xfrm xmlns:a="http://schemas.openxmlformats.org/drawingml/2006/main">
             <a:off x="3333600" y="2448000"/>
-            <a:ext cx="1066320" cy="304560"/>
+            <a:ext cx="1065960" cy="304200"/>
           </a:xfrm>
           <a:prstGeom xmlns:a="http://schemas.openxmlformats.org/drawingml/2006/main" prst="rect">
             <a:avLst/>
@@ -4417,7 +4519,7 @@
           <p:cNvPr id="238" name="">
             <a:extLst xmlns:a="http://schemas.openxmlformats.org/drawingml/2006/main">
               <a:ext uri="{FF2B5EF4-FFF2-40B4-BE49-F238E27FC236}">
-                <a16:creationId xmlns:a16="http://schemas.microsoft.com/office/drawing/2014/main" id="{7036A538-47DA-4B7D-B3B4-956C528F9DC4}"/>
+                <a16:creationId xmlns:a16="http://schemas.microsoft.com/office/drawing/2014/main" id="{884FA5E8-7744-40AA-B1F0-42F988048507}"/>
               </a:ext>
             </a:extLst>
           </p:cNvPr>
@@ -4429,7 +4531,7 @@
         <p:spPr>
           <a:xfrm xmlns:a="http://schemas.openxmlformats.org/drawingml/2006/main">
             <a:off x="4552920" y="2467080"/>
-            <a:ext cx="990360" cy="266400"/>
+            <a:ext cx="990000" cy="266040"/>
           </a:xfrm>
           <a:prstGeom xmlns:a="http://schemas.openxmlformats.org/drawingml/2006/main" prst="rect">
             <a:avLst/>
@@ -4484,7 +4586,7 @@
           <p:cNvPr id="239" name="">
             <a:extLst xmlns:a="http://schemas.openxmlformats.org/drawingml/2006/main">
               <a:ext uri="{FF2B5EF4-FFF2-40B4-BE49-F238E27FC236}">
-                <a16:creationId xmlns:a16="http://schemas.microsoft.com/office/drawing/2014/main" id="{4EC1738D-A941-4370-B3EB-CA5D0B09114D}"/>
+                <a16:creationId xmlns:a16="http://schemas.microsoft.com/office/drawing/2014/main" id="{E8A1AFFB-F448-4A1D-A3AD-5CA36D0E4189}"/>
               </a:ext>
             </a:extLst>
           </p:cNvPr>
@@ -4496,7 +4598,7 @@
         <p:spPr>
           <a:xfrm xmlns:a="http://schemas.openxmlformats.org/drawingml/2006/main">
             <a:off x="590400" y="3314880"/>
-            <a:ext cx="4952520" cy="9000"/>
+            <a:ext cx="4952160" cy="8640"/>
           </a:xfrm>
           <a:prstGeom xmlns:a="http://schemas.openxmlformats.org/drawingml/2006/main" prst="rect">
             <a:avLst/>
@@ -4536,7 +4638,7 @@
           <p:cNvPr id="240" name="">
             <a:extLst xmlns:a="http://schemas.openxmlformats.org/drawingml/2006/main">
               <a:ext uri="{FF2B5EF4-FFF2-40B4-BE49-F238E27FC236}">
-                <a16:creationId xmlns:a16="http://schemas.microsoft.com/office/drawing/2014/main" id="{6403DBBE-BE7A-4391-96EC-EACDF0BFCE75}"/>
+                <a16:creationId xmlns:a16="http://schemas.microsoft.com/office/drawing/2014/main" id="{C12AB736-CE90-4365-BEE4-62A0E4852205}"/>
               </a:ext>
             </a:extLst>
           </p:cNvPr>
@@ -4548,7 +4650,7 @@
         <p:spPr>
           <a:xfrm xmlns:a="http://schemas.openxmlformats.org/drawingml/2006/main">
             <a:off x="590400" y="2943360"/>
-            <a:ext cx="2714400" cy="304560"/>
+            <a:ext cx="2714040" cy="304200"/>
           </a:xfrm>
           <a:prstGeom xmlns:a="http://schemas.openxmlformats.org/drawingml/2006/main" prst="rect">
             <a:avLst/>
@@ -4566,7 +4668,7 @@
         </p:style>
         <p:txBody>
           <a:bodyPr xmlns:a="http://schemas.openxmlformats.org/drawingml/2006/main" lIns="0" tIns="0" rIns="0" bIns="0" anchor="t">
-            <a:normAutofit fontScale="100000"/>
+            <a:normAutofit/>
           </a:bodyPr>
           <a:lstStyle xmlns:a="http://schemas.openxmlformats.org/drawingml/2006/main"/>
           <a:p xmlns:a="http://schemas.openxmlformats.org/drawingml/2006/main">
@@ -4614,7 +4716,7 @@
           <p:cNvPr id="241" name="">
             <a:extLst xmlns:a="http://schemas.openxmlformats.org/drawingml/2006/main">
               <a:ext uri="{FF2B5EF4-FFF2-40B4-BE49-F238E27FC236}">
-                <a16:creationId xmlns:a16="http://schemas.microsoft.com/office/drawing/2014/main" id="{9D9CF182-36EF-4000-8E65-1F393FD2A15B}"/>
+                <a16:creationId xmlns:a16="http://schemas.microsoft.com/office/drawing/2014/main" id="{49C6F1CF-7324-49C9-8770-7022BC29CA60}"/>
               </a:ext>
             </a:extLst>
           </p:cNvPr>
@@ -4626,7 +4728,7 @@
         <p:spPr>
           <a:xfrm xmlns:a="http://schemas.openxmlformats.org/drawingml/2006/main">
             <a:off x="3333600" y="2943360"/>
-            <a:ext cx="1066320" cy="304560"/>
+            <a:ext cx="1065960" cy="304200"/>
           </a:xfrm>
           <a:prstGeom xmlns:a="http://schemas.openxmlformats.org/drawingml/2006/main" prst="rect">
             <a:avLst/>
@@ -4681,7 +4783,7 @@
           <p:cNvPr id="242" name="">
             <a:extLst xmlns:a="http://schemas.openxmlformats.org/drawingml/2006/main">
               <a:ext uri="{FF2B5EF4-FFF2-40B4-BE49-F238E27FC236}">
-                <a16:creationId xmlns:a16="http://schemas.microsoft.com/office/drawing/2014/main" id="{3757533C-6E70-4F27-BD42-DB201FBDC5A6}"/>
+                <a16:creationId xmlns:a16="http://schemas.microsoft.com/office/drawing/2014/main" id="{DADDE1B5-4339-4AC9-A6E1-E18117EDA793}"/>
               </a:ext>
             </a:extLst>
           </p:cNvPr>
@@ -4693,7 +4795,7 @@
         <p:spPr>
           <a:xfrm xmlns:a="http://schemas.openxmlformats.org/drawingml/2006/main">
             <a:off x="4552920" y="2962440"/>
-            <a:ext cx="990360" cy="266400"/>
+            <a:ext cx="990000" cy="266040"/>
           </a:xfrm>
           <a:prstGeom xmlns:a="http://schemas.openxmlformats.org/drawingml/2006/main" prst="rect">
             <a:avLst/>
@@ -4748,7 +4850,7 @@
           <p:cNvPr id="243" name="">
             <a:extLst xmlns:a="http://schemas.openxmlformats.org/drawingml/2006/main">
               <a:ext uri="{FF2B5EF4-FFF2-40B4-BE49-F238E27FC236}">
-                <a16:creationId xmlns:a16="http://schemas.microsoft.com/office/drawing/2014/main" id="{EDD6296C-F19F-4D18-A2C6-319F02003ADE}"/>
+                <a16:creationId xmlns:a16="http://schemas.microsoft.com/office/drawing/2014/main" id="{1C5D5C83-2782-4991-8161-65EDDD40CBBB}"/>
               </a:ext>
             </a:extLst>
           </p:cNvPr>
@@ -4760,7 +4862,7 @@
         <p:spPr>
           <a:xfrm xmlns:a="http://schemas.openxmlformats.org/drawingml/2006/main">
             <a:off x="590400" y="3809880"/>
-            <a:ext cx="4952520" cy="9000"/>
+            <a:ext cx="4952160" cy="8640"/>
           </a:xfrm>
           <a:prstGeom xmlns:a="http://schemas.openxmlformats.org/drawingml/2006/main" prst="rect">
             <a:avLst/>
@@ -4800,7 +4902,7 @@
           <p:cNvPr id="244" name="">
             <a:extLst xmlns:a="http://schemas.openxmlformats.org/drawingml/2006/main">
               <a:ext uri="{FF2B5EF4-FFF2-40B4-BE49-F238E27FC236}">
-                <a16:creationId xmlns:a16="http://schemas.microsoft.com/office/drawing/2014/main" id="{403421F4-D7E2-47B2-A5B4-8652EC1AAA14}"/>
+                <a16:creationId xmlns:a16="http://schemas.microsoft.com/office/drawing/2014/main" id="{89A2DDF0-C20E-44E8-91B4-D20B97139BA0}"/>
               </a:ext>
             </a:extLst>
           </p:cNvPr>
@@ -4812,7 +4914,7 @@
         <p:spPr>
           <a:xfrm xmlns:a="http://schemas.openxmlformats.org/drawingml/2006/main">
             <a:off x="590400" y="3438360"/>
-            <a:ext cx="2714400" cy="304560"/>
+            <a:ext cx="2714040" cy="304200"/>
           </a:xfrm>
           <a:prstGeom xmlns:a="http://schemas.openxmlformats.org/drawingml/2006/main" prst="rect">
             <a:avLst/>
@@ -4830,7 +4932,7 @@
         </p:style>
         <p:txBody>
           <a:bodyPr xmlns:a="http://schemas.openxmlformats.org/drawingml/2006/main" lIns="0" tIns="0" rIns="0" bIns="0" anchor="t">
-            <a:normAutofit fontScale="100000"/>
+            <a:normAutofit/>
           </a:bodyPr>
           <a:lstStyle xmlns:a="http://schemas.openxmlformats.org/drawingml/2006/main"/>
           <a:p xmlns:a="http://schemas.openxmlformats.org/drawingml/2006/main">
@@ -4849,18 +4951,7 @@
                 <a:ea typeface="Arial"/>
                 <a:cs typeface="Arial"/>
               </a:rPr>
-              <a:t>External race</a:t>
-            </a:r>
-            <a:r>
-              <a:rPr sz="1200" b="0" u="none">
-                <a:solidFill>
-                  <a:srgbClr val="EDF5EF"/>
-                </a:solidFill>
-                <a:latin typeface="Arial"/>
-                <a:ea typeface="Arial"/>
-                <a:cs typeface="Arial"/>
-              </a:rPr>
-              <a:t> </a:t>
+              <a:t>External race </a:t>
             </a:r>
             <a:r>
               <a:rPr sz="1200" b="0" u="none">
@@ -4889,7 +4980,7 @@
           <p:cNvPr id="245" name="">
             <a:extLst xmlns:a="http://schemas.openxmlformats.org/drawingml/2006/main">
               <a:ext uri="{FF2B5EF4-FFF2-40B4-BE49-F238E27FC236}">
-                <a16:creationId xmlns:a16="http://schemas.microsoft.com/office/drawing/2014/main" id="{118DA63A-37AF-41C7-AC1B-4A7AD82A0C23}"/>
+                <a16:creationId xmlns:a16="http://schemas.microsoft.com/office/drawing/2014/main" id="{AB9CE328-B037-4573-B03A-214A3D9FEEF9}"/>
               </a:ext>
             </a:extLst>
           </p:cNvPr>
@@ -4901,7 +4992,7 @@
         <p:spPr>
           <a:xfrm xmlns:a="http://schemas.openxmlformats.org/drawingml/2006/main">
             <a:off x="3333600" y="3438360"/>
-            <a:ext cx="1066320" cy="304560"/>
+            <a:ext cx="1065960" cy="304200"/>
           </a:xfrm>
           <a:prstGeom xmlns:a="http://schemas.openxmlformats.org/drawingml/2006/main" prst="rect">
             <a:avLst/>
@@ -4956,7 +5047,7 @@
           <p:cNvPr id="246" name="">
             <a:extLst xmlns:a="http://schemas.openxmlformats.org/drawingml/2006/main">
               <a:ext uri="{FF2B5EF4-FFF2-40B4-BE49-F238E27FC236}">
-                <a16:creationId xmlns:a16="http://schemas.microsoft.com/office/drawing/2014/main" id="{2DBE879F-0570-4158-A6E4-9957E448EF84}"/>
+                <a16:creationId xmlns:a16="http://schemas.microsoft.com/office/drawing/2014/main" id="{9C9DA20B-2771-4E6E-9917-E8189F66DD4A}"/>
               </a:ext>
             </a:extLst>
           </p:cNvPr>
@@ -4968,7 +5059,7 @@
         <p:spPr>
           <a:xfrm xmlns:a="http://schemas.openxmlformats.org/drawingml/2006/main">
             <a:off x="4552920" y="3457440"/>
-            <a:ext cx="990360" cy="266400"/>
+            <a:ext cx="990000" cy="266040"/>
           </a:xfrm>
           <a:prstGeom xmlns:a="http://schemas.openxmlformats.org/drawingml/2006/main" prst="rect">
             <a:avLst/>
@@ -5023,7 +5114,7 @@
           <p:cNvPr id="247" name="">
             <a:extLst xmlns:a="http://schemas.openxmlformats.org/drawingml/2006/main">
               <a:ext uri="{FF2B5EF4-FFF2-40B4-BE49-F238E27FC236}">
-                <a16:creationId xmlns:a16="http://schemas.microsoft.com/office/drawing/2014/main" id="{45140D3B-1256-45F6-97BB-A96DE65DBB8B}"/>
+                <a16:creationId xmlns:a16="http://schemas.microsoft.com/office/drawing/2014/main" id="{44FB81DB-9F51-40D9-80C7-99F6CEE77D5E}"/>
               </a:ext>
             </a:extLst>
           </p:cNvPr>
@@ -5035,7 +5126,7 @@
         <p:spPr>
           <a:xfrm xmlns:a="http://schemas.openxmlformats.org/drawingml/2006/main">
             <a:off x="6191280" y="1619280"/>
-            <a:ext cx="5409720" cy="228240"/>
+            <a:ext cx="5409360" cy="227880"/>
           </a:xfrm>
           <a:prstGeom xmlns:a="http://schemas.openxmlformats.org/drawingml/2006/main" prst="rect">
             <a:avLst/>
@@ -5090,7 +5181,7 @@
           <p:cNvPr id="248" name="">
             <a:extLst xmlns:a="http://schemas.openxmlformats.org/drawingml/2006/main">
               <a:ext uri="{FF2B5EF4-FFF2-40B4-BE49-F238E27FC236}">
-                <a16:creationId xmlns:a16="http://schemas.microsoft.com/office/drawing/2014/main" id="{B27C945B-F2C9-42D7-86D0-72D15A80D63F}"/>
+                <a16:creationId xmlns:a16="http://schemas.microsoft.com/office/drawing/2014/main" id="{C3B69EA6-9506-4233-90F4-B3BCD980B868}"/>
               </a:ext>
             </a:extLst>
           </p:cNvPr>
@@ -5102,7 +5193,7 @@
         <p:spPr>
           <a:xfrm xmlns:a="http://schemas.openxmlformats.org/drawingml/2006/main">
             <a:off x="6191280" y="1952640"/>
-            <a:ext cx="1618920" cy="209160"/>
+            <a:ext cx="1618560" cy="208800"/>
           </a:xfrm>
           <a:prstGeom xmlns:a="http://schemas.openxmlformats.org/drawingml/2006/main" prst="rect">
             <a:avLst/>
@@ -5157,7 +5248,7 @@
           <p:cNvPr id="249" name="">
             <a:extLst xmlns:a="http://schemas.openxmlformats.org/drawingml/2006/main">
               <a:ext uri="{FF2B5EF4-FFF2-40B4-BE49-F238E27FC236}">
-                <a16:creationId xmlns:a16="http://schemas.microsoft.com/office/drawing/2014/main" id="{154888DA-AB52-4DFE-8757-F049DDFA66A6}"/>
+                <a16:creationId xmlns:a16="http://schemas.microsoft.com/office/drawing/2014/main" id="{F9F2BC1E-CC02-4EB3-9CAF-067FB5FDD2E8}"/>
               </a:ext>
             </a:extLst>
           </p:cNvPr>
@@ -5169,7 +5260,7 @@
         <p:spPr>
           <a:xfrm xmlns:a="http://schemas.openxmlformats.org/drawingml/2006/main">
             <a:off x="8001000" y="1952640"/>
-            <a:ext cx="1238040" cy="209160"/>
+            <a:ext cx="1237680" cy="208800"/>
           </a:xfrm>
           <a:prstGeom xmlns:a="http://schemas.openxmlformats.org/drawingml/2006/main" prst="rect">
             <a:avLst/>
@@ -5224,7 +5315,7 @@
           <p:cNvPr id="250" name="">
             <a:extLst xmlns:a="http://schemas.openxmlformats.org/drawingml/2006/main">
               <a:ext uri="{FF2B5EF4-FFF2-40B4-BE49-F238E27FC236}">
-                <a16:creationId xmlns:a16="http://schemas.microsoft.com/office/drawing/2014/main" id="{1C0FF67E-1136-40FE-9C43-C741E7597404}"/>
+                <a16:creationId xmlns:a16="http://schemas.microsoft.com/office/drawing/2014/main" id="{A54578ED-298D-4E3A-AA7D-1BF28F0C6CE3}"/>
               </a:ext>
             </a:extLst>
           </p:cNvPr>
@@ -5236,7 +5327,7 @@
         <p:spPr>
           <a:xfrm xmlns:a="http://schemas.openxmlformats.org/drawingml/2006/main">
             <a:off x="9858240" y="1952640"/>
-            <a:ext cx="1380600" cy="209160"/>
+            <a:ext cx="1380240" cy="208800"/>
           </a:xfrm>
           <a:prstGeom xmlns:a="http://schemas.openxmlformats.org/drawingml/2006/main" prst="rect">
             <a:avLst/>
@@ -5291,7 +5382,7 @@
           <p:cNvPr id="251" name="">
             <a:extLst xmlns:a="http://schemas.openxmlformats.org/drawingml/2006/main">
               <a:ext uri="{FF2B5EF4-FFF2-40B4-BE49-F238E27FC236}">
-                <a16:creationId xmlns:a16="http://schemas.microsoft.com/office/drawing/2014/main" id="{404F110F-2F7A-4F5B-AF5E-A9EF10D19FE6}"/>
+                <a16:creationId xmlns:a16="http://schemas.microsoft.com/office/drawing/2014/main" id="{93AC247F-7A5E-4687-9EB9-F9E8A2386AC0}"/>
               </a:ext>
             </a:extLst>
           </p:cNvPr>
@@ -5303,7 +5394,7 @@
         <p:spPr>
           <a:xfrm xmlns:a="http://schemas.openxmlformats.org/drawingml/2006/main">
             <a:off x="6191280" y="2629080"/>
-            <a:ext cx="5047920" cy="9000"/>
+            <a:ext cx="5047560" cy="8640"/>
           </a:xfrm>
           <a:prstGeom xmlns:a="http://schemas.openxmlformats.org/drawingml/2006/main" prst="rect">
             <a:avLst/>
@@ -5343,7 +5434,7 @@
           <p:cNvPr id="252" name="">
             <a:extLst xmlns:a="http://schemas.openxmlformats.org/drawingml/2006/main">
               <a:ext uri="{FF2B5EF4-FFF2-40B4-BE49-F238E27FC236}">
-                <a16:creationId xmlns:a16="http://schemas.microsoft.com/office/drawing/2014/main" id="{1A05C201-5B57-431B-BFDB-E3504B370B84}"/>
+                <a16:creationId xmlns:a16="http://schemas.microsoft.com/office/drawing/2014/main" id="{07AAD98D-385A-4B41-A8D4-55312062A033}"/>
               </a:ext>
             </a:extLst>
           </p:cNvPr>
@@ -5355,7 +5446,7 @@
         <p:spPr>
           <a:xfrm xmlns:a="http://schemas.openxmlformats.org/drawingml/2006/main">
             <a:off x="6191280" y="2257560"/>
-            <a:ext cx="1618920" cy="285480"/>
+            <a:ext cx="1618560" cy="285120"/>
           </a:xfrm>
           <a:prstGeom xmlns:a="http://schemas.openxmlformats.org/drawingml/2006/main" prst="rect">
             <a:avLst/>
@@ -5410,7 +5501,7 @@
           <p:cNvPr id="253" name="">
             <a:extLst xmlns:a="http://schemas.openxmlformats.org/drawingml/2006/main">
               <a:ext uri="{FF2B5EF4-FFF2-40B4-BE49-F238E27FC236}">
-                <a16:creationId xmlns:a16="http://schemas.microsoft.com/office/drawing/2014/main" id="{195962A2-E05B-4995-85CF-3DCB2C50F511}"/>
+                <a16:creationId xmlns:a16="http://schemas.microsoft.com/office/drawing/2014/main" id="{693986D4-608B-4363-A88E-E77E041BCC8A}"/>
               </a:ext>
             </a:extLst>
           </p:cNvPr>
@@ -5422,7 +5513,7 @@
         <p:spPr>
           <a:xfrm xmlns:a="http://schemas.openxmlformats.org/drawingml/2006/main">
             <a:off x="7715160" y="2257560"/>
-            <a:ext cx="1523520" cy="285480"/>
+            <a:ext cx="1523160" cy="285120"/>
           </a:xfrm>
           <a:prstGeom xmlns:a="http://schemas.openxmlformats.org/drawingml/2006/main" prst="rect">
             <a:avLst/>
@@ -5477,7 +5568,7 @@
           <p:cNvPr id="254" name="">
             <a:extLst xmlns:a="http://schemas.openxmlformats.org/drawingml/2006/main">
               <a:ext uri="{FF2B5EF4-FFF2-40B4-BE49-F238E27FC236}">
-                <a16:creationId xmlns:a16="http://schemas.microsoft.com/office/drawing/2014/main" id="{2AC726CD-9600-4349-84D8-96CAB2E14D7A}"/>
+                <a16:creationId xmlns:a16="http://schemas.microsoft.com/office/drawing/2014/main" id="{969CBFCF-55CD-4AD1-94F9-4319EA205AC2}"/>
               </a:ext>
             </a:extLst>
           </p:cNvPr>
@@ -5489,7 +5580,7 @@
         <p:spPr>
           <a:xfrm xmlns:a="http://schemas.openxmlformats.org/drawingml/2006/main">
             <a:off x="9715680" y="2257560"/>
-            <a:ext cx="1523520" cy="285480"/>
+            <a:ext cx="1523160" cy="285120"/>
           </a:xfrm>
           <a:prstGeom xmlns:a="http://schemas.openxmlformats.org/drawingml/2006/main" prst="rect">
             <a:avLst/>
@@ -5544,7 +5635,7 @@
           <p:cNvPr id="255" name="">
             <a:extLst xmlns:a="http://schemas.openxmlformats.org/drawingml/2006/main">
               <a:ext uri="{FF2B5EF4-FFF2-40B4-BE49-F238E27FC236}">
-                <a16:creationId xmlns:a16="http://schemas.microsoft.com/office/drawing/2014/main" id="{873298ED-BE6B-4F00-AF5A-CF2D85B9B02A}"/>
+                <a16:creationId xmlns:a16="http://schemas.microsoft.com/office/drawing/2014/main" id="{5EA0BBB3-A639-4BCA-AF37-411902D545E0}"/>
               </a:ext>
             </a:extLst>
           </p:cNvPr>
@@ -5556,7 +5647,7 @@
         <p:spPr>
           <a:xfrm xmlns:a="http://schemas.openxmlformats.org/drawingml/2006/main">
             <a:off x="6191280" y="3181320"/>
-            <a:ext cx="5047920" cy="9000"/>
+            <a:ext cx="5047560" cy="8640"/>
           </a:xfrm>
           <a:prstGeom xmlns:a="http://schemas.openxmlformats.org/drawingml/2006/main" prst="rect">
             <a:avLst/>
@@ -5596,7 +5687,7 @@
           <p:cNvPr id="256" name="">
             <a:extLst xmlns:a="http://schemas.openxmlformats.org/drawingml/2006/main">
               <a:ext uri="{FF2B5EF4-FFF2-40B4-BE49-F238E27FC236}">
-                <a16:creationId xmlns:a16="http://schemas.microsoft.com/office/drawing/2014/main" id="{834EA9B5-18D0-4D89-93B0-CCEE57E2D0A6}"/>
+                <a16:creationId xmlns:a16="http://schemas.microsoft.com/office/drawing/2014/main" id="{EB33B416-8948-4D56-981C-92C586C851AA}"/>
               </a:ext>
             </a:extLst>
           </p:cNvPr>
@@ -5608,7 +5699,7 @@
         <p:spPr>
           <a:xfrm xmlns:a="http://schemas.openxmlformats.org/drawingml/2006/main">
             <a:off x="6191280" y="2809800"/>
-            <a:ext cx="1618920" cy="285480"/>
+            <a:ext cx="1618560" cy="285120"/>
           </a:xfrm>
           <a:prstGeom xmlns:a="http://schemas.openxmlformats.org/drawingml/2006/main" prst="rect">
             <a:avLst/>
@@ -5663,7 +5754,7 @@
           <p:cNvPr id="257" name="">
             <a:extLst xmlns:a="http://schemas.openxmlformats.org/drawingml/2006/main">
               <a:ext uri="{FF2B5EF4-FFF2-40B4-BE49-F238E27FC236}">
-                <a16:creationId xmlns:a16="http://schemas.microsoft.com/office/drawing/2014/main" id="{A5426C8E-AE44-49E7-94E1-A6613FDD0DA7}"/>
+                <a16:creationId xmlns:a16="http://schemas.microsoft.com/office/drawing/2014/main" id="{995FFE50-0241-4291-BF7E-9A8F82B8ED01}"/>
               </a:ext>
             </a:extLst>
           </p:cNvPr>
@@ -5675,7 +5766,7 @@
         <p:spPr>
           <a:xfrm xmlns:a="http://schemas.openxmlformats.org/drawingml/2006/main">
             <a:off x="7715160" y="2809800"/>
-            <a:ext cx="1523520" cy="285480"/>
+            <a:ext cx="1523160" cy="285120"/>
           </a:xfrm>
           <a:prstGeom xmlns:a="http://schemas.openxmlformats.org/drawingml/2006/main" prst="rect">
             <a:avLst/>
@@ -5730,7 +5821,7 @@
           <p:cNvPr id="258" name="">
             <a:extLst xmlns:a="http://schemas.openxmlformats.org/drawingml/2006/main">
               <a:ext uri="{FF2B5EF4-FFF2-40B4-BE49-F238E27FC236}">
-                <a16:creationId xmlns:a16="http://schemas.microsoft.com/office/drawing/2014/main" id="{A8A65CCC-22B8-4E8E-AF6A-610F1034F324}"/>
+                <a16:creationId xmlns:a16="http://schemas.microsoft.com/office/drawing/2014/main" id="{68FA6AA8-C5F1-4691-A307-CA01F6629DFE}"/>
               </a:ext>
             </a:extLst>
           </p:cNvPr>
@@ -5742,7 +5833,7 @@
         <p:spPr>
           <a:xfrm xmlns:a="http://schemas.openxmlformats.org/drawingml/2006/main">
             <a:off x="9715680" y="2809800"/>
-            <a:ext cx="1523520" cy="285480"/>
+            <a:ext cx="1523160" cy="285120"/>
           </a:xfrm>
           <a:prstGeom xmlns:a="http://schemas.openxmlformats.org/drawingml/2006/main" prst="rect">
             <a:avLst/>
@@ -5797,7 +5888,7 @@
           <p:cNvPr id="259" name="">
             <a:extLst xmlns:a="http://schemas.openxmlformats.org/drawingml/2006/main">
               <a:ext uri="{FF2B5EF4-FFF2-40B4-BE49-F238E27FC236}">
-                <a16:creationId xmlns:a16="http://schemas.microsoft.com/office/drawing/2014/main" id="{800103B4-AC43-48C6-ADCD-4F47BE37F1A9}"/>
+                <a16:creationId xmlns:a16="http://schemas.microsoft.com/office/drawing/2014/main" id="{FE0A2ABC-A0AA-4B53-9EED-EB6CBDC25111}"/>
               </a:ext>
             </a:extLst>
           </p:cNvPr>
@@ -5809,7 +5900,7 @@
         <p:spPr>
           <a:xfrm xmlns:a="http://schemas.openxmlformats.org/drawingml/2006/main">
             <a:off x="6191280" y="3733920"/>
-            <a:ext cx="5047920" cy="9000"/>
+            <a:ext cx="5047560" cy="8640"/>
           </a:xfrm>
           <a:prstGeom xmlns:a="http://schemas.openxmlformats.org/drawingml/2006/main" prst="rect">
             <a:avLst/>
@@ -5849,7 +5940,7 @@
           <p:cNvPr id="260" name="">
             <a:extLst xmlns:a="http://schemas.openxmlformats.org/drawingml/2006/main">
               <a:ext uri="{FF2B5EF4-FFF2-40B4-BE49-F238E27FC236}">
-                <a16:creationId xmlns:a16="http://schemas.microsoft.com/office/drawing/2014/main" id="{5A04CAE6-6EF5-4E69-A93B-92BDA0E906CC}"/>
+                <a16:creationId xmlns:a16="http://schemas.microsoft.com/office/drawing/2014/main" id="{F5A9293F-9234-4A8F-B573-30C7B436EF5F}"/>
               </a:ext>
             </a:extLst>
           </p:cNvPr>
@@ -5861,7 +5952,7 @@
         <p:spPr>
           <a:xfrm xmlns:a="http://schemas.openxmlformats.org/drawingml/2006/main">
             <a:off x="6191280" y="3362400"/>
-            <a:ext cx="1618920" cy="285480"/>
+            <a:ext cx="1618560" cy="285120"/>
           </a:xfrm>
           <a:prstGeom xmlns:a="http://schemas.openxmlformats.org/drawingml/2006/main" prst="rect">
             <a:avLst/>
@@ -5916,7 +6007,7 @@
           <p:cNvPr id="261" name="">
             <a:extLst xmlns:a="http://schemas.openxmlformats.org/drawingml/2006/main">
               <a:ext uri="{FF2B5EF4-FFF2-40B4-BE49-F238E27FC236}">
-                <a16:creationId xmlns:a16="http://schemas.microsoft.com/office/drawing/2014/main" id="{8C7A3DBE-D0D2-4859-8066-73609807A6C1}"/>
+                <a16:creationId xmlns:a16="http://schemas.microsoft.com/office/drawing/2014/main" id="{03A0ED40-E9BA-4071-8CBF-7853857AB505}"/>
               </a:ext>
             </a:extLst>
           </p:cNvPr>
@@ -5928,7 +6019,7 @@
         <p:spPr>
           <a:xfrm xmlns:a="http://schemas.openxmlformats.org/drawingml/2006/main">
             <a:off x="7715160" y="3362400"/>
-            <a:ext cx="1523520" cy="285480"/>
+            <a:ext cx="1523160" cy="285120"/>
           </a:xfrm>
           <a:prstGeom xmlns:a="http://schemas.openxmlformats.org/drawingml/2006/main" prst="rect">
             <a:avLst/>
@@ -5983,7 +6074,7 @@
           <p:cNvPr id="262" name="">
             <a:extLst xmlns:a="http://schemas.openxmlformats.org/drawingml/2006/main">
               <a:ext uri="{FF2B5EF4-FFF2-40B4-BE49-F238E27FC236}">
-                <a16:creationId xmlns:a16="http://schemas.microsoft.com/office/drawing/2014/main" id="{F70FEA93-CD04-47B4-AF08-7618925FA5BF}"/>
+                <a16:creationId xmlns:a16="http://schemas.microsoft.com/office/drawing/2014/main" id="{E233BAC1-AF24-49B5-8133-1B825EE053D3}"/>
               </a:ext>
             </a:extLst>
           </p:cNvPr>
@@ -5995,7 +6086,7 @@
         <p:spPr>
           <a:xfrm xmlns:a="http://schemas.openxmlformats.org/drawingml/2006/main">
             <a:off x="9715680" y="3362400"/>
-            <a:ext cx="1523520" cy="285480"/>
+            <a:ext cx="1523160" cy="285120"/>
           </a:xfrm>
           <a:prstGeom xmlns:a="http://schemas.openxmlformats.org/drawingml/2006/main" prst="rect">
             <a:avLst/>
@@ -6050,7 +6141,7 @@
           <p:cNvPr id="263" name="">
             <a:extLst xmlns:a="http://schemas.openxmlformats.org/drawingml/2006/main">
               <a:ext uri="{FF2B5EF4-FFF2-40B4-BE49-F238E27FC236}">
-                <a16:creationId xmlns:a16="http://schemas.microsoft.com/office/drawing/2014/main" id="{EDDF23BB-C30E-462C-A178-3015E0CD7E30}"/>
+                <a16:creationId xmlns:a16="http://schemas.microsoft.com/office/drawing/2014/main" id="{1EFA393D-AC2C-4D3A-A526-004A53085DC5}"/>
               </a:ext>
             </a:extLst>
           </p:cNvPr>
@@ -6062,7 +6153,7 @@
         <p:spPr>
           <a:xfrm xmlns:a="http://schemas.openxmlformats.org/drawingml/2006/main">
             <a:off x="6191280" y="3962520"/>
-            <a:ext cx="5047920" cy="685440"/>
+            <a:ext cx="5047560" cy="685080"/>
           </a:xfrm>
           <a:prstGeom xmlns:a="http://schemas.openxmlformats.org/drawingml/2006/main" prst="rect">
             <a:avLst/>
@@ -6117,7 +6208,7 @@
           <p:cNvPr id="264" name="">
             <a:extLst xmlns:a="http://schemas.openxmlformats.org/drawingml/2006/main">
               <a:ext uri="{FF2B5EF4-FFF2-40B4-BE49-F238E27FC236}">
-                <a16:creationId xmlns:a16="http://schemas.microsoft.com/office/drawing/2014/main" id="{D7DF6BA0-AE3F-4B49-8ACA-F506E0983F28}"/>
+                <a16:creationId xmlns:a16="http://schemas.microsoft.com/office/drawing/2014/main" id="{0ACE70EF-52B5-407E-BBAB-6A6BE59DFC7F}"/>
               </a:ext>
             </a:extLst>
           </p:cNvPr>
@@ -6129,7 +6220,7 @@
         <p:spPr>
           <a:xfrm xmlns:a="http://schemas.openxmlformats.org/drawingml/2006/main">
             <a:off x="590400" y="4896000"/>
-            <a:ext cx="11010600" cy="18720"/>
+            <a:ext cx="11010240" cy="18360"/>
           </a:xfrm>
           <a:prstGeom xmlns:a="http://schemas.openxmlformats.org/drawingml/2006/main" prst="rect">
             <a:avLst/>
@@ -6169,7 +6260,7 @@
           <p:cNvPr id="265" name="">
             <a:extLst xmlns:a="http://schemas.openxmlformats.org/drawingml/2006/main">
               <a:ext uri="{FF2B5EF4-FFF2-40B4-BE49-F238E27FC236}">
-                <a16:creationId xmlns:a16="http://schemas.microsoft.com/office/drawing/2014/main" id="{FB7AD693-D93B-44D8-BE12-C2BAD3FD5EB8}"/>
+                <a16:creationId xmlns:a16="http://schemas.microsoft.com/office/drawing/2014/main" id="{68A2FBC9-4A48-4A51-A2C9-3AF6A294D5C2}"/>
               </a:ext>
             </a:extLst>
           </p:cNvPr>
@@ -6181,7 +6272,7 @@
         <p:spPr>
           <a:xfrm xmlns:a="http://schemas.openxmlformats.org/drawingml/2006/main">
             <a:off x="590400" y="5153040"/>
-            <a:ext cx="1428480" cy="228240"/>
+            <a:ext cx="1428120" cy="227880"/>
           </a:xfrm>
           <a:prstGeom xmlns:a="http://schemas.openxmlformats.org/drawingml/2006/main" prst="rect">
             <a:avLst/>
@@ -6236,7 +6327,7 @@
           <p:cNvPr id="266" name="">
             <a:extLst xmlns:a="http://schemas.openxmlformats.org/drawingml/2006/main">
               <a:ext uri="{FF2B5EF4-FFF2-40B4-BE49-F238E27FC236}">
-                <a16:creationId xmlns:a16="http://schemas.microsoft.com/office/drawing/2014/main" id="{FE42C1B9-6C38-467A-96B9-65BC7281F7EB}"/>
+                <a16:creationId xmlns:a16="http://schemas.microsoft.com/office/drawing/2014/main" id="{4B294B09-9BC4-4037-9535-5681E0B3CB09}"/>
               </a:ext>
             </a:extLst>
           </p:cNvPr>
@@ -6248,7 +6339,7 @@
         <p:spPr>
           <a:xfrm xmlns:a="http://schemas.openxmlformats.org/drawingml/2006/main">
             <a:off x="2143080" y="5105520"/>
-            <a:ext cx="9457920" cy="914040"/>
+            <a:ext cx="9457560" cy="913680"/>
           </a:xfrm>
           <a:prstGeom xmlns:a="http://schemas.openxmlformats.org/drawingml/2006/main" prst="rect">
             <a:avLst/>
@@ -6266,7 +6357,7 @@
         </p:style>
         <p:txBody>
           <a:bodyPr xmlns:a="http://schemas.openxmlformats.org/drawingml/2006/main" lIns="0" tIns="0" rIns="0" bIns="0" anchor="t">
-            <a:normAutofit fontScale="100000"/>
+            <a:normAutofit/>
           </a:bodyPr>
           <a:lstStyle xmlns:a="http://schemas.openxmlformats.org/drawingml/2006/main"/>
           <a:p xmlns:a="http://schemas.openxmlformats.org/drawingml/2006/main">
@@ -6284,7 +6375,7 @@
                 <a:latin typeface="Arial"/>
                 <a:ea typeface="Arial"/>
                 <a:cs typeface="Arial"/>
-                <a:hlinkClick xmlns:r="http://schemas.openxmlformats.org/officeDocument/2006/relationships" r:id="R145f5ced60a34977"/>
+                <a:hlinkClick xmlns:r="http://schemas.openxmlformats.org/officeDocument/2006/relationships" r:id="R651bae81764a4f23"/>
               </a:rPr>
               <a:t>Live dashboard ↗</a:t>
             </a:r>
@@ -6307,7 +6398,7 @@
                 <a:latin typeface="Arial"/>
                 <a:ea typeface="Arial"/>
                 <a:cs typeface="Arial"/>
-                <a:hlinkClick xmlns:r="http://schemas.openxmlformats.org/officeDocument/2006/relationships" r:id="R4797ba0d82fd4598"/>
+                <a:hlinkClick xmlns:r="http://schemas.openxmlformats.org/officeDocument/2006/relationships" r:id="Rf60d481bf79d48e5"/>
               </a:rPr>
               <a:t>Repository ↗</a:t>
             </a:r>
@@ -6330,7 +6421,7 @@
                 <a:latin typeface="Arial"/>
                 <a:ea typeface="Arial"/>
                 <a:cs typeface="Arial"/>
-                <a:hlinkClick xmlns:r="http://schemas.openxmlformats.org/officeDocument/2006/relationships" r:id="Rc4238f82fbd14132"/>
+                <a:hlinkClick xmlns:r="http://schemas.openxmlformats.org/officeDocument/2006/relationships" r:id="R79b87ce370594a16"/>
               </a:rPr>
               <a:t>Phase B manifests ↗</a:t>
             </a:r>
@@ -6451,7 +6542,7 @@
                 <a:latin typeface="Arial"/>
                 <a:ea typeface="Arial"/>
                 <a:cs typeface="Arial"/>
-                <a:hlinkClick xmlns:r="http://schemas.openxmlformats.org/officeDocument/2006/relationships" r:id="Rd23a712610ae44aa"/>
+                <a:hlinkClick xmlns:r="http://schemas.openxmlformats.org/officeDocument/2006/relationships" r:id="R9237434f52b14aaa"/>
               </a:rPr>
               <a:t>S5 live runbook ↗</a:t>
             </a:r>
@@ -6474,7 +6565,7 @@
                 <a:latin typeface="Arial"/>
                 <a:ea typeface="Arial"/>
                 <a:cs typeface="Arial"/>
-                <a:hlinkClick xmlns:r="http://schemas.openxmlformats.org/officeDocument/2006/relationships" r:id="Rfb4a6a1301154cd5"/>
+                <a:hlinkClick xmlns:r="http://schemas.openxmlformats.org/officeDocument/2006/relationships" r:id="R9922704af3ca4538"/>
               </a:rPr>
               <a:t>S6 worker runbook ↗</a:t>
             </a:r>
@@ -6494,7 +6585,7 @@
           <p:cNvPr id="267" name="">
             <a:extLst xmlns:a="http://schemas.openxmlformats.org/drawingml/2006/main">
               <a:ext uri="{FF2B5EF4-FFF2-40B4-BE49-F238E27FC236}">
-                <a16:creationId xmlns:a16="http://schemas.microsoft.com/office/drawing/2014/main" id="{3B570401-B91D-4D9B-A434-66770EDF8991}"/>
+                <a16:creationId xmlns:a16="http://schemas.microsoft.com/office/drawing/2014/main" id="{38E63D80-8684-4893-B1B8-CE5775678D56}"/>
               </a:ext>
             </a:extLst>
           </p:cNvPr>
@@ -6506,7 +6597,7 @@
         <p:spPr>
           <a:xfrm xmlns:a="http://schemas.openxmlformats.org/drawingml/2006/main">
             <a:off x="590400" y="6229440"/>
-            <a:ext cx="11010600" cy="228240"/>
+            <a:ext cx="11010240" cy="227880"/>
           </a:xfrm>
           <a:prstGeom xmlns:a="http://schemas.openxmlformats.org/drawingml/2006/main" prst="rect">
             <a:avLst/>
@@ -6559,7 +6650,7 @@
     </p:spTree>
     <p:extLst>
       <p:ext uri="{BB962C8B-B14F-4D97-AF65-F5344CB8AC3E}">
-        <p14:creationId xmlns:p14="http://schemas.microsoft.com/office/powerpoint/2010/main" val="1015560698"/>
+        <p14:creationId xmlns:p14="http://schemas.microsoft.com/office/powerpoint/2010/main" val="24747740"/>
       </p:ext>
     </p:extLst>
   </p:cSld>
@@ -6590,7 +6681,7 @@
           <p:cNvPr id="25" name="">
             <a:extLst xmlns:a="http://schemas.openxmlformats.org/drawingml/2006/main">
               <a:ext uri="{FF2B5EF4-FFF2-40B4-BE49-F238E27FC236}">
-                <a16:creationId xmlns:a16="http://schemas.microsoft.com/office/drawing/2014/main" id="{522BEFB5-A095-4FB0-A566-D04E2001F2FD}"/>
+                <a16:creationId xmlns:a16="http://schemas.microsoft.com/office/drawing/2014/main" id="{41820CB7-6449-4098-9BC2-3488CD34EF21}"/>
               </a:ext>
             </a:extLst>
           </p:cNvPr>
@@ -6602,7 +6693,7 @@
         <p:spPr>
           <a:xfrm xmlns:a="http://schemas.openxmlformats.org/drawingml/2006/main">
             <a:off x="0" y="0"/>
-            <a:ext cx="12191760" cy="47160"/>
+            <a:ext cx="12191400" cy="46800"/>
           </a:xfrm>
           <a:prstGeom xmlns:a="http://schemas.openxmlformats.org/drawingml/2006/main" prst="rect">
             <a:avLst/>
@@ -6642,7 +6733,7 @@
           <p:cNvPr id="26" name="">
             <a:extLst xmlns:a="http://schemas.openxmlformats.org/drawingml/2006/main">
               <a:ext uri="{FF2B5EF4-FFF2-40B4-BE49-F238E27FC236}">
-                <a16:creationId xmlns:a16="http://schemas.microsoft.com/office/drawing/2014/main" id="{9F5D282E-21DA-4C0D-A0B3-F5E8D8A4CEAA}"/>
+                <a16:creationId xmlns:a16="http://schemas.microsoft.com/office/drawing/2014/main" id="{8B645C00-3BD6-4FB2-9136-3C1C37D60797}"/>
               </a:ext>
             </a:extLst>
           </p:cNvPr>
@@ -6654,7 +6745,7 @@
         <p:spPr>
           <a:xfrm xmlns:a="http://schemas.openxmlformats.org/drawingml/2006/main">
             <a:off x="590400" y="266760"/>
-            <a:ext cx="4190760" cy="237600"/>
+            <a:ext cx="4190400" cy="237240"/>
           </a:xfrm>
           <a:prstGeom xmlns:a="http://schemas.openxmlformats.org/drawingml/2006/main" prst="rect">
             <a:avLst/>
@@ -6709,7 +6800,7 @@
           <p:cNvPr id="27" name="">
             <a:extLst xmlns:a="http://schemas.openxmlformats.org/drawingml/2006/main">
               <a:ext uri="{FF2B5EF4-FFF2-40B4-BE49-F238E27FC236}">
-                <a16:creationId xmlns:a16="http://schemas.microsoft.com/office/drawing/2014/main" id="{3884985A-5B10-46FC-B13C-06F756098389}"/>
+                <a16:creationId xmlns:a16="http://schemas.microsoft.com/office/drawing/2014/main" id="{03A87EB4-FC73-4485-9F7F-1319D1C8B110}"/>
               </a:ext>
             </a:extLst>
           </p:cNvPr>
@@ -6721,7 +6812,7 @@
         <p:spPr>
           <a:xfrm xmlns:a="http://schemas.openxmlformats.org/drawingml/2006/main">
             <a:off x="11144160" y="266760"/>
-            <a:ext cx="456840" cy="237600"/>
+            <a:ext cx="456480" cy="237240"/>
           </a:xfrm>
           <a:prstGeom xmlns:a="http://schemas.openxmlformats.org/drawingml/2006/main" prst="rect">
             <a:avLst/>
@@ -6776,7 +6867,7 @@
           <p:cNvPr id="28" name="">
             <a:extLst xmlns:a="http://schemas.openxmlformats.org/drawingml/2006/main">
               <a:ext uri="{FF2B5EF4-FFF2-40B4-BE49-F238E27FC236}">
-                <a16:creationId xmlns:a16="http://schemas.microsoft.com/office/drawing/2014/main" id="{C088F931-BADA-4DD1-801C-9FE83216A320}"/>
+                <a16:creationId xmlns:a16="http://schemas.microsoft.com/office/drawing/2014/main" id="{C07F759D-E0F3-41F2-AF56-B10550EF9AC8}"/>
               </a:ext>
             </a:extLst>
           </p:cNvPr>
@@ -6788,7 +6879,7 @@
         <p:spPr>
           <a:xfrm xmlns:a="http://schemas.openxmlformats.org/drawingml/2006/main">
             <a:off x="590400" y="571680"/>
-            <a:ext cx="11010600" cy="9000"/>
+            <a:ext cx="11010240" cy="8640"/>
           </a:xfrm>
           <a:prstGeom xmlns:a="http://schemas.openxmlformats.org/drawingml/2006/main" prst="rect">
             <a:avLst/>
@@ -6828,7 +6919,7 @@
           <p:cNvPr id="29" name="">
             <a:extLst xmlns:a="http://schemas.openxmlformats.org/drawingml/2006/main">
               <a:ext uri="{FF2B5EF4-FFF2-40B4-BE49-F238E27FC236}">
-                <a16:creationId xmlns:a16="http://schemas.microsoft.com/office/drawing/2014/main" id="{660BDA2C-2908-4B7F-B608-E7BD28580184}"/>
+                <a16:creationId xmlns:a16="http://schemas.microsoft.com/office/drawing/2014/main" id="{61848560-7E81-4323-8EF7-1E7D9D9503B3}"/>
               </a:ext>
             </a:extLst>
           </p:cNvPr>
@@ -6840,7 +6931,7 @@
         <p:spPr>
           <a:xfrm xmlns:a="http://schemas.openxmlformats.org/drawingml/2006/main">
             <a:off x="590400" y="781200"/>
-            <a:ext cx="11010600" cy="723600"/>
+            <a:ext cx="11010240" cy="723240"/>
           </a:xfrm>
           <a:prstGeom xmlns:a="http://schemas.openxmlformats.org/drawingml/2006/main" prst="rect">
             <a:avLst/>
@@ -6895,7 +6986,7 @@
           <p:cNvPr id="30" name="">
             <a:extLst xmlns:a="http://schemas.openxmlformats.org/drawingml/2006/main">
               <a:ext uri="{FF2B5EF4-FFF2-40B4-BE49-F238E27FC236}">
-                <a16:creationId xmlns:a16="http://schemas.microsoft.com/office/drawing/2014/main" id="{44F54818-5275-4798-8287-300054190D6C}"/>
+                <a16:creationId xmlns:a16="http://schemas.microsoft.com/office/drawing/2014/main" id="{1565B09F-FE58-4994-96B0-80382FB2BADB}"/>
               </a:ext>
             </a:extLst>
           </p:cNvPr>
@@ -6907,7 +6998,7 @@
         <p:spPr>
           <a:xfrm xmlns:a="http://schemas.openxmlformats.org/drawingml/2006/main">
             <a:off x="590400" y="1743120"/>
-            <a:ext cx="6190920" cy="1066320"/>
+            <a:ext cx="6190560" cy="1065960"/>
           </a:xfrm>
           <a:prstGeom xmlns:a="http://schemas.openxmlformats.org/drawingml/2006/main" prst="rect">
             <a:avLst/>
@@ -6962,7 +7053,7 @@
           <p:cNvPr id="31" name="">
             <a:extLst xmlns:a="http://schemas.openxmlformats.org/drawingml/2006/main">
               <a:ext uri="{FF2B5EF4-FFF2-40B4-BE49-F238E27FC236}">
-                <a16:creationId xmlns:a16="http://schemas.microsoft.com/office/drawing/2014/main" id="{CDE6DAAA-4411-481D-8583-72BBC76297CD}"/>
+                <a16:creationId xmlns:a16="http://schemas.microsoft.com/office/drawing/2014/main" id="{FF110B36-22A8-45A9-A358-F90D8804CAE3}"/>
               </a:ext>
             </a:extLst>
           </p:cNvPr>
@@ -6974,7 +7065,7 @@
         <p:spPr>
           <a:xfrm xmlns:a="http://schemas.openxmlformats.org/drawingml/2006/main">
             <a:off x="590400" y="3143160"/>
-            <a:ext cx="5905080" cy="1123560"/>
+            <a:ext cx="5904720" cy="1123200"/>
           </a:xfrm>
           <a:prstGeom xmlns:a="http://schemas.openxmlformats.org/drawingml/2006/main" prst="rect">
             <a:avLst/>
@@ -7056,7 +7147,7 @@
           <p:cNvPr id="32" name="">
             <a:extLst xmlns:a="http://schemas.openxmlformats.org/drawingml/2006/main">
               <a:ext uri="{FF2B5EF4-FFF2-40B4-BE49-F238E27FC236}">
-                <a16:creationId xmlns:a16="http://schemas.microsoft.com/office/drawing/2014/main" id="{796D829E-6D06-480D-90D3-BF88E7DEAD37}"/>
+                <a16:creationId xmlns:a16="http://schemas.microsoft.com/office/drawing/2014/main" id="{BE3AFDCE-08E0-4868-9427-3E9D91D33375}"/>
               </a:ext>
             </a:extLst>
           </p:cNvPr>
@@ -7068,7 +7159,7 @@
         <p:spPr>
           <a:xfrm xmlns:a="http://schemas.openxmlformats.org/drawingml/2006/main">
             <a:off x="7124760" y="1809720"/>
-            <a:ext cx="9000" cy="3333240"/>
+            <a:ext cx="8640" cy="3332880"/>
           </a:xfrm>
           <a:prstGeom xmlns:a="http://schemas.openxmlformats.org/drawingml/2006/main" prst="rect">
             <a:avLst/>
@@ -7087,7 +7178,7 @@
           <a:fontRef xmlns:a="http://schemas.openxmlformats.org/drawingml/2006/main" idx="minor"/>
         </p:style>
         <p:txBody>
-          <a:bodyPr xmlns:a="http://schemas.openxmlformats.org/drawingml/2006/main" lIns="90000" tIns="45000" rIns="90000" bIns="45000" anchor="t">
+          <a:bodyPr xmlns:a="http://schemas.openxmlformats.org/drawingml/2006/main" lIns="4320" tIns="45000" rIns="4320" bIns="45000" anchor="t">
             <a:noAutofit/>
           </a:bodyPr>
           <a:lstStyle xmlns:a="http://schemas.openxmlformats.org/drawingml/2006/main"/>
@@ -7108,7 +7199,7 @@
           <p:cNvPr id="33" name="">
             <a:extLst xmlns:a="http://schemas.openxmlformats.org/drawingml/2006/main">
               <a:ext uri="{FF2B5EF4-FFF2-40B4-BE49-F238E27FC236}">
-                <a16:creationId xmlns:a16="http://schemas.microsoft.com/office/drawing/2014/main" id="{EAF70873-0BBD-427B-BDB6-705980BC7E1F}"/>
+                <a16:creationId xmlns:a16="http://schemas.microsoft.com/office/drawing/2014/main" id="{BE021AA2-F3E3-436E-B002-B6FF40388713}"/>
               </a:ext>
             </a:extLst>
           </p:cNvPr>
@@ -7120,7 +7211,7 @@
         <p:spPr>
           <a:xfrm xmlns:a="http://schemas.openxmlformats.org/drawingml/2006/main">
             <a:off x="7620120" y="1809720"/>
-            <a:ext cx="3142800" cy="228240"/>
+            <a:ext cx="3142440" cy="227880"/>
           </a:xfrm>
           <a:prstGeom xmlns:a="http://schemas.openxmlformats.org/drawingml/2006/main" prst="rect">
             <a:avLst/>
@@ -7175,7 +7266,7 @@
           <p:cNvPr id="34" name="">
             <a:extLst xmlns:a="http://schemas.openxmlformats.org/drawingml/2006/main">
               <a:ext uri="{FF2B5EF4-FFF2-40B4-BE49-F238E27FC236}">
-                <a16:creationId xmlns:a16="http://schemas.microsoft.com/office/drawing/2014/main" id="{24492367-F74C-47AA-8B93-066FE26930DB}"/>
+                <a16:creationId xmlns:a16="http://schemas.microsoft.com/office/drawing/2014/main" id="{81B36086-EF4B-46E3-AB04-7F7A46073D16}"/>
               </a:ext>
             </a:extLst>
           </p:cNvPr>
@@ -7187,7 +7278,7 @@
         <p:spPr>
           <a:xfrm xmlns:a="http://schemas.openxmlformats.org/drawingml/2006/main">
             <a:off x="7572240" y="2190600"/>
-            <a:ext cx="3238200" cy="685440"/>
+            <a:ext cx="3237840" cy="685080"/>
           </a:xfrm>
           <a:prstGeom xmlns:a="http://schemas.openxmlformats.org/drawingml/2006/main" prst="rect">
             <a:avLst/>
@@ -7242,7 +7333,7 @@
           <p:cNvPr id="35" name="">
             <a:extLst xmlns:a="http://schemas.openxmlformats.org/drawingml/2006/main">
               <a:ext uri="{FF2B5EF4-FFF2-40B4-BE49-F238E27FC236}">
-                <a16:creationId xmlns:a16="http://schemas.microsoft.com/office/drawing/2014/main" id="{691E7D5D-23BB-46A2-A07B-DE9E56CAF1BD}"/>
+                <a16:creationId xmlns:a16="http://schemas.microsoft.com/office/drawing/2014/main" id="{1980AB96-CA8A-4F06-94AC-B8CC39899818}"/>
               </a:ext>
             </a:extLst>
           </p:cNvPr>
@@ -7254,7 +7345,7 @@
         <p:spPr>
           <a:xfrm xmlns:a="http://schemas.openxmlformats.org/drawingml/2006/main">
             <a:off x="7620120" y="2933640"/>
-            <a:ext cx="3142800" cy="285480"/>
+            <a:ext cx="3142440" cy="285120"/>
           </a:xfrm>
           <a:prstGeom xmlns:a="http://schemas.openxmlformats.org/drawingml/2006/main" prst="rect">
             <a:avLst/>
@@ -7309,7 +7400,7 @@
           <p:cNvPr id="36" name="">
             <a:extLst xmlns:a="http://schemas.openxmlformats.org/drawingml/2006/main">
               <a:ext uri="{FF2B5EF4-FFF2-40B4-BE49-F238E27FC236}">
-                <a16:creationId xmlns:a16="http://schemas.microsoft.com/office/drawing/2014/main" id="{1C76EB3F-99FF-4CD3-8B54-5DCDF8CB7CFF}"/>
+                <a16:creationId xmlns:a16="http://schemas.microsoft.com/office/drawing/2014/main" id="{DF7D6DA7-B0CB-4DEE-BA41-DB6C42EEFFCE}"/>
               </a:ext>
             </a:extLst>
           </p:cNvPr>
@@ -7321,7 +7412,7 @@
         <p:spPr>
           <a:xfrm xmlns:a="http://schemas.openxmlformats.org/drawingml/2006/main">
             <a:off x="7620120" y="3714840"/>
-            <a:ext cx="3142800" cy="228240"/>
+            <a:ext cx="3142440" cy="227880"/>
           </a:xfrm>
           <a:prstGeom xmlns:a="http://schemas.openxmlformats.org/drawingml/2006/main" prst="rect">
             <a:avLst/>
@@ -7376,7 +7467,7 @@
           <p:cNvPr id="37" name="">
             <a:extLst xmlns:a="http://schemas.openxmlformats.org/drawingml/2006/main">
               <a:ext uri="{FF2B5EF4-FFF2-40B4-BE49-F238E27FC236}">
-                <a16:creationId xmlns:a16="http://schemas.microsoft.com/office/drawing/2014/main" id="{49BF9DF5-1380-4AA2-8D96-99631F4B0E35}"/>
+                <a16:creationId xmlns:a16="http://schemas.microsoft.com/office/drawing/2014/main" id="{3240D821-559D-4100-808E-FD5E1BB21F9B}"/>
               </a:ext>
             </a:extLst>
           </p:cNvPr>
@@ -7388,7 +7479,7 @@
         <p:spPr>
           <a:xfrm xmlns:a="http://schemas.openxmlformats.org/drawingml/2006/main">
             <a:off x="7572240" y="3981600"/>
-            <a:ext cx="3238200" cy="875880"/>
+            <a:ext cx="3237840" cy="875520"/>
           </a:xfrm>
           <a:prstGeom xmlns:a="http://schemas.openxmlformats.org/drawingml/2006/main" prst="rect">
             <a:avLst/>
@@ -7443,7 +7534,7 @@
           <p:cNvPr id="38" name="">
             <a:extLst xmlns:a="http://schemas.openxmlformats.org/drawingml/2006/main">
               <a:ext uri="{FF2B5EF4-FFF2-40B4-BE49-F238E27FC236}">
-                <a16:creationId xmlns:a16="http://schemas.microsoft.com/office/drawing/2014/main" id="{A63481D4-A976-4DD7-AA48-CE058C9B83B0}"/>
+                <a16:creationId xmlns:a16="http://schemas.microsoft.com/office/drawing/2014/main" id="{CF34DE16-4401-4A68-A6E1-12AC985F9B5C}"/>
               </a:ext>
             </a:extLst>
           </p:cNvPr>
@@ -7455,7 +7546,7 @@
         <p:spPr>
           <a:xfrm xmlns:a="http://schemas.openxmlformats.org/drawingml/2006/main">
             <a:off x="7620120" y="4800600"/>
-            <a:ext cx="3142800" cy="285480"/>
+            <a:ext cx="3142440" cy="285120"/>
           </a:xfrm>
           <a:prstGeom xmlns:a="http://schemas.openxmlformats.org/drawingml/2006/main" prst="rect">
             <a:avLst/>
@@ -7510,7 +7601,7 @@
           <p:cNvPr id="39" name="">
             <a:extLst xmlns:a="http://schemas.openxmlformats.org/drawingml/2006/main">
               <a:ext uri="{FF2B5EF4-FFF2-40B4-BE49-F238E27FC236}">
-                <a16:creationId xmlns:a16="http://schemas.microsoft.com/office/drawing/2014/main" id="{7A599B27-D753-4EBE-A087-77640AA1E12A}"/>
+                <a16:creationId xmlns:a16="http://schemas.microsoft.com/office/drawing/2014/main" id="{DB61DD34-A31E-4340-A538-0D254E18AEDE}"/>
               </a:ext>
             </a:extLst>
           </p:cNvPr>
@@ -7522,7 +7613,7 @@
         <p:spPr>
           <a:xfrm xmlns:a="http://schemas.openxmlformats.org/drawingml/2006/main">
             <a:off x="590400" y="5695920"/>
-            <a:ext cx="10667520" cy="533160"/>
+            <a:ext cx="10667160" cy="532800"/>
           </a:xfrm>
           <a:prstGeom xmlns:a="http://schemas.openxmlformats.org/drawingml/2006/main" prst="rect">
             <a:avLst/>
@@ -7575,7 +7666,7 @@
     </p:spTree>
     <p:extLst>
       <p:ext uri="{BB962C8B-B14F-4D97-AF65-F5344CB8AC3E}">
-        <p14:creationId xmlns:p14="http://schemas.microsoft.com/office/powerpoint/2010/main" val="1256207342"/>
+        <p14:creationId xmlns:p14="http://schemas.microsoft.com/office/powerpoint/2010/main" val="80857969"/>
       </p:ext>
     </p:extLst>
   </p:cSld>
@@ -7606,7 +7697,7 @@
           <p:cNvPr id="40" name="">
             <a:extLst xmlns:a="http://schemas.openxmlformats.org/drawingml/2006/main">
               <a:ext uri="{FF2B5EF4-FFF2-40B4-BE49-F238E27FC236}">
-                <a16:creationId xmlns:a16="http://schemas.microsoft.com/office/drawing/2014/main" id="{A7EC104B-A845-4A7A-AB45-EBD7481F4484}"/>
+                <a16:creationId xmlns:a16="http://schemas.microsoft.com/office/drawing/2014/main" id="{BCE03654-410B-4604-912A-F29C01160CF6}"/>
               </a:ext>
             </a:extLst>
           </p:cNvPr>
@@ -7618,7 +7709,7 @@
         <p:spPr>
           <a:xfrm xmlns:a="http://schemas.openxmlformats.org/drawingml/2006/main">
             <a:off x="0" y="0"/>
-            <a:ext cx="12191760" cy="47160"/>
+            <a:ext cx="12191400" cy="46800"/>
           </a:xfrm>
           <a:prstGeom xmlns:a="http://schemas.openxmlformats.org/drawingml/2006/main" prst="rect">
             <a:avLst/>
@@ -7658,7 +7749,7 @@
           <p:cNvPr id="41" name="">
             <a:extLst xmlns:a="http://schemas.openxmlformats.org/drawingml/2006/main">
               <a:ext uri="{FF2B5EF4-FFF2-40B4-BE49-F238E27FC236}">
-                <a16:creationId xmlns:a16="http://schemas.microsoft.com/office/drawing/2014/main" id="{66628082-7499-4312-83C1-AA823059A21F}"/>
+                <a16:creationId xmlns:a16="http://schemas.microsoft.com/office/drawing/2014/main" id="{166D79A4-239D-4E33-84A6-904689E77CC4}"/>
               </a:ext>
             </a:extLst>
           </p:cNvPr>
@@ -7670,7 +7761,7 @@
         <p:spPr>
           <a:xfrm xmlns:a="http://schemas.openxmlformats.org/drawingml/2006/main">
             <a:off x="590400" y="266760"/>
-            <a:ext cx="4190760" cy="237600"/>
+            <a:ext cx="4190400" cy="237240"/>
           </a:xfrm>
           <a:prstGeom xmlns:a="http://schemas.openxmlformats.org/drawingml/2006/main" prst="rect">
             <a:avLst/>
@@ -7725,7 +7816,7 @@
           <p:cNvPr id="42" name="">
             <a:extLst xmlns:a="http://schemas.openxmlformats.org/drawingml/2006/main">
               <a:ext uri="{FF2B5EF4-FFF2-40B4-BE49-F238E27FC236}">
-                <a16:creationId xmlns:a16="http://schemas.microsoft.com/office/drawing/2014/main" id="{79A7AA4F-4110-41FC-80EF-5CDF897EB1A0}"/>
+                <a16:creationId xmlns:a16="http://schemas.microsoft.com/office/drawing/2014/main" id="{79176D82-5D1D-4D3D-88D6-DA04AB1581CB}"/>
               </a:ext>
             </a:extLst>
           </p:cNvPr>
@@ -7737,7 +7828,7 @@
         <p:spPr>
           <a:xfrm xmlns:a="http://schemas.openxmlformats.org/drawingml/2006/main">
             <a:off x="11144160" y="266760"/>
-            <a:ext cx="456840" cy="237600"/>
+            <a:ext cx="456480" cy="237240"/>
           </a:xfrm>
           <a:prstGeom xmlns:a="http://schemas.openxmlformats.org/drawingml/2006/main" prst="rect">
             <a:avLst/>
@@ -7792,7 +7883,7 @@
           <p:cNvPr id="43" name="">
             <a:extLst xmlns:a="http://schemas.openxmlformats.org/drawingml/2006/main">
               <a:ext uri="{FF2B5EF4-FFF2-40B4-BE49-F238E27FC236}">
-                <a16:creationId xmlns:a16="http://schemas.microsoft.com/office/drawing/2014/main" id="{E973A87C-7830-462B-9BFD-BA32592E0924}"/>
+                <a16:creationId xmlns:a16="http://schemas.microsoft.com/office/drawing/2014/main" id="{58756CEB-2A25-4052-B522-89C2E3E4B762}"/>
               </a:ext>
             </a:extLst>
           </p:cNvPr>
@@ -7804,7 +7895,7 @@
         <p:spPr>
           <a:xfrm xmlns:a="http://schemas.openxmlformats.org/drawingml/2006/main">
             <a:off x="590400" y="571680"/>
-            <a:ext cx="11010600" cy="9000"/>
+            <a:ext cx="11010240" cy="8640"/>
           </a:xfrm>
           <a:prstGeom xmlns:a="http://schemas.openxmlformats.org/drawingml/2006/main" prst="rect">
             <a:avLst/>
@@ -7844,7 +7935,7 @@
           <p:cNvPr id="44" name="">
             <a:extLst xmlns:a="http://schemas.openxmlformats.org/drawingml/2006/main">
               <a:ext uri="{FF2B5EF4-FFF2-40B4-BE49-F238E27FC236}">
-                <a16:creationId xmlns:a16="http://schemas.microsoft.com/office/drawing/2014/main" id="{BF135193-F476-4986-9C6E-6D341C238D16}"/>
+                <a16:creationId xmlns:a16="http://schemas.microsoft.com/office/drawing/2014/main" id="{DA2938BE-0EE8-4C8B-976C-DF54CCCF405C}"/>
               </a:ext>
             </a:extLst>
           </p:cNvPr>
@@ -7856,7 +7947,7 @@
         <p:spPr>
           <a:xfrm xmlns:a="http://schemas.openxmlformats.org/drawingml/2006/main">
             <a:off x="590400" y="781200"/>
-            <a:ext cx="11010600" cy="723600"/>
+            <a:ext cx="11010240" cy="723240"/>
           </a:xfrm>
           <a:prstGeom xmlns:a="http://schemas.openxmlformats.org/drawingml/2006/main" prst="rect">
             <a:avLst/>
@@ -7911,7 +8002,7 @@
           <p:cNvPr id="45" name="">
             <a:extLst xmlns:a="http://schemas.openxmlformats.org/drawingml/2006/main">
               <a:ext uri="{FF2B5EF4-FFF2-40B4-BE49-F238E27FC236}">
-                <a16:creationId xmlns:a16="http://schemas.microsoft.com/office/drawing/2014/main" id="{95D7E939-CAAC-47AF-A845-9D3AD2CEBA51}"/>
+                <a16:creationId xmlns:a16="http://schemas.microsoft.com/office/drawing/2014/main" id="{B838B9CA-7417-4E09-AAB0-111DF7EB8558}"/>
               </a:ext>
             </a:extLst>
           </p:cNvPr>
@@ -7923,7 +8014,7 @@
         <p:spPr>
           <a:xfrm xmlns:a="http://schemas.openxmlformats.org/drawingml/2006/main">
             <a:off x="590400" y="2038320"/>
-            <a:ext cx="2952360" cy="2571480"/>
+            <a:ext cx="2952000" cy="2571120"/>
           </a:xfrm>
           <a:prstGeom xmlns:a="http://schemas.openxmlformats.org/drawingml/2006/main" prst="roundRect">
             <a:avLst>
@@ -7967,7 +8058,7 @@
           <p:cNvPr id="46" name="">
             <a:extLst xmlns:a="http://schemas.openxmlformats.org/drawingml/2006/main">
               <a:ext uri="{FF2B5EF4-FFF2-40B4-BE49-F238E27FC236}">
-                <a16:creationId xmlns:a16="http://schemas.microsoft.com/office/drawing/2014/main" id="{9B01CD4E-011C-480B-9E7C-8103973F76EE}"/>
+                <a16:creationId xmlns:a16="http://schemas.microsoft.com/office/drawing/2014/main" id="{ED22251C-0449-4652-BA1F-D78DA1373524}"/>
               </a:ext>
             </a:extLst>
           </p:cNvPr>
@@ -7979,7 +8070,7 @@
         <p:spPr>
           <a:xfrm xmlns:a="http://schemas.openxmlformats.org/drawingml/2006/main">
             <a:off x="590400" y="2038320"/>
-            <a:ext cx="2952360" cy="47160"/>
+            <a:ext cx="2952000" cy="46800"/>
           </a:xfrm>
           <a:prstGeom xmlns:a="http://schemas.openxmlformats.org/drawingml/2006/main" prst="rect">
             <a:avLst/>
@@ -8019,7 +8110,7 @@
           <p:cNvPr id="47" name="">
             <a:extLst xmlns:a="http://schemas.openxmlformats.org/drawingml/2006/main">
               <a:ext uri="{FF2B5EF4-FFF2-40B4-BE49-F238E27FC236}">
-                <a16:creationId xmlns:a16="http://schemas.microsoft.com/office/drawing/2014/main" id="{710D18F5-AEEC-48CD-80AD-4C8DFDC6881F}"/>
+                <a16:creationId xmlns:a16="http://schemas.microsoft.com/office/drawing/2014/main" id="{8B2B2226-A79D-4484-84A8-B0319119417C}"/>
               </a:ext>
             </a:extLst>
           </p:cNvPr>
@@ -8031,7 +8122,7 @@
         <p:spPr>
           <a:xfrm xmlns:a="http://schemas.openxmlformats.org/drawingml/2006/main">
             <a:off x="819000" y="2324160"/>
-            <a:ext cx="2495160" cy="228240"/>
+            <a:ext cx="2494800" cy="227880"/>
           </a:xfrm>
           <a:prstGeom xmlns:a="http://schemas.openxmlformats.org/drawingml/2006/main" prst="rect">
             <a:avLst/>
@@ -8086,7 +8177,7 @@
           <p:cNvPr id="48" name="">
             <a:extLst xmlns:a="http://schemas.openxmlformats.org/drawingml/2006/main">
               <a:ext uri="{FF2B5EF4-FFF2-40B4-BE49-F238E27FC236}">
-                <a16:creationId xmlns:a16="http://schemas.microsoft.com/office/drawing/2014/main" id="{5FF66F70-4F1B-4D30-BB1F-1B1F8FADA3EA}"/>
+                <a16:creationId xmlns:a16="http://schemas.microsoft.com/office/drawing/2014/main" id="{171D8DD8-8C7C-4A44-BFC8-496F1854BC35}"/>
               </a:ext>
             </a:extLst>
           </p:cNvPr>
@@ -8098,7 +8189,7 @@
         <p:spPr>
           <a:xfrm xmlns:a="http://schemas.openxmlformats.org/drawingml/2006/main">
             <a:off x="819000" y="2819520"/>
-            <a:ext cx="2495160" cy="1380600"/>
+            <a:ext cx="2494800" cy="1380240"/>
           </a:xfrm>
           <a:prstGeom xmlns:a="http://schemas.openxmlformats.org/drawingml/2006/main" prst="rect">
             <a:avLst/>
@@ -8153,7 +8244,7 @@
           <p:cNvPr id="49" name="">
             <a:extLst xmlns:a="http://schemas.openxmlformats.org/drawingml/2006/main">
               <a:ext uri="{FF2B5EF4-FFF2-40B4-BE49-F238E27FC236}">
-                <a16:creationId xmlns:a16="http://schemas.microsoft.com/office/drawing/2014/main" id="{0674D7E4-26FF-42EA-80BC-C7847C517DA9}"/>
+                <a16:creationId xmlns:a16="http://schemas.microsoft.com/office/drawing/2014/main" id="{425441F9-9CD4-490F-91A7-A04D057B0A94}"/>
               </a:ext>
             </a:extLst>
           </p:cNvPr>
@@ -8165,7 +8256,7 @@
         <p:spPr>
           <a:xfrm xmlns:a="http://schemas.openxmlformats.org/drawingml/2006/main">
             <a:off x="4334040" y="2038320"/>
-            <a:ext cx="2952360" cy="2571480"/>
+            <a:ext cx="2952000" cy="2571120"/>
           </a:xfrm>
           <a:prstGeom xmlns:a="http://schemas.openxmlformats.org/drawingml/2006/main" prst="roundRect">
             <a:avLst>
@@ -8209,7 +8300,7 @@
           <p:cNvPr id="50" name="">
             <a:extLst xmlns:a="http://schemas.openxmlformats.org/drawingml/2006/main">
               <a:ext uri="{FF2B5EF4-FFF2-40B4-BE49-F238E27FC236}">
-                <a16:creationId xmlns:a16="http://schemas.microsoft.com/office/drawing/2014/main" id="{F1822BD1-63C6-45A7-BF0E-4CC445358BF9}"/>
+                <a16:creationId xmlns:a16="http://schemas.microsoft.com/office/drawing/2014/main" id="{C6439EEF-B4D6-4E54-8F5F-B80E51BBD206}"/>
               </a:ext>
             </a:extLst>
           </p:cNvPr>
@@ -8221,7 +8312,7 @@
         <p:spPr>
           <a:xfrm xmlns:a="http://schemas.openxmlformats.org/drawingml/2006/main">
             <a:off x="4334040" y="2038320"/>
-            <a:ext cx="2952360" cy="47160"/>
+            <a:ext cx="2952000" cy="46800"/>
           </a:xfrm>
           <a:prstGeom xmlns:a="http://schemas.openxmlformats.org/drawingml/2006/main" prst="rect">
             <a:avLst/>
@@ -8261,7 +8352,7 @@
           <p:cNvPr id="51" name="">
             <a:extLst xmlns:a="http://schemas.openxmlformats.org/drawingml/2006/main">
               <a:ext uri="{FF2B5EF4-FFF2-40B4-BE49-F238E27FC236}">
-                <a16:creationId xmlns:a16="http://schemas.microsoft.com/office/drawing/2014/main" id="{AC5895D9-B75C-449F-B71E-DA22B7444F03}"/>
+                <a16:creationId xmlns:a16="http://schemas.microsoft.com/office/drawing/2014/main" id="{6E97743B-7A41-4687-852B-C2C01CE4707B}"/>
               </a:ext>
             </a:extLst>
           </p:cNvPr>
@@ -8273,7 +8364,7 @@
         <p:spPr>
           <a:xfrm xmlns:a="http://schemas.openxmlformats.org/drawingml/2006/main">
             <a:off x="4562640" y="2324160"/>
-            <a:ext cx="2495160" cy="228240"/>
+            <a:ext cx="2494800" cy="227880"/>
           </a:xfrm>
           <a:prstGeom xmlns:a="http://schemas.openxmlformats.org/drawingml/2006/main" prst="rect">
             <a:avLst/>
@@ -8328,7 +8419,7 @@
           <p:cNvPr id="52" name="">
             <a:extLst xmlns:a="http://schemas.openxmlformats.org/drawingml/2006/main">
               <a:ext uri="{FF2B5EF4-FFF2-40B4-BE49-F238E27FC236}">
-                <a16:creationId xmlns:a16="http://schemas.microsoft.com/office/drawing/2014/main" id="{57819A43-A4B1-4FAA-A6F5-229B47C992AE}"/>
+                <a16:creationId xmlns:a16="http://schemas.microsoft.com/office/drawing/2014/main" id="{9C715913-D0E2-4CE0-9B24-272C672C2E7B}"/>
               </a:ext>
             </a:extLst>
           </p:cNvPr>
@@ -8340,7 +8431,7 @@
         <p:spPr>
           <a:xfrm xmlns:a="http://schemas.openxmlformats.org/drawingml/2006/main">
             <a:off x="4562640" y="2819520"/>
-            <a:ext cx="2495160" cy="1380600"/>
+            <a:ext cx="2494800" cy="1380240"/>
           </a:xfrm>
           <a:prstGeom xmlns:a="http://schemas.openxmlformats.org/drawingml/2006/main" prst="rect">
             <a:avLst/>
@@ -8395,7 +8486,7 @@
           <p:cNvPr id="53" name="">
             <a:extLst xmlns:a="http://schemas.openxmlformats.org/drawingml/2006/main">
               <a:ext uri="{FF2B5EF4-FFF2-40B4-BE49-F238E27FC236}">
-                <a16:creationId xmlns:a16="http://schemas.microsoft.com/office/drawing/2014/main" id="{17270BED-6AD6-4CB8-8971-411731A4408B}"/>
+                <a16:creationId xmlns:a16="http://schemas.microsoft.com/office/drawing/2014/main" id="{EEE86412-2269-480D-A896-C8920C21B18B}"/>
               </a:ext>
             </a:extLst>
           </p:cNvPr>
@@ -8407,7 +8498,7 @@
         <p:spPr>
           <a:xfrm xmlns:a="http://schemas.openxmlformats.org/drawingml/2006/main">
             <a:off x="8077320" y="2038320"/>
-            <a:ext cx="3524040" cy="2571480"/>
+            <a:ext cx="3523680" cy="2571120"/>
           </a:xfrm>
           <a:prstGeom xmlns:a="http://schemas.openxmlformats.org/drawingml/2006/main" prst="roundRect">
             <a:avLst>
@@ -8451,7 +8542,7 @@
           <p:cNvPr id="54" name="">
             <a:extLst xmlns:a="http://schemas.openxmlformats.org/drawingml/2006/main">
               <a:ext uri="{FF2B5EF4-FFF2-40B4-BE49-F238E27FC236}">
-                <a16:creationId xmlns:a16="http://schemas.microsoft.com/office/drawing/2014/main" id="{C9CBE721-48D4-4C89-8C81-138118217EE4}"/>
+                <a16:creationId xmlns:a16="http://schemas.microsoft.com/office/drawing/2014/main" id="{D02AF462-8DCD-4C0E-8FA9-2897CC55C74C}"/>
               </a:ext>
             </a:extLst>
           </p:cNvPr>
@@ -8463,7 +8554,7 @@
         <p:spPr>
           <a:xfrm xmlns:a="http://schemas.openxmlformats.org/drawingml/2006/main">
             <a:off x="8077320" y="2038320"/>
-            <a:ext cx="3524040" cy="47160"/>
+            <a:ext cx="3523680" cy="46800"/>
           </a:xfrm>
           <a:prstGeom xmlns:a="http://schemas.openxmlformats.org/drawingml/2006/main" prst="rect">
             <a:avLst/>
@@ -8503,7 +8594,7 @@
           <p:cNvPr id="55" name="">
             <a:extLst xmlns:a="http://schemas.openxmlformats.org/drawingml/2006/main">
               <a:ext uri="{FF2B5EF4-FFF2-40B4-BE49-F238E27FC236}">
-                <a16:creationId xmlns:a16="http://schemas.microsoft.com/office/drawing/2014/main" id="{10D79CC9-AD71-4FCD-A88D-270DC56E576F}"/>
+                <a16:creationId xmlns:a16="http://schemas.microsoft.com/office/drawing/2014/main" id="{EFF1FA7C-182C-45EC-86B8-3FF44C014236}"/>
               </a:ext>
             </a:extLst>
           </p:cNvPr>
@@ -8515,7 +8606,7 @@
         <p:spPr>
           <a:xfrm xmlns:a="http://schemas.openxmlformats.org/drawingml/2006/main">
             <a:off x="8305920" y="2324160"/>
-            <a:ext cx="3066840" cy="228240"/>
+            <a:ext cx="3066480" cy="227880"/>
           </a:xfrm>
           <a:prstGeom xmlns:a="http://schemas.openxmlformats.org/drawingml/2006/main" prst="rect">
             <a:avLst/>
@@ -8570,7 +8661,7 @@
           <p:cNvPr id="56" name="">
             <a:extLst xmlns:a="http://schemas.openxmlformats.org/drawingml/2006/main">
               <a:ext uri="{FF2B5EF4-FFF2-40B4-BE49-F238E27FC236}">
-                <a16:creationId xmlns:a16="http://schemas.microsoft.com/office/drawing/2014/main" id="{8B36FA9B-EF75-46F8-9D86-1563419F2836}"/>
+                <a16:creationId xmlns:a16="http://schemas.microsoft.com/office/drawing/2014/main" id="{A85727B2-B32E-43A5-B089-E1ABD9228846}"/>
               </a:ext>
             </a:extLst>
           </p:cNvPr>
@@ -8582,7 +8673,7 @@
         <p:spPr>
           <a:xfrm xmlns:a="http://schemas.openxmlformats.org/drawingml/2006/main">
             <a:off x="8305920" y="2819520"/>
-            <a:ext cx="3066840" cy="1380600"/>
+            <a:ext cx="3066480" cy="1380240"/>
           </a:xfrm>
           <a:prstGeom xmlns:a="http://schemas.openxmlformats.org/drawingml/2006/main" prst="rect">
             <a:avLst/>
@@ -8637,7 +8728,7 @@
           <p:cNvPr id="57" name="">
             <a:extLst xmlns:a="http://schemas.openxmlformats.org/drawingml/2006/main">
               <a:ext uri="{FF2B5EF4-FFF2-40B4-BE49-F238E27FC236}">
-                <a16:creationId xmlns:a16="http://schemas.microsoft.com/office/drawing/2014/main" id="{0E98FEE6-57F6-4779-9FB5-A64E6EF04F0B}"/>
+                <a16:creationId xmlns:a16="http://schemas.microsoft.com/office/drawing/2014/main" id="{F2067CB3-0A5E-46AC-81AB-2AAFDE357FB7}"/>
               </a:ext>
             </a:extLst>
           </p:cNvPr>
@@ -8649,7 +8740,7 @@
         <p:spPr>
           <a:xfrm xmlns:a="http://schemas.openxmlformats.org/drawingml/2006/main">
             <a:off x="3695760" y="2857680"/>
-            <a:ext cx="437760" cy="475920"/>
+            <a:ext cx="437400" cy="475560"/>
           </a:xfrm>
           <a:prstGeom xmlns:a="http://schemas.openxmlformats.org/drawingml/2006/main" prst="rect">
             <a:avLst/>
@@ -8704,7 +8795,7 @@
           <p:cNvPr id="58" name="">
             <a:extLst xmlns:a="http://schemas.openxmlformats.org/drawingml/2006/main">
               <a:ext uri="{FF2B5EF4-FFF2-40B4-BE49-F238E27FC236}">
-                <a16:creationId xmlns:a16="http://schemas.microsoft.com/office/drawing/2014/main" id="{B8371867-AC48-44A0-8942-D675C00B2BEF}"/>
+                <a16:creationId xmlns:a16="http://schemas.microsoft.com/office/drawing/2014/main" id="{3A0CDC45-28BE-4AFB-B1E0-2FC095BD4A46}"/>
               </a:ext>
             </a:extLst>
           </p:cNvPr>
@@ -8716,7 +8807,7 @@
         <p:spPr>
           <a:xfrm xmlns:a="http://schemas.openxmlformats.org/drawingml/2006/main">
             <a:off x="7448400" y="2857680"/>
-            <a:ext cx="437760" cy="475920"/>
+            <a:ext cx="437400" cy="475560"/>
           </a:xfrm>
           <a:prstGeom xmlns:a="http://schemas.openxmlformats.org/drawingml/2006/main" prst="rect">
             <a:avLst/>
@@ -8771,7 +8862,7 @@
           <p:cNvPr id="59" name="">
             <a:extLst xmlns:a="http://schemas.openxmlformats.org/drawingml/2006/main">
               <a:ext uri="{FF2B5EF4-FFF2-40B4-BE49-F238E27FC236}">
-                <a16:creationId xmlns:a16="http://schemas.microsoft.com/office/drawing/2014/main" id="{F725892D-CCD5-4D91-8C69-CC5FE2F7A272}"/>
+                <a16:creationId xmlns:a16="http://schemas.microsoft.com/office/drawing/2014/main" id="{7514B120-5C9F-4D5C-A93D-26039372DF83}"/>
               </a:ext>
             </a:extLst>
           </p:cNvPr>
@@ -8783,7 +8874,7 @@
         <p:spPr>
           <a:xfrm xmlns:a="http://schemas.openxmlformats.org/drawingml/2006/main">
             <a:off x="590400" y="5181480"/>
-            <a:ext cx="11010600" cy="590040"/>
+            <a:ext cx="11010240" cy="589680"/>
           </a:xfrm>
           <a:prstGeom xmlns:a="http://schemas.openxmlformats.org/drawingml/2006/main" prst="rect">
             <a:avLst/>
@@ -8838,7 +8929,7 @@
           <p:cNvPr id="60" name="">
             <a:extLst xmlns:a="http://schemas.openxmlformats.org/drawingml/2006/main">
               <a:ext uri="{FF2B5EF4-FFF2-40B4-BE49-F238E27FC236}">
-                <a16:creationId xmlns:a16="http://schemas.microsoft.com/office/drawing/2014/main" id="{9B7B0D81-9BD0-45B6-8A46-27416EF52233}"/>
+                <a16:creationId xmlns:a16="http://schemas.microsoft.com/office/drawing/2014/main" id="{8F3D689D-9FC9-41C5-B02A-63BA2E11C377}"/>
               </a:ext>
             </a:extLst>
           </p:cNvPr>
@@ -8850,7 +8941,7 @@
         <p:spPr>
           <a:xfrm xmlns:a="http://schemas.openxmlformats.org/drawingml/2006/main">
             <a:off x="590400" y="5962680"/>
-            <a:ext cx="11010600" cy="266400"/>
+            <a:ext cx="11010240" cy="266040"/>
           </a:xfrm>
           <a:prstGeom xmlns:a="http://schemas.openxmlformats.org/drawingml/2006/main" prst="rect">
             <a:avLst/>
@@ -8903,7 +8994,7 @@
     </p:spTree>
     <p:extLst>
       <p:ext uri="{BB962C8B-B14F-4D97-AF65-F5344CB8AC3E}">
-        <p14:creationId xmlns:p14="http://schemas.microsoft.com/office/powerpoint/2010/main" val="865369580"/>
+        <p14:creationId xmlns:p14="http://schemas.microsoft.com/office/powerpoint/2010/main" val="254620107"/>
       </p:ext>
     </p:extLst>
   </p:cSld>
@@ -8934,7 +9025,7 @@
           <p:cNvPr id="61" name="">
             <a:extLst xmlns:a="http://schemas.openxmlformats.org/drawingml/2006/main">
               <a:ext uri="{FF2B5EF4-FFF2-40B4-BE49-F238E27FC236}">
-                <a16:creationId xmlns:a16="http://schemas.microsoft.com/office/drawing/2014/main" id="{BEFAA409-F014-4D78-934B-0E48BBEC536B}"/>
+                <a16:creationId xmlns:a16="http://schemas.microsoft.com/office/drawing/2014/main" id="{8B930BF4-F0FC-4439-ADF2-7718242F897B}"/>
               </a:ext>
             </a:extLst>
           </p:cNvPr>
@@ -8946,7 +9037,7 @@
         <p:spPr>
           <a:xfrm xmlns:a="http://schemas.openxmlformats.org/drawingml/2006/main">
             <a:off x="0" y="0"/>
-            <a:ext cx="12191760" cy="47160"/>
+            <a:ext cx="12191400" cy="46800"/>
           </a:xfrm>
           <a:prstGeom xmlns:a="http://schemas.openxmlformats.org/drawingml/2006/main" prst="rect">
             <a:avLst/>
@@ -8986,7 +9077,7 @@
           <p:cNvPr id="62" name="">
             <a:extLst xmlns:a="http://schemas.openxmlformats.org/drawingml/2006/main">
               <a:ext uri="{FF2B5EF4-FFF2-40B4-BE49-F238E27FC236}">
-                <a16:creationId xmlns:a16="http://schemas.microsoft.com/office/drawing/2014/main" id="{50BDAC37-C00A-43B3-A2EC-27ABF5B5D627}"/>
+                <a16:creationId xmlns:a16="http://schemas.microsoft.com/office/drawing/2014/main" id="{94997153-F62C-4ED6-A35F-47D0AB99CDAE}"/>
               </a:ext>
             </a:extLst>
           </p:cNvPr>
@@ -8998,7 +9089,7 @@
         <p:spPr>
           <a:xfrm xmlns:a="http://schemas.openxmlformats.org/drawingml/2006/main">
             <a:off x="590400" y="266760"/>
-            <a:ext cx="4190760" cy="237600"/>
+            <a:ext cx="4190400" cy="237240"/>
           </a:xfrm>
           <a:prstGeom xmlns:a="http://schemas.openxmlformats.org/drawingml/2006/main" prst="rect">
             <a:avLst/>
@@ -9053,7 +9144,7 @@
           <p:cNvPr id="63" name="">
             <a:extLst xmlns:a="http://schemas.openxmlformats.org/drawingml/2006/main">
               <a:ext uri="{FF2B5EF4-FFF2-40B4-BE49-F238E27FC236}">
-                <a16:creationId xmlns:a16="http://schemas.microsoft.com/office/drawing/2014/main" id="{8C73B624-932D-48CD-99A5-30EA62F15D79}"/>
+                <a16:creationId xmlns:a16="http://schemas.microsoft.com/office/drawing/2014/main" id="{55FBAAB1-5AA1-4735-9CDD-A39AB6F73C62}"/>
               </a:ext>
             </a:extLst>
           </p:cNvPr>
@@ -9065,7 +9156,7 @@
         <p:spPr>
           <a:xfrm xmlns:a="http://schemas.openxmlformats.org/drawingml/2006/main">
             <a:off x="11144160" y="266760"/>
-            <a:ext cx="456840" cy="237600"/>
+            <a:ext cx="456480" cy="237240"/>
           </a:xfrm>
           <a:prstGeom xmlns:a="http://schemas.openxmlformats.org/drawingml/2006/main" prst="rect">
             <a:avLst/>
@@ -9120,7 +9211,7 @@
           <p:cNvPr id="64" name="">
             <a:extLst xmlns:a="http://schemas.openxmlformats.org/drawingml/2006/main">
               <a:ext uri="{FF2B5EF4-FFF2-40B4-BE49-F238E27FC236}">
-                <a16:creationId xmlns:a16="http://schemas.microsoft.com/office/drawing/2014/main" id="{5BCC0CB0-1307-4784-A23E-3E9C08CA1633}"/>
+                <a16:creationId xmlns:a16="http://schemas.microsoft.com/office/drawing/2014/main" id="{743A2ABA-2522-42C4-B211-61CFE36B9501}"/>
               </a:ext>
             </a:extLst>
           </p:cNvPr>
@@ -9132,7 +9223,7 @@
         <p:spPr>
           <a:xfrm xmlns:a="http://schemas.openxmlformats.org/drawingml/2006/main">
             <a:off x="590400" y="571680"/>
-            <a:ext cx="11010600" cy="9000"/>
+            <a:ext cx="11010240" cy="8640"/>
           </a:xfrm>
           <a:prstGeom xmlns:a="http://schemas.openxmlformats.org/drawingml/2006/main" prst="rect">
             <a:avLst/>
@@ -9172,7 +9263,7 @@
           <p:cNvPr id="65" name="">
             <a:extLst xmlns:a="http://schemas.openxmlformats.org/drawingml/2006/main">
               <a:ext uri="{FF2B5EF4-FFF2-40B4-BE49-F238E27FC236}">
-                <a16:creationId xmlns:a16="http://schemas.microsoft.com/office/drawing/2014/main" id="{11547724-23A8-4B55-B1AE-4D9936C47F73}"/>
+                <a16:creationId xmlns:a16="http://schemas.microsoft.com/office/drawing/2014/main" id="{7B2B2C2C-6A46-4055-87F8-374EE37E89A9}"/>
               </a:ext>
             </a:extLst>
           </p:cNvPr>
@@ -9184,7 +9275,7 @@
         <p:spPr>
           <a:xfrm xmlns:a="http://schemas.openxmlformats.org/drawingml/2006/main">
             <a:off x="590400" y="781200"/>
-            <a:ext cx="11010600" cy="723600"/>
+            <a:ext cx="11010240" cy="723240"/>
           </a:xfrm>
           <a:prstGeom xmlns:a="http://schemas.openxmlformats.org/drawingml/2006/main" prst="rect">
             <a:avLst/>
@@ -9239,7 +9330,7 @@
           <p:cNvPr id="66" name="">
             <a:extLst xmlns:a="http://schemas.openxmlformats.org/drawingml/2006/main">
               <a:ext uri="{FF2B5EF4-FFF2-40B4-BE49-F238E27FC236}">
-                <a16:creationId xmlns:a16="http://schemas.microsoft.com/office/drawing/2014/main" id="{F6B68E78-5FA5-49C9-9F14-CC642F93BBB2}"/>
+                <a16:creationId xmlns:a16="http://schemas.microsoft.com/office/drawing/2014/main" id="{62E54AC6-3BCC-4AFC-B4EB-49A5EF1DC65B}"/>
               </a:ext>
             </a:extLst>
           </p:cNvPr>
@@ -9251,7 +9342,7 @@
         <p:spPr>
           <a:xfrm xmlns:a="http://schemas.openxmlformats.org/drawingml/2006/main">
             <a:off x="590400" y="1762200"/>
-            <a:ext cx="5190840" cy="3142800"/>
+            <a:ext cx="5190480" cy="3142440"/>
           </a:xfrm>
           <a:prstGeom xmlns:a="http://schemas.openxmlformats.org/drawingml/2006/main" prst="roundRect">
             <a:avLst>
@@ -9295,7 +9386,7 @@
           <p:cNvPr id="67" name="">
             <a:extLst xmlns:a="http://schemas.openxmlformats.org/drawingml/2006/main">
               <a:ext uri="{FF2B5EF4-FFF2-40B4-BE49-F238E27FC236}">
-                <a16:creationId xmlns:a16="http://schemas.microsoft.com/office/drawing/2014/main" id="{3D91DE6E-005D-4012-BB65-E60E5F6B67C9}"/>
+                <a16:creationId xmlns:a16="http://schemas.microsoft.com/office/drawing/2014/main" id="{231B5746-82F8-403D-88CE-CAFB9D3A4D6D}"/>
               </a:ext>
             </a:extLst>
           </p:cNvPr>
@@ -9307,7 +9398,7 @@
         <p:spPr>
           <a:xfrm xmlns:a="http://schemas.openxmlformats.org/drawingml/2006/main">
             <a:off x="857160" y="2048040"/>
-            <a:ext cx="2476080" cy="228240"/>
+            <a:ext cx="2475720" cy="227880"/>
           </a:xfrm>
           <a:prstGeom xmlns:a="http://schemas.openxmlformats.org/drawingml/2006/main" prst="rect">
             <a:avLst/>
@@ -9362,7 +9453,7 @@
           <p:cNvPr id="68" name="">
             <a:extLst xmlns:a="http://schemas.openxmlformats.org/drawingml/2006/main">
               <a:ext uri="{FF2B5EF4-FFF2-40B4-BE49-F238E27FC236}">
-                <a16:creationId xmlns:a16="http://schemas.microsoft.com/office/drawing/2014/main" id="{79C0728D-C19C-47BB-93FA-EEEC8009FE7F}"/>
+                <a16:creationId xmlns:a16="http://schemas.microsoft.com/office/drawing/2014/main" id="{5B284427-728F-4BC6-A5C6-96BD3C30DCE4}"/>
               </a:ext>
             </a:extLst>
           </p:cNvPr>
@@ -9374,7 +9465,7 @@
         <p:spPr>
           <a:xfrm xmlns:a="http://schemas.openxmlformats.org/drawingml/2006/main">
             <a:off x="838080" y="2400480"/>
-            <a:ext cx="4476240" cy="628200"/>
+            <a:ext cx="4475880" cy="627840"/>
           </a:xfrm>
           <a:prstGeom xmlns:a="http://schemas.openxmlformats.org/drawingml/2006/main" prst="rect">
             <a:avLst/>
@@ -9429,7 +9520,7 @@
           <p:cNvPr id="69" name="">
             <a:extLst xmlns:a="http://schemas.openxmlformats.org/drawingml/2006/main">
               <a:ext uri="{FF2B5EF4-FFF2-40B4-BE49-F238E27FC236}">
-                <a16:creationId xmlns:a16="http://schemas.microsoft.com/office/drawing/2014/main" id="{B8BB96E9-18D6-46EE-87AB-99DF6F35E287}"/>
+                <a16:creationId xmlns:a16="http://schemas.microsoft.com/office/drawing/2014/main" id="{444F2B41-9FFD-49DC-93AC-33E8C89849E9}"/>
               </a:ext>
             </a:extLst>
           </p:cNvPr>
@@ -9441,7 +9532,7 @@
         <p:spPr>
           <a:xfrm xmlns:a="http://schemas.openxmlformats.org/drawingml/2006/main">
             <a:off x="857160" y="3276720"/>
-            <a:ext cx="4381200" cy="285480"/>
+            <a:ext cx="4380840" cy="285120"/>
           </a:xfrm>
           <a:prstGeom xmlns:a="http://schemas.openxmlformats.org/drawingml/2006/main" prst="rect">
             <a:avLst/>
@@ -9496,7 +9587,7 @@
           <p:cNvPr id="70" name="">
             <a:extLst xmlns:a="http://schemas.openxmlformats.org/drawingml/2006/main">
               <a:ext uri="{FF2B5EF4-FFF2-40B4-BE49-F238E27FC236}">
-                <a16:creationId xmlns:a16="http://schemas.microsoft.com/office/drawing/2014/main" id="{DD7AB8A6-F4EA-4F05-850C-0E9033FAE2B7}"/>
+                <a16:creationId xmlns:a16="http://schemas.microsoft.com/office/drawing/2014/main" id="{11A6056F-2433-4807-8B08-33CA8271D669}"/>
               </a:ext>
             </a:extLst>
           </p:cNvPr>
@@ -9508,7 +9599,7 @@
         <p:spPr>
           <a:xfrm xmlns:a="http://schemas.openxmlformats.org/drawingml/2006/main">
             <a:off x="857160" y="3666960"/>
-            <a:ext cx="4381200" cy="285480"/>
+            <a:ext cx="4380840" cy="285120"/>
           </a:xfrm>
           <a:prstGeom xmlns:a="http://schemas.openxmlformats.org/drawingml/2006/main" prst="rect">
             <a:avLst/>
@@ -9563,7 +9654,7 @@
           <p:cNvPr id="71" name="">
             <a:extLst xmlns:a="http://schemas.openxmlformats.org/drawingml/2006/main">
               <a:ext uri="{FF2B5EF4-FFF2-40B4-BE49-F238E27FC236}">
-                <a16:creationId xmlns:a16="http://schemas.microsoft.com/office/drawing/2014/main" id="{6535B275-59F7-46B7-84E7-23944EE8DEAB}"/>
+                <a16:creationId xmlns:a16="http://schemas.microsoft.com/office/drawing/2014/main" id="{2A6C069F-845B-4136-952B-4361670E6794}"/>
               </a:ext>
             </a:extLst>
           </p:cNvPr>
@@ -9575,7 +9666,7 @@
         <p:spPr>
           <a:xfrm xmlns:a="http://schemas.openxmlformats.org/drawingml/2006/main">
             <a:off x="857160" y="4057560"/>
-            <a:ext cx="4381200" cy="285480"/>
+            <a:ext cx="4380840" cy="285120"/>
           </a:xfrm>
           <a:prstGeom xmlns:a="http://schemas.openxmlformats.org/drawingml/2006/main" prst="rect">
             <a:avLst/>
@@ -9612,7 +9703,29 @@
                 <a:ea typeface="Arial"/>
                 <a:cs typeface="Arial"/>
               </a:rPr>
-              <a:t>Targeted applyEvidence call  →  APPLIED</a:t>
+              <a:t>Targeted </a:t>
+            </a:r>
+            <a:r>
+              <a:rPr sz="1500" b="0" u="none">
+                <a:solidFill>
+                  <a:srgbClr val="EDF5EF"/>
+                </a:solidFill>
+                <a:latin typeface="DejaVu Sans Mono"/>
+                <a:ea typeface="DejaVu Sans Mono"/>
+                <a:cs typeface="DejaVu Sans Mono"/>
+              </a:rPr>
+              <a:t>applyEvidence</a:t>
+            </a:r>
+            <a:r>
+              <a:rPr sz="1500" b="0" u="none">
+                <a:solidFill>
+                  <a:srgbClr val="EDF5EF"/>
+                </a:solidFill>
+                <a:latin typeface="Arial"/>
+                <a:ea typeface="Arial"/>
+                <a:cs typeface="Arial"/>
+              </a:rPr>
+              <a:t> call  →  APPLIED</a:t>
             </a:r>
             <a:endParaRPr sz="1500" b="0" u="none">
               <a:solidFill>
@@ -9630,7 +9743,7 @@
           <p:cNvPr id="72" name="">
             <a:extLst xmlns:a="http://schemas.openxmlformats.org/drawingml/2006/main">
               <a:ext uri="{FF2B5EF4-FFF2-40B4-BE49-F238E27FC236}">
-                <a16:creationId xmlns:a16="http://schemas.microsoft.com/office/drawing/2014/main" id="{C9A98E58-3AE8-4634-BF11-4305A46B213B}"/>
+                <a16:creationId xmlns:a16="http://schemas.microsoft.com/office/drawing/2014/main" id="{FC73260D-AFDC-443B-B2B9-3CE5E19E4B65}"/>
               </a:ext>
             </a:extLst>
           </p:cNvPr>
@@ -9642,7 +9755,7 @@
         <p:spPr>
           <a:xfrm xmlns:a="http://schemas.openxmlformats.org/drawingml/2006/main">
             <a:off x="6095880" y="1762200"/>
-            <a:ext cx="9000" cy="3142800"/>
+            <a:ext cx="8640" cy="3142440"/>
           </a:xfrm>
           <a:prstGeom xmlns:a="http://schemas.openxmlformats.org/drawingml/2006/main" prst="rect">
             <a:avLst/>
@@ -9661,7 +9774,7 @@
           <a:fontRef xmlns:a="http://schemas.openxmlformats.org/drawingml/2006/main" idx="minor"/>
         </p:style>
         <p:txBody>
-          <a:bodyPr xmlns:a="http://schemas.openxmlformats.org/drawingml/2006/main" lIns="90000" tIns="45000" rIns="90000" bIns="45000" anchor="t">
+          <a:bodyPr xmlns:a="http://schemas.openxmlformats.org/drawingml/2006/main" lIns="4320" tIns="45000" rIns="4320" bIns="45000" anchor="t">
             <a:noAutofit/>
           </a:bodyPr>
           <a:lstStyle xmlns:a="http://schemas.openxmlformats.org/drawingml/2006/main"/>
@@ -9682,7 +9795,7 @@
           <p:cNvPr id="73" name="">
             <a:extLst xmlns:a="http://schemas.openxmlformats.org/drawingml/2006/main">
               <a:ext uri="{FF2B5EF4-FFF2-40B4-BE49-F238E27FC236}">
-                <a16:creationId xmlns:a16="http://schemas.microsoft.com/office/drawing/2014/main" id="{5B6F7AD3-28B3-4972-9726-8E4A3FA9BBC2}"/>
+                <a16:creationId xmlns:a16="http://schemas.microsoft.com/office/drawing/2014/main" id="{961E2D36-09F4-4189-8C2F-0B2B303200C8}"/>
               </a:ext>
             </a:extLst>
           </p:cNvPr>
@@ -9694,7 +9807,7 @@
         <p:spPr>
           <a:xfrm xmlns:a="http://schemas.openxmlformats.org/drawingml/2006/main">
             <a:off x="6762600" y="1924200"/>
-            <a:ext cx="666360" cy="514080"/>
+            <a:ext cx="666000" cy="513720"/>
           </a:xfrm>
           <a:prstGeom xmlns:a="http://schemas.openxmlformats.org/drawingml/2006/main" prst="rect">
             <a:avLst/>
@@ -9749,19 +9862,19 @@
           <p:cNvPr id="74" name="">
             <a:extLst xmlns:a="http://schemas.openxmlformats.org/drawingml/2006/main">
               <a:ext uri="{FF2B5EF4-FFF2-40B4-BE49-F238E27FC236}">
-                <a16:creationId xmlns:a16="http://schemas.microsoft.com/office/drawing/2014/main" id="{570E64F7-DBAD-46D3-99D4-7A2DCF096EAD}"/>
-              </a:ext>
-            </a:extLst>
-          </p:cNvPr>
-          <p:cNvSpPr>
-            <a:spLocks xmlns:a="http://schemas.openxmlformats.org/drawingml/2006/main" noGrp="1"/>
-          </p:cNvSpPr>
-          <p:nvPr/>
-        </p:nvSpPr>
-        <p:spPr>
-          <a:xfrm xmlns:a="http://schemas.openxmlformats.org/drawingml/2006/main">
-            <a:off x="7477200" y="1924200"/>
-            <a:ext cx="285480" cy="514080"/>
+                <a16:creationId xmlns:a16="http://schemas.microsoft.com/office/drawing/2014/main" id="{98DC1907-35AC-4480-82D0-DDEFEF7AFA89}"/>
+              </a:ext>
+            </a:extLst>
+          </p:cNvPr>
+          <p:cNvSpPr>
+            <a:spLocks xmlns:a="http://schemas.openxmlformats.org/drawingml/2006/main" noGrp="1"/>
+          </p:cNvSpPr>
+          <p:nvPr/>
+        </p:nvSpPr>
+        <p:spPr>
+          <a:xfrm xmlns:a="http://schemas.openxmlformats.org/drawingml/2006/main">
+            <a:off x="7487280" y="1828800"/>
+            <a:ext cx="285120" cy="513720"/>
           </a:xfrm>
           <a:prstGeom xmlns:a="http://schemas.openxmlformats.org/drawingml/2006/main" prst="rect">
             <a:avLst/>
@@ -9816,7 +9929,7 @@
           <p:cNvPr id="75" name="">
             <a:extLst xmlns:a="http://schemas.openxmlformats.org/drawingml/2006/main">
               <a:ext uri="{FF2B5EF4-FFF2-40B4-BE49-F238E27FC236}">
-                <a16:creationId xmlns:a16="http://schemas.microsoft.com/office/drawing/2014/main" id="{ED357AA6-C1B3-4067-AD38-FC174E4099FE}"/>
+                <a16:creationId xmlns:a16="http://schemas.microsoft.com/office/drawing/2014/main" id="{328036AF-4DE1-44EE-BA56-E65B6FD89B0F}"/>
               </a:ext>
             </a:extLst>
           </p:cNvPr>
@@ -9828,7 +9941,7 @@
         <p:spPr>
           <a:xfrm xmlns:a="http://schemas.openxmlformats.org/drawingml/2006/main">
             <a:off x="7810560" y="1924200"/>
-            <a:ext cx="761760" cy="514080"/>
+            <a:ext cx="761400" cy="513720"/>
           </a:xfrm>
           <a:prstGeom xmlns:a="http://schemas.openxmlformats.org/drawingml/2006/main" prst="rect">
             <a:avLst/>
@@ -9883,7 +9996,7 @@
           <p:cNvPr id="76" name="">
             <a:extLst xmlns:a="http://schemas.openxmlformats.org/drawingml/2006/main">
               <a:ext uri="{FF2B5EF4-FFF2-40B4-BE49-F238E27FC236}">
-                <a16:creationId xmlns:a16="http://schemas.microsoft.com/office/drawing/2014/main" id="{580F4427-0FC8-420B-873A-9DF5981A418E}"/>
+                <a16:creationId xmlns:a16="http://schemas.microsoft.com/office/drawing/2014/main" id="{4D797B4F-5DE3-42A7-92C0-3057D5242F13}"/>
               </a:ext>
             </a:extLst>
           </p:cNvPr>
@@ -9895,7 +10008,7 @@
         <p:spPr>
           <a:xfrm xmlns:a="http://schemas.openxmlformats.org/drawingml/2006/main">
             <a:off x="6572160" y="2486160"/>
-            <a:ext cx="2095200" cy="285480"/>
+            <a:ext cx="2094840" cy="285120"/>
           </a:xfrm>
           <a:prstGeom xmlns:a="http://schemas.openxmlformats.org/drawingml/2006/main" prst="rect">
             <a:avLst/>
@@ -9950,7 +10063,7 @@
           <p:cNvPr id="77" name="">
             <a:extLst xmlns:a="http://schemas.openxmlformats.org/drawingml/2006/main">
               <a:ext uri="{FF2B5EF4-FFF2-40B4-BE49-F238E27FC236}">
-                <a16:creationId xmlns:a16="http://schemas.microsoft.com/office/drawing/2014/main" id="{662A8135-D66F-498D-863B-6535A3A8AB33}"/>
+                <a16:creationId xmlns:a16="http://schemas.microsoft.com/office/drawing/2014/main" id="{059287D2-EFEB-41FA-A596-3AB019F4B004}"/>
               </a:ext>
             </a:extLst>
           </p:cNvPr>
@@ -9962,7 +10075,7 @@
         <p:spPr>
           <a:xfrm xmlns:a="http://schemas.openxmlformats.org/drawingml/2006/main">
             <a:off x="9229680" y="1924200"/>
-            <a:ext cx="904680" cy="514080"/>
+            <a:ext cx="904320" cy="513720"/>
           </a:xfrm>
           <a:prstGeom xmlns:a="http://schemas.openxmlformats.org/drawingml/2006/main" prst="rect">
             <a:avLst/>
@@ -10017,19 +10130,19 @@
           <p:cNvPr id="78" name="">
             <a:extLst xmlns:a="http://schemas.openxmlformats.org/drawingml/2006/main">
               <a:ext uri="{FF2B5EF4-FFF2-40B4-BE49-F238E27FC236}">
-                <a16:creationId xmlns:a16="http://schemas.microsoft.com/office/drawing/2014/main" id="{F2AB0F3D-A362-4476-8355-EC02C0F9488F}"/>
-              </a:ext>
-            </a:extLst>
-          </p:cNvPr>
-          <p:cNvSpPr>
-            <a:spLocks xmlns:a="http://schemas.openxmlformats.org/drawingml/2006/main" noGrp="1"/>
-          </p:cNvSpPr>
-          <p:nvPr/>
-        </p:nvSpPr>
-        <p:spPr>
-          <a:xfrm xmlns:a="http://schemas.openxmlformats.org/drawingml/2006/main">
-            <a:off x="10191600" y="1924200"/>
-            <a:ext cx="285480" cy="514080"/>
+                <a16:creationId xmlns:a16="http://schemas.microsoft.com/office/drawing/2014/main" id="{E0A13AFC-B8FC-4807-B183-6ABD59EFD967}"/>
+              </a:ext>
+            </a:extLst>
+          </p:cNvPr>
+          <p:cNvSpPr>
+            <a:spLocks xmlns:a="http://schemas.openxmlformats.org/drawingml/2006/main" noGrp="1"/>
+          </p:cNvSpPr>
+          <p:nvPr/>
+        </p:nvSpPr>
+        <p:spPr>
+          <a:xfrm xmlns:a="http://schemas.openxmlformats.org/drawingml/2006/main">
+            <a:off x="10191600" y="1828800"/>
+            <a:ext cx="285120" cy="513720"/>
           </a:xfrm>
           <a:prstGeom xmlns:a="http://schemas.openxmlformats.org/drawingml/2006/main" prst="rect">
             <a:avLst/>
@@ -10084,7 +10197,7 @@
           <p:cNvPr id="79" name="">
             <a:extLst xmlns:a="http://schemas.openxmlformats.org/drawingml/2006/main">
               <a:ext uri="{FF2B5EF4-FFF2-40B4-BE49-F238E27FC236}">
-                <a16:creationId xmlns:a16="http://schemas.microsoft.com/office/drawing/2014/main" id="{1B5BED3E-9AA2-4B97-BC83-09067A4D6521}"/>
+                <a16:creationId xmlns:a16="http://schemas.microsoft.com/office/drawing/2014/main" id="{A2DAA96B-0663-4E83-8D18-E5FEC6E6848D}"/>
               </a:ext>
             </a:extLst>
           </p:cNvPr>
@@ -10096,7 +10209,7 @@
         <p:spPr>
           <a:xfrm xmlns:a="http://schemas.openxmlformats.org/drawingml/2006/main">
             <a:off x="10534680" y="1924200"/>
-            <a:ext cx="904680" cy="514080"/>
+            <a:ext cx="904320" cy="513720"/>
           </a:xfrm>
           <a:prstGeom xmlns:a="http://schemas.openxmlformats.org/drawingml/2006/main" prst="rect">
             <a:avLst/>
@@ -10151,7 +10264,7 @@
           <p:cNvPr id="80" name="">
             <a:extLst xmlns:a="http://schemas.openxmlformats.org/drawingml/2006/main">
               <a:ext uri="{FF2B5EF4-FFF2-40B4-BE49-F238E27FC236}">
-                <a16:creationId xmlns:a16="http://schemas.microsoft.com/office/drawing/2014/main" id="{E9EAE42A-B9E7-4042-B44A-2A100D28162D}"/>
+                <a16:creationId xmlns:a16="http://schemas.microsoft.com/office/drawing/2014/main" id="{EECD9689-0D73-4CCF-9130-9FE29D35C542}"/>
               </a:ext>
             </a:extLst>
           </p:cNvPr>
@@ -10163,7 +10276,7 @@
         <p:spPr>
           <a:xfrm xmlns:a="http://schemas.openxmlformats.org/drawingml/2006/main">
             <a:off x="9048600" y="2486160"/>
-            <a:ext cx="2552400" cy="285480"/>
+            <a:ext cx="2552040" cy="285120"/>
           </a:xfrm>
           <a:prstGeom xmlns:a="http://schemas.openxmlformats.org/drawingml/2006/main" prst="rect">
             <a:avLst/>
@@ -10218,7 +10331,7 @@
           <p:cNvPr id="81" name="">
             <a:extLst xmlns:a="http://schemas.openxmlformats.org/drawingml/2006/main">
               <a:ext uri="{FF2B5EF4-FFF2-40B4-BE49-F238E27FC236}">
-                <a16:creationId xmlns:a16="http://schemas.microsoft.com/office/drawing/2014/main" id="{C548F900-750F-440E-8EB1-4112B5BCFDE3}"/>
+                <a16:creationId xmlns:a16="http://schemas.microsoft.com/office/drawing/2014/main" id="{C35A037B-CB55-47AF-B284-05A4E70F130D}"/>
               </a:ext>
             </a:extLst>
           </p:cNvPr>
@@ -10230,7 +10343,7 @@
         <p:spPr>
           <a:xfrm xmlns:a="http://schemas.openxmlformats.org/drawingml/2006/main">
             <a:off x="6572160" y="3105000"/>
-            <a:ext cx="2095200" cy="609120"/>
+            <a:ext cx="2094840" cy="608760"/>
           </a:xfrm>
           <a:prstGeom xmlns:a="http://schemas.openxmlformats.org/drawingml/2006/main" prst="rect">
             <a:avLst/>
@@ -10285,7 +10398,7 @@
           <p:cNvPr id="82" name="">
             <a:extLst xmlns:a="http://schemas.openxmlformats.org/drawingml/2006/main">
               <a:ext uri="{FF2B5EF4-FFF2-40B4-BE49-F238E27FC236}">
-                <a16:creationId xmlns:a16="http://schemas.microsoft.com/office/drawing/2014/main" id="{988A95D3-0238-4A18-AB17-61908CDE0FEC}"/>
+                <a16:creationId xmlns:a16="http://schemas.microsoft.com/office/drawing/2014/main" id="{03A112F0-8CEF-4DFF-B9A7-866B45514CCF}"/>
               </a:ext>
             </a:extLst>
           </p:cNvPr>
@@ -10297,7 +10410,7 @@
         <p:spPr>
           <a:xfrm xmlns:a="http://schemas.openxmlformats.org/drawingml/2006/main">
             <a:off x="6572160" y="3686040"/>
-            <a:ext cx="2095200" cy="323640"/>
+            <a:ext cx="2094840" cy="323280"/>
           </a:xfrm>
           <a:prstGeom xmlns:a="http://schemas.openxmlformats.org/drawingml/2006/main" prst="rect">
             <a:avLst/>
@@ -10352,7 +10465,7 @@
           <p:cNvPr id="83" name="">
             <a:extLst xmlns:a="http://schemas.openxmlformats.org/drawingml/2006/main">
               <a:ext uri="{FF2B5EF4-FFF2-40B4-BE49-F238E27FC236}">
-                <a16:creationId xmlns:a16="http://schemas.microsoft.com/office/drawing/2014/main" id="{499ABA97-8905-483B-AD19-2F401EB91869}"/>
+                <a16:creationId xmlns:a16="http://schemas.microsoft.com/office/drawing/2014/main" id="{D84EBB20-51F8-44FB-94BB-6EFC22B8E5C5}"/>
               </a:ext>
             </a:extLst>
           </p:cNvPr>
@@ -10364,7 +10477,7 @@
         <p:spPr>
           <a:xfrm xmlns:a="http://schemas.openxmlformats.org/drawingml/2006/main">
             <a:off x="9048600" y="3105000"/>
-            <a:ext cx="2190240" cy="609120"/>
+            <a:ext cx="2189880" cy="608760"/>
           </a:xfrm>
           <a:prstGeom xmlns:a="http://schemas.openxmlformats.org/drawingml/2006/main" prst="rect">
             <a:avLst/>
@@ -10419,7 +10532,7 @@
           <p:cNvPr id="84" name="">
             <a:extLst xmlns:a="http://schemas.openxmlformats.org/drawingml/2006/main">
               <a:ext uri="{FF2B5EF4-FFF2-40B4-BE49-F238E27FC236}">
-                <a16:creationId xmlns:a16="http://schemas.microsoft.com/office/drawing/2014/main" id="{3AB14F2C-E50D-4620-B377-AB01AEF680E0}"/>
+                <a16:creationId xmlns:a16="http://schemas.microsoft.com/office/drawing/2014/main" id="{D5E8E17C-F509-4BD8-9113-768D82388741}"/>
               </a:ext>
             </a:extLst>
           </p:cNvPr>
@@ -10431,7 +10544,7 @@
         <p:spPr>
           <a:xfrm xmlns:a="http://schemas.openxmlformats.org/drawingml/2006/main">
             <a:off x="9048600" y="3686040"/>
-            <a:ext cx="2190240" cy="323640"/>
+            <a:ext cx="2189880" cy="323280"/>
           </a:xfrm>
           <a:prstGeom xmlns:a="http://schemas.openxmlformats.org/drawingml/2006/main" prst="rect">
             <a:avLst/>
@@ -10486,7 +10599,7 @@
           <p:cNvPr id="85" name="">
             <a:extLst xmlns:a="http://schemas.openxmlformats.org/drawingml/2006/main">
               <a:ext uri="{FF2B5EF4-FFF2-40B4-BE49-F238E27FC236}">
-                <a16:creationId xmlns:a16="http://schemas.microsoft.com/office/drawing/2014/main" id="{2CF4C34F-EE62-40ED-BCF1-57D35527B149}"/>
+                <a16:creationId xmlns:a16="http://schemas.microsoft.com/office/drawing/2014/main" id="{37924BD0-877B-4EFB-9726-9A3ACEA8A229}"/>
               </a:ext>
             </a:extLst>
           </p:cNvPr>
@@ -10498,7 +10611,7 @@
         <p:spPr>
           <a:xfrm xmlns:a="http://schemas.openxmlformats.org/drawingml/2006/main">
             <a:off x="6572160" y="4257720"/>
-            <a:ext cx="2095200" cy="609120"/>
+            <a:ext cx="2094840" cy="608760"/>
           </a:xfrm>
           <a:prstGeom xmlns:a="http://schemas.openxmlformats.org/drawingml/2006/main" prst="rect">
             <a:avLst/>
@@ -10553,7 +10666,7 @@
           <p:cNvPr id="86" name="">
             <a:extLst xmlns:a="http://schemas.openxmlformats.org/drawingml/2006/main">
               <a:ext uri="{FF2B5EF4-FFF2-40B4-BE49-F238E27FC236}">
-                <a16:creationId xmlns:a16="http://schemas.microsoft.com/office/drawing/2014/main" id="{1EF07840-46E0-4AAE-AED2-E8D11C71315D}"/>
+                <a16:creationId xmlns:a16="http://schemas.microsoft.com/office/drawing/2014/main" id="{4AB02CCB-983A-45DD-AD2C-8D2E5E124FE5}"/>
               </a:ext>
             </a:extLst>
           </p:cNvPr>
@@ -10565,7 +10678,7 @@
         <p:spPr>
           <a:xfrm xmlns:a="http://schemas.openxmlformats.org/drawingml/2006/main">
             <a:off x="6572160" y="4838760"/>
-            <a:ext cx="2095200" cy="323640"/>
+            <a:ext cx="2094840" cy="323280"/>
           </a:xfrm>
           <a:prstGeom xmlns:a="http://schemas.openxmlformats.org/drawingml/2006/main" prst="rect">
             <a:avLst/>
@@ -10620,7 +10733,7 @@
           <p:cNvPr id="87" name="">
             <a:extLst xmlns:a="http://schemas.openxmlformats.org/drawingml/2006/main">
               <a:ext uri="{FF2B5EF4-FFF2-40B4-BE49-F238E27FC236}">
-                <a16:creationId xmlns:a16="http://schemas.microsoft.com/office/drawing/2014/main" id="{DEFAF0BB-5268-4E50-9D78-D11A345BFB95}"/>
+                <a16:creationId xmlns:a16="http://schemas.microsoft.com/office/drawing/2014/main" id="{B8538626-8A9E-471A-922F-31A7D8816461}"/>
               </a:ext>
             </a:extLst>
           </p:cNvPr>
@@ -10632,7 +10745,7 @@
         <p:spPr>
           <a:xfrm xmlns:a="http://schemas.openxmlformats.org/drawingml/2006/main">
             <a:off x="590400" y="5219640"/>
-            <a:ext cx="11010600" cy="304560"/>
+            <a:ext cx="11010240" cy="304200"/>
           </a:xfrm>
           <a:prstGeom xmlns:a="http://schemas.openxmlformats.org/drawingml/2006/main" prst="rect">
             <a:avLst/>
@@ -10687,7 +10800,7 @@
           <p:cNvPr id="88" name="">
             <a:extLst xmlns:a="http://schemas.openxmlformats.org/drawingml/2006/main">
               <a:ext uri="{FF2B5EF4-FFF2-40B4-BE49-F238E27FC236}">
-                <a16:creationId xmlns:a16="http://schemas.microsoft.com/office/drawing/2014/main" id="{4948EE03-018D-47B1-9A68-9D7D272AD667}"/>
+                <a16:creationId xmlns:a16="http://schemas.microsoft.com/office/drawing/2014/main" id="{6F0A2575-6F3B-4B24-AEF6-9F4713C01170}"/>
               </a:ext>
             </a:extLst>
           </p:cNvPr>
@@ -10699,7 +10812,7 @@
         <p:spPr>
           <a:xfrm xmlns:a="http://schemas.openxmlformats.org/drawingml/2006/main">
             <a:off x="590400" y="5619600"/>
-            <a:ext cx="11010600" cy="342720"/>
+            <a:ext cx="11010240" cy="342360"/>
           </a:xfrm>
           <a:prstGeom xmlns:a="http://schemas.openxmlformats.org/drawingml/2006/main" prst="rect">
             <a:avLst/>
@@ -10746,7 +10859,7 @@
                 <a:latin typeface="Arial"/>
                 <a:ea typeface="Arial"/>
                 <a:cs typeface="Arial"/>
-                <a:hlinkClick xmlns:r="http://schemas.openxmlformats.org/officeDocument/2006/relationships" r:id="Rb252ca87dc9340a5"/>
+                <a:hlinkClick xmlns:r="http://schemas.openxmlformats.org/officeDocument/2006/relationships" r:id="R0d5ec8c70b0f4b9b"/>
               </a:rPr>
               <a:t>f359c54</a:t>
             </a:r>
@@ -10777,7 +10890,7 @@
           <p:cNvPr id="89" name="">
             <a:extLst xmlns:a="http://schemas.openxmlformats.org/drawingml/2006/main">
               <a:ext uri="{FF2B5EF4-FFF2-40B4-BE49-F238E27FC236}">
-                <a16:creationId xmlns:a16="http://schemas.microsoft.com/office/drawing/2014/main" id="{FFC760EB-B7E7-4169-8CAF-48501F1BC4C8}"/>
+                <a16:creationId xmlns:a16="http://schemas.microsoft.com/office/drawing/2014/main" id="{C6FDFE1E-445A-4FD7-BBB4-38862DE6790E}"/>
               </a:ext>
             </a:extLst>
           </p:cNvPr>
@@ -10789,7 +10902,7 @@
         <p:spPr>
           <a:xfrm xmlns:a="http://schemas.openxmlformats.org/drawingml/2006/main">
             <a:off x="590400" y="6067440"/>
-            <a:ext cx="2476080" cy="161640"/>
+            <a:ext cx="2475720" cy="161280"/>
           </a:xfrm>
           <a:prstGeom xmlns:a="http://schemas.openxmlformats.org/drawingml/2006/main" prst="rect">
             <a:avLst/>
@@ -10844,7 +10957,7 @@
           <p:cNvPr id="90" name="">
             <a:extLst xmlns:a="http://schemas.openxmlformats.org/drawingml/2006/main">
               <a:ext uri="{FF2B5EF4-FFF2-40B4-BE49-F238E27FC236}">
-                <a16:creationId xmlns:a16="http://schemas.microsoft.com/office/drawing/2014/main" id="{3945E749-C91C-4230-92A0-0FDA546DCE9A}"/>
+                <a16:creationId xmlns:a16="http://schemas.microsoft.com/office/drawing/2014/main" id="{45244933-FCDF-424C-AC1D-72F07FDE1202}"/>
               </a:ext>
             </a:extLst>
           </p:cNvPr>
@@ -10856,7 +10969,7 @@
         <p:spPr>
           <a:xfrm xmlns:a="http://schemas.openxmlformats.org/drawingml/2006/main">
             <a:off x="590400" y="6248520"/>
-            <a:ext cx="2476080" cy="218880"/>
+            <a:ext cx="2475720" cy="218520"/>
           </a:xfrm>
           <a:prstGeom xmlns:a="http://schemas.openxmlformats.org/drawingml/2006/main" prst="rect">
             <a:avLst/>
@@ -10892,7 +11005,7 @@
                 <a:latin typeface="Arial"/>
                 <a:ea typeface="Arial"/>
                 <a:cs typeface="Arial"/>
-                <a:hlinkClick xmlns:r="http://schemas.openxmlformats.org/officeDocument/2006/relationships" r:id="Raf9db0067cda4306"/>
+                <a:hlinkClick xmlns:r="http://schemas.openxmlformats.org/officeDocument/2006/relationships" r:id="R1fb809a102f341f9"/>
               </a:rPr>
               <a:t>a626556e…55657 ↗</a:t>
             </a:r>
@@ -10912,7 +11025,7 @@
           <p:cNvPr id="91" name="">
             <a:extLst xmlns:a="http://schemas.openxmlformats.org/drawingml/2006/main">
               <a:ext uri="{FF2B5EF4-FFF2-40B4-BE49-F238E27FC236}">
-                <a16:creationId xmlns:a16="http://schemas.microsoft.com/office/drawing/2014/main" id="{F4B3CC91-58A4-434D-A393-5BB710419D7C}"/>
+                <a16:creationId xmlns:a16="http://schemas.microsoft.com/office/drawing/2014/main" id="{3D15D0B8-D447-40C7-997D-32B8A9A6ACC0}"/>
               </a:ext>
             </a:extLst>
           </p:cNvPr>
@@ -10924,7 +11037,7 @@
         <p:spPr>
           <a:xfrm xmlns:a="http://schemas.openxmlformats.org/drawingml/2006/main">
             <a:off x="3314880" y="6067440"/>
-            <a:ext cx="2476080" cy="161640"/>
+            <a:ext cx="2475720" cy="161280"/>
           </a:xfrm>
           <a:prstGeom xmlns:a="http://schemas.openxmlformats.org/drawingml/2006/main" prst="rect">
             <a:avLst/>
@@ -10979,7 +11092,7 @@
           <p:cNvPr id="92" name="">
             <a:extLst xmlns:a="http://schemas.openxmlformats.org/drawingml/2006/main">
               <a:ext uri="{FF2B5EF4-FFF2-40B4-BE49-F238E27FC236}">
-                <a16:creationId xmlns:a16="http://schemas.microsoft.com/office/drawing/2014/main" id="{CA2DB3C8-6727-4DBE-8F87-1FF2963EDF0E}"/>
+                <a16:creationId xmlns:a16="http://schemas.microsoft.com/office/drawing/2014/main" id="{F14814E7-B9F0-406E-ADC7-47ADC66E44E6}"/>
               </a:ext>
             </a:extLst>
           </p:cNvPr>
@@ -10991,7 +11104,7 @@
         <p:spPr>
           <a:xfrm xmlns:a="http://schemas.openxmlformats.org/drawingml/2006/main">
             <a:off x="3314880" y="6248520"/>
-            <a:ext cx="2476080" cy="218880"/>
+            <a:ext cx="2475720" cy="218520"/>
           </a:xfrm>
           <a:prstGeom xmlns:a="http://schemas.openxmlformats.org/drawingml/2006/main" prst="rect">
             <a:avLst/>
@@ -11027,7 +11140,7 @@
                 <a:latin typeface="Arial"/>
                 <a:ea typeface="Arial"/>
                 <a:cs typeface="Arial"/>
-                <a:hlinkClick xmlns:r="http://schemas.openxmlformats.org/officeDocument/2006/relationships" r:id="R8b7c4c658eea475e"/>
+                <a:hlinkClick xmlns:r="http://schemas.openxmlformats.org/officeDocument/2006/relationships" r:id="R4d7e43b2c1a54e8e"/>
               </a:rPr>
               <a:t>c740cf0e…822ad ↗</a:t>
             </a:r>
@@ -11047,7 +11160,7 @@
           <p:cNvPr id="93" name="">
             <a:extLst xmlns:a="http://schemas.openxmlformats.org/drawingml/2006/main">
               <a:ext uri="{FF2B5EF4-FFF2-40B4-BE49-F238E27FC236}">
-                <a16:creationId xmlns:a16="http://schemas.microsoft.com/office/drawing/2014/main" id="{DF0BDD2B-40A3-4B33-BB23-B9E16668324C}"/>
+                <a16:creationId xmlns:a16="http://schemas.microsoft.com/office/drawing/2014/main" id="{31190262-A994-4B10-9612-5E35FE84061B}"/>
               </a:ext>
             </a:extLst>
           </p:cNvPr>
@@ -11059,7 +11172,7 @@
         <p:spPr>
           <a:xfrm xmlns:a="http://schemas.openxmlformats.org/drawingml/2006/main">
             <a:off x="6039000" y="6067440"/>
-            <a:ext cx="2476080" cy="161640"/>
+            <a:ext cx="2475720" cy="161280"/>
           </a:xfrm>
           <a:prstGeom xmlns:a="http://schemas.openxmlformats.org/drawingml/2006/main" prst="rect">
             <a:avLst/>
@@ -11114,7 +11227,7 @@
           <p:cNvPr id="94" name="">
             <a:extLst xmlns:a="http://schemas.openxmlformats.org/drawingml/2006/main">
               <a:ext uri="{FF2B5EF4-FFF2-40B4-BE49-F238E27FC236}">
-                <a16:creationId xmlns:a16="http://schemas.microsoft.com/office/drawing/2014/main" id="{99B8AE35-CC8F-4269-8E2D-9CE1AF336931}"/>
+                <a16:creationId xmlns:a16="http://schemas.microsoft.com/office/drawing/2014/main" id="{BBFF410A-6225-4D96-8448-1BBE69EA5488}"/>
               </a:ext>
             </a:extLst>
           </p:cNvPr>
@@ -11126,7 +11239,7 @@
         <p:spPr>
           <a:xfrm xmlns:a="http://schemas.openxmlformats.org/drawingml/2006/main">
             <a:off x="6039000" y="6248520"/>
-            <a:ext cx="2476080" cy="218880"/>
+            <a:ext cx="2475720" cy="218520"/>
           </a:xfrm>
           <a:prstGeom xmlns:a="http://schemas.openxmlformats.org/drawingml/2006/main" prst="rect">
             <a:avLst/>
@@ -11162,7 +11275,7 @@
                 <a:latin typeface="Arial"/>
                 <a:ea typeface="Arial"/>
                 <a:cs typeface="Arial"/>
-                <a:hlinkClick xmlns:r="http://schemas.openxmlformats.org/officeDocument/2006/relationships" r:id="R384c45fed3144c40"/>
+                <a:hlinkClick xmlns:r="http://schemas.openxmlformats.org/officeDocument/2006/relationships" r:id="R1acadc2743294224"/>
               </a:rPr>
               <a:t>a0c24a10…b13b6 ↗</a:t>
             </a:r>
@@ -11182,7 +11295,7 @@
           <p:cNvPr id="95" name="">
             <a:extLst xmlns:a="http://schemas.openxmlformats.org/drawingml/2006/main">
               <a:ext uri="{FF2B5EF4-FFF2-40B4-BE49-F238E27FC236}">
-                <a16:creationId xmlns:a16="http://schemas.microsoft.com/office/drawing/2014/main" id="{A84F0372-B1B7-497D-A493-F571FFC97D0B}"/>
+                <a16:creationId xmlns:a16="http://schemas.microsoft.com/office/drawing/2014/main" id="{F8F84816-3FCA-4198-BA74-032F8449ACD5}"/>
               </a:ext>
             </a:extLst>
           </p:cNvPr>
@@ -11194,7 +11307,7 @@
         <p:spPr>
           <a:xfrm xmlns:a="http://schemas.openxmlformats.org/drawingml/2006/main">
             <a:off x="8763120" y="6067440"/>
-            <a:ext cx="2476080" cy="161640"/>
+            <a:ext cx="2475720" cy="161280"/>
           </a:xfrm>
           <a:prstGeom xmlns:a="http://schemas.openxmlformats.org/drawingml/2006/main" prst="rect">
             <a:avLst/>
@@ -11249,7 +11362,7 @@
           <p:cNvPr id="96" name="">
             <a:extLst xmlns:a="http://schemas.openxmlformats.org/drawingml/2006/main">
               <a:ext uri="{FF2B5EF4-FFF2-40B4-BE49-F238E27FC236}">
-                <a16:creationId xmlns:a16="http://schemas.microsoft.com/office/drawing/2014/main" id="{612B38B2-1B8A-4789-A406-97A0ACBA44D2}"/>
+                <a16:creationId xmlns:a16="http://schemas.microsoft.com/office/drawing/2014/main" id="{FDD93FB3-276B-4750-9A43-1D799FC260F8}"/>
               </a:ext>
             </a:extLst>
           </p:cNvPr>
@@ -11261,7 +11374,7 @@
         <p:spPr>
           <a:xfrm xmlns:a="http://schemas.openxmlformats.org/drawingml/2006/main">
             <a:off x="8763120" y="6248520"/>
-            <a:ext cx="2476080" cy="218880"/>
+            <a:ext cx="2475720" cy="218520"/>
           </a:xfrm>
           <a:prstGeom xmlns:a="http://schemas.openxmlformats.org/drawingml/2006/main" prst="rect">
             <a:avLst/>
@@ -11297,7 +11410,7 @@
                 <a:latin typeface="Arial"/>
                 <a:ea typeface="Arial"/>
                 <a:cs typeface="Arial"/>
-                <a:hlinkClick xmlns:r="http://schemas.openxmlformats.org/officeDocument/2006/relationships" r:id="Rfbd8b26193b2469e"/>
+                <a:hlinkClick xmlns:r="http://schemas.openxmlformats.org/officeDocument/2006/relationships" r:id="Rf4cdc9222ee54d8b"/>
               </a:rPr>
               <a:t>8d859033…840c2 ↗</a:t>
             </a:r>
@@ -11315,7 +11428,7 @@
     </p:spTree>
     <p:extLst>
       <p:ext uri="{BB962C8B-B14F-4D97-AF65-F5344CB8AC3E}">
-        <p14:creationId xmlns:p14="http://schemas.microsoft.com/office/powerpoint/2010/main" val="1078787953"/>
+        <p14:creationId xmlns:p14="http://schemas.microsoft.com/office/powerpoint/2010/main" val="1642561747"/>
       </p:ext>
     </p:extLst>
   </p:cSld>
@@ -11346,7 +11459,7 @@
           <p:cNvPr id="97" name="">
             <a:extLst xmlns:a="http://schemas.openxmlformats.org/drawingml/2006/main">
               <a:ext uri="{FF2B5EF4-FFF2-40B4-BE49-F238E27FC236}">
-                <a16:creationId xmlns:a16="http://schemas.microsoft.com/office/drawing/2014/main" id="{558D8296-64CA-4230-8010-B64706320FC9}"/>
+                <a16:creationId xmlns:a16="http://schemas.microsoft.com/office/drawing/2014/main" id="{175F2B79-C7A5-4D9E-906A-F42FF913D4FF}"/>
               </a:ext>
             </a:extLst>
           </p:cNvPr>
@@ -11358,7 +11471,7 @@
         <p:spPr>
           <a:xfrm xmlns:a="http://schemas.openxmlformats.org/drawingml/2006/main">
             <a:off x="0" y="0"/>
-            <a:ext cx="12191760" cy="47160"/>
+            <a:ext cx="12191400" cy="46800"/>
           </a:xfrm>
           <a:prstGeom xmlns:a="http://schemas.openxmlformats.org/drawingml/2006/main" prst="rect">
             <a:avLst/>
@@ -11398,7 +11511,7 @@
           <p:cNvPr id="98" name="">
             <a:extLst xmlns:a="http://schemas.openxmlformats.org/drawingml/2006/main">
               <a:ext uri="{FF2B5EF4-FFF2-40B4-BE49-F238E27FC236}">
-                <a16:creationId xmlns:a16="http://schemas.microsoft.com/office/drawing/2014/main" id="{5576471A-4CB5-4042-8C1D-96044CDB5EEA}"/>
+                <a16:creationId xmlns:a16="http://schemas.microsoft.com/office/drawing/2014/main" id="{4AD5FAB9-EE6C-473A-B7D1-68E89841E124}"/>
               </a:ext>
             </a:extLst>
           </p:cNvPr>
@@ -11410,7 +11523,7 @@
         <p:spPr>
           <a:xfrm xmlns:a="http://schemas.openxmlformats.org/drawingml/2006/main">
             <a:off x="590400" y="266760"/>
-            <a:ext cx="4190760" cy="237600"/>
+            <a:ext cx="4190400" cy="237240"/>
           </a:xfrm>
           <a:prstGeom xmlns:a="http://schemas.openxmlformats.org/drawingml/2006/main" prst="rect">
             <a:avLst/>
@@ -11465,7 +11578,7 @@
           <p:cNvPr id="99" name="">
             <a:extLst xmlns:a="http://schemas.openxmlformats.org/drawingml/2006/main">
               <a:ext uri="{FF2B5EF4-FFF2-40B4-BE49-F238E27FC236}">
-                <a16:creationId xmlns:a16="http://schemas.microsoft.com/office/drawing/2014/main" id="{48DB2318-CDB8-4EC5-9DD9-44605D90C232}"/>
+                <a16:creationId xmlns:a16="http://schemas.microsoft.com/office/drawing/2014/main" id="{D16B5129-BEE9-4D6D-8212-3F30C7F43962}"/>
               </a:ext>
             </a:extLst>
           </p:cNvPr>
@@ -11477,7 +11590,7 @@
         <p:spPr>
           <a:xfrm xmlns:a="http://schemas.openxmlformats.org/drawingml/2006/main">
             <a:off x="11144160" y="266760"/>
-            <a:ext cx="456840" cy="237600"/>
+            <a:ext cx="456480" cy="237240"/>
           </a:xfrm>
           <a:prstGeom xmlns:a="http://schemas.openxmlformats.org/drawingml/2006/main" prst="rect">
             <a:avLst/>
@@ -11532,7 +11645,7 @@
           <p:cNvPr id="100" name="">
             <a:extLst xmlns:a="http://schemas.openxmlformats.org/drawingml/2006/main">
               <a:ext uri="{FF2B5EF4-FFF2-40B4-BE49-F238E27FC236}">
-                <a16:creationId xmlns:a16="http://schemas.microsoft.com/office/drawing/2014/main" id="{6F385C91-6F06-41E4-9548-E9BD32D91251}"/>
+                <a16:creationId xmlns:a16="http://schemas.microsoft.com/office/drawing/2014/main" id="{21802EE8-2427-4856-B278-9A51A93EDDDA}"/>
               </a:ext>
             </a:extLst>
           </p:cNvPr>
@@ -11544,7 +11657,7 @@
         <p:spPr>
           <a:xfrm xmlns:a="http://schemas.openxmlformats.org/drawingml/2006/main">
             <a:off x="590400" y="571680"/>
-            <a:ext cx="11010600" cy="9000"/>
+            <a:ext cx="11010240" cy="8640"/>
           </a:xfrm>
           <a:prstGeom xmlns:a="http://schemas.openxmlformats.org/drawingml/2006/main" prst="rect">
             <a:avLst/>
@@ -11584,7 +11697,7 @@
           <p:cNvPr id="101" name="">
             <a:extLst xmlns:a="http://schemas.openxmlformats.org/drawingml/2006/main">
               <a:ext uri="{FF2B5EF4-FFF2-40B4-BE49-F238E27FC236}">
-                <a16:creationId xmlns:a16="http://schemas.microsoft.com/office/drawing/2014/main" id="{839B0B9A-79A8-4F6A-9FB8-06C315CC80F4}"/>
+                <a16:creationId xmlns:a16="http://schemas.microsoft.com/office/drawing/2014/main" id="{30D5FB3C-17C1-4E77-BCAA-AD7CBDDA47F4}"/>
               </a:ext>
             </a:extLst>
           </p:cNvPr>
@@ -11596,7 +11709,7 @@
         <p:spPr>
           <a:xfrm xmlns:a="http://schemas.openxmlformats.org/drawingml/2006/main">
             <a:off x="590400" y="781200"/>
-            <a:ext cx="11010600" cy="723600"/>
+            <a:ext cx="11010240" cy="723240"/>
           </a:xfrm>
           <a:prstGeom xmlns:a="http://schemas.openxmlformats.org/drawingml/2006/main" prst="rect">
             <a:avLst/>
@@ -11651,7 +11764,7 @@
           <p:cNvPr id="102" name="">
             <a:extLst xmlns:a="http://schemas.openxmlformats.org/drawingml/2006/main">
               <a:ext uri="{FF2B5EF4-FFF2-40B4-BE49-F238E27FC236}">
-                <a16:creationId xmlns:a16="http://schemas.microsoft.com/office/drawing/2014/main" id="{9E14EFC7-08CA-4606-9E8D-DB9A0E54A767}"/>
+                <a16:creationId xmlns:a16="http://schemas.microsoft.com/office/drawing/2014/main" id="{938AA23C-C857-494D-8899-8480AE0C0F20}"/>
               </a:ext>
             </a:extLst>
           </p:cNvPr>
@@ -11663,7 +11776,7 @@
         <p:spPr>
           <a:xfrm xmlns:a="http://schemas.openxmlformats.org/drawingml/2006/main">
             <a:off x="590400" y="1762200"/>
-            <a:ext cx="5362200" cy="228240"/>
+            <a:ext cx="5361840" cy="227880"/>
           </a:xfrm>
           <a:prstGeom xmlns:a="http://schemas.openxmlformats.org/drawingml/2006/main" prst="rect">
             <a:avLst/>
@@ -11718,7 +11831,7 @@
           <p:cNvPr id="103" name="">
             <a:extLst xmlns:a="http://schemas.openxmlformats.org/drawingml/2006/main">
               <a:ext uri="{FF2B5EF4-FFF2-40B4-BE49-F238E27FC236}">
-                <a16:creationId xmlns:a16="http://schemas.microsoft.com/office/drawing/2014/main" id="{5EFD9A98-E10E-48DD-874B-8F4254E18E6B}"/>
+                <a16:creationId xmlns:a16="http://schemas.microsoft.com/office/drawing/2014/main" id="{5723EF73-9F90-4C1C-AD8F-B8F1A93964B5}"/>
               </a:ext>
             </a:extLst>
           </p:cNvPr>
@@ -11730,7 +11843,7 @@
         <p:spPr>
           <a:xfrm xmlns:a="http://schemas.openxmlformats.org/drawingml/2006/main">
             <a:off x="590400" y="2085840"/>
-            <a:ext cx="5362200" cy="18720"/>
+            <a:ext cx="5361840" cy="18360"/>
           </a:xfrm>
           <a:prstGeom xmlns:a="http://schemas.openxmlformats.org/drawingml/2006/main" prst="rect">
             <a:avLst/>
@@ -11770,7 +11883,7 @@
           <p:cNvPr id="104" name="">
             <a:extLst xmlns:a="http://schemas.openxmlformats.org/drawingml/2006/main">
               <a:ext uri="{FF2B5EF4-FFF2-40B4-BE49-F238E27FC236}">
-                <a16:creationId xmlns:a16="http://schemas.microsoft.com/office/drawing/2014/main" id="{C7410C39-0170-47F6-BEAD-5B7BFFACD547}"/>
+                <a16:creationId xmlns:a16="http://schemas.microsoft.com/office/drawing/2014/main" id="{8E2804AC-623C-4249-A52E-00E8AC2B54EB}"/>
               </a:ext>
             </a:extLst>
           </p:cNvPr>
@@ -11782,7 +11895,7 @@
         <p:spPr>
           <a:xfrm xmlns:a="http://schemas.openxmlformats.org/drawingml/2006/main">
             <a:off x="590400" y="2333520"/>
-            <a:ext cx="266400" cy="266400"/>
+            <a:ext cx="266040" cy="266040"/>
           </a:xfrm>
           <a:prstGeom xmlns:a="http://schemas.openxmlformats.org/drawingml/2006/main" prst="rect">
             <a:avLst/>
@@ -11837,7 +11950,7 @@
           <p:cNvPr id="105" name="">
             <a:extLst xmlns:a="http://schemas.openxmlformats.org/drawingml/2006/main">
               <a:ext uri="{FF2B5EF4-FFF2-40B4-BE49-F238E27FC236}">
-                <a16:creationId xmlns:a16="http://schemas.microsoft.com/office/drawing/2014/main" id="{165F468B-3388-4F04-BA73-839BDFF0C307}"/>
+                <a16:creationId xmlns:a16="http://schemas.microsoft.com/office/drawing/2014/main" id="{C6D7C71A-0ACA-4E2E-9CB6-509E262330B6}"/>
               </a:ext>
             </a:extLst>
           </p:cNvPr>
@@ -11849,7 +11962,7 @@
         <p:spPr>
           <a:xfrm xmlns:a="http://schemas.openxmlformats.org/drawingml/2006/main">
             <a:off x="971640" y="2314440"/>
-            <a:ext cx="4981320" cy="552240"/>
+            <a:ext cx="4980960" cy="551880"/>
           </a:xfrm>
           <a:prstGeom xmlns:a="http://schemas.openxmlformats.org/drawingml/2006/main" prst="rect">
             <a:avLst/>
@@ -11904,7 +12017,7 @@
           <p:cNvPr id="106" name="">
             <a:extLst xmlns:a="http://schemas.openxmlformats.org/drawingml/2006/main">
               <a:ext uri="{FF2B5EF4-FFF2-40B4-BE49-F238E27FC236}">
-                <a16:creationId xmlns:a16="http://schemas.microsoft.com/office/drawing/2014/main" id="{9CEA5AD3-58F9-41BE-8442-3E66641328CD}"/>
+                <a16:creationId xmlns:a16="http://schemas.microsoft.com/office/drawing/2014/main" id="{A79FF1F1-B784-444C-B46A-2978707E9076}"/>
               </a:ext>
             </a:extLst>
           </p:cNvPr>
@@ -11916,7 +12029,7 @@
         <p:spPr>
           <a:xfrm xmlns:a="http://schemas.openxmlformats.org/drawingml/2006/main">
             <a:off x="590400" y="3009960"/>
-            <a:ext cx="266400" cy="266400"/>
+            <a:ext cx="266040" cy="266040"/>
           </a:xfrm>
           <a:prstGeom xmlns:a="http://schemas.openxmlformats.org/drawingml/2006/main" prst="rect">
             <a:avLst/>
@@ -11971,7 +12084,7 @@
           <p:cNvPr id="107" name="">
             <a:extLst xmlns:a="http://schemas.openxmlformats.org/drawingml/2006/main">
               <a:ext uri="{FF2B5EF4-FFF2-40B4-BE49-F238E27FC236}">
-                <a16:creationId xmlns:a16="http://schemas.microsoft.com/office/drawing/2014/main" id="{61AC11D5-1459-4A06-A92E-4951F80BDF64}"/>
+                <a16:creationId xmlns:a16="http://schemas.microsoft.com/office/drawing/2014/main" id="{10C24BA5-648E-4019-AE29-804ACAF6393A}"/>
               </a:ext>
             </a:extLst>
           </p:cNvPr>
@@ -11983,7 +12096,7 @@
         <p:spPr>
           <a:xfrm xmlns:a="http://schemas.openxmlformats.org/drawingml/2006/main">
             <a:off x="971640" y="2990880"/>
-            <a:ext cx="4981320" cy="552240"/>
+            <a:ext cx="4980960" cy="551880"/>
           </a:xfrm>
           <a:prstGeom xmlns:a="http://schemas.openxmlformats.org/drawingml/2006/main" prst="rect">
             <a:avLst/>
@@ -12038,7 +12151,7 @@
           <p:cNvPr id="108" name="">
             <a:extLst xmlns:a="http://schemas.openxmlformats.org/drawingml/2006/main">
               <a:ext uri="{FF2B5EF4-FFF2-40B4-BE49-F238E27FC236}">
-                <a16:creationId xmlns:a16="http://schemas.microsoft.com/office/drawing/2014/main" id="{8BB219E4-6AB8-4ABB-A6FB-EC3C5B907F87}"/>
+                <a16:creationId xmlns:a16="http://schemas.microsoft.com/office/drawing/2014/main" id="{842E6D52-2A86-4B02-9BEE-A2B4422C08B0}"/>
               </a:ext>
             </a:extLst>
           </p:cNvPr>
@@ -12050,7 +12163,7 @@
         <p:spPr>
           <a:xfrm xmlns:a="http://schemas.openxmlformats.org/drawingml/2006/main">
             <a:off x="590400" y="3686040"/>
-            <a:ext cx="266400" cy="266400"/>
+            <a:ext cx="266040" cy="266040"/>
           </a:xfrm>
           <a:prstGeom xmlns:a="http://schemas.openxmlformats.org/drawingml/2006/main" prst="rect">
             <a:avLst/>
@@ -12105,7 +12218,7 @@
           <p:cNvPr id="109" name="">
             <a:extLst xmlns:a="http://schemas.openxmlformats.org/drawingml/2006/main">
               <a:ext uri="{FF2B5EF4-FFF2-40B4-BE49-F238E27FC236}">
-                <a16:creationId xmlns:a16="http://schemas.microsoft.com/office/drawing/2014/main" id="{D063C799-CBF5-48C1-8357-E6F6B7C1A86C}"/>
+                <a16:creationId xmlns:a16="http://schemas.microsoft.com/office/drawing/2014/main" id="{6929311E-8B88-4FE2-AE45-E60C3D1E90CC}"/>
               </a:ext>
             </a:extLst>
           </p:cNvPr>
@@ -12117,7 +12230,7 @@
         <p:spPr>
           <a:xfrm xmlns:a="http://schemas.openxmlformats.org/drawingml/2006/main">
             <a:off x="971640" y="3666960"/>
-            <a:ext cx="4981320" cy="552240"/>
+            <a:ext cx="4980960" cy="551880"/>
           </a:xfrm>
           <a:prstGeom xmlns:a="http://schemas.openxmlformats.org/drawingml/2006/main" prst="rect">
             <a:avLst/>
@@ -12172,7 +12285,7 @@
           <p:cNvPr id="110" name="">
             <a:extLst xmlns:a="http://schemas.openxmlformats.org/drawingml/2006/main">
               <a:ext uri="{FF2B5EF4-FFF2-40B4-BE49-F238E27FC236}">
-                <a16:creationId xmlns:a16="http://schemas.microsoft.com/office/drawing/2014/main" id="{A2926BBF-F6CD-47CB-A993-DCB32094133B}"/>
+                <a16:creationId xmlns:a16="http://schemas.microsoft.com/office/drawing/2014/main" id="{A1E05F30-DB66-459C-B10E-73307EE14837}"/>
               </a:ext>
             </a:extLst>
           </p:cNvPr>
@@ -12184,7 +12297,7 @@
         <p:spPr>
           <a:xfrm xmlns:a="http://schemas.openxmlformats.org/drawingml/2006/main">
             <a:off x="590400" y="4362480"/>
-            <a:ext cx="266400" cy="266400"/>
+            <a:ext cx="266040" cy="266040"/>
           </a:xfrm>
           <a:prstGeom xmlns:a="http://schemas.openxmlformats.org/drawingml/2006/main" prst="rect">
             <a:avLst/>
@@ -12239,7 +12352,7 @@
           <p:cNvPr id="111" name="">
             <a:extLst xmlns:a="http://schemas.openxmlformats.org/drawingml/2006/main">
               <a:ext uri="{FF2B5EF4-FFF2-40B4-BE49-F238E27FC236}">
-                <a16:creationId xmlns:a16="http://schemas.microsoft.com/office/drawing/2014/main" id="{D2A16039-7065-4A0A-B37D-C71C1256AB3C}"/>
+                <a16:creationId xmlns:a16="http://schemas.microsoft.com/office/drawing/2014/main" id="{560927AC-0A6C-4183-A8B2-75B469A9D65D}"/>
               </a:ext>
             </a:extLst>
           </p:cNvPr>
@@ -12251,7 +12364,7 @@
         <p:spPr>
           <a:xfrm xmlns:a="http://schemas.openxmlformats.org/drawingml/2006/main">
             <a:off x="971640" y="4343400"/>
-            <a:ext cx="4981320" cy="552240"/>
+            <a:ext cx="4980960" cy="551880"/>
           </a:xfrm>
           <a:prstGeom xmlns:a="http://schemas.openxmlformats.org/drawingml/2006/main" prst="rect">
             <a:avLst/>
@@ -12306,7 +12419,7 @@
           <p:cNvPr id="112" name="">
             <a:extLst xmlns:a="http://schemas.openxmlformats.org/drawingml/2006/main">
               <a:ext uri="{FF2B5EF4-FFF2-40B4-BE49-F238E27FC236}">
-                <a16:creationId xmlns:a16="http://schemas.microsoft.com/office/drawing/2014/main" id="{485E36AC-71DA-408F-B684-827240788E28}"/>
+                <a16:creationId xmlns:a16="http://schemas.microsoft.com/office/drawing/2014/main" id="{2108CE0A-6AEC-4B44-BE82-1025FAD7EFD3}"/>
               </a:ext>
             </a:extLst>
           </p:cNvPr>
@@ -12318,7 +12431,7 @@
         <p:spPr>
           <a:xfrm xmlns:a="http://schemas.openxmlformats.org/drawingml/2006/main">
             <a:off x="6238800" y="1762200"/>
-            <a:ext cx="5362200" cy="228240"/>
+            <a:ext cx="5361840" cy="227880"/>
           </a:xfrm>
           <a:prstGeom xmlns:a="http://schemas.openxmlformats.org/drawingml/2006/main" prst="rect">
             <a:avLst/>
@@ -12373,7 +12486,7 @@
           <p:cNvPr id="113" name="">
             <a:extLst xmlns:a="http://schemas.openxmlformats.org/drawingml/2006/main">
               <a:ext uri="{FF2B5EF4-FFF2-40B4-BE49-F238E27FC236}">
-                <a16:creationId xmlns:a16="http://schemas.microsoft.com/office/drawing/2014/main" id="{F9A6C17E-2001-4637-A59F-BAE072FC942A}"/>
+                <a16:creationId xmlns:a16="http://schemas.microsoft.com/office/drawing/2014/main" id="{C734AC51-D1AC-41A5-8E4B-F2FDFBCE6A0C}"/>
               </a:ext>
             </a:extLst>
           </p:cNvPr>
@@ -12385,7 +12498,7 @@
         <p:spPr>
           <a:xfrm xmlns:a="http://schemas.openxmlformats.org/drawingml/2006/main">
             <a:off x="6238800" y="2085840"/>
-            <a:ext cx="5362200" cy="18720"/>
+            <a:ext cx="5361840" cy="18360"/>
           </a:xfrm>
           <a:prstGeom xmlns:a="http://schemas.openxmlformats.org/drawingml/2006/main" prst="rect">
             <a:avLst/>
@@ -12425,7 +12538,7 @@
           <p:cNvPr id="114" name="">
             <a:extLst xmlns:a="http://schemas.openxmlformats.org/drawingml/2006/main">
               <a:ext uri="{FF2B5EF4-FFF2-40B4-BE49-F238E27FC236}">
-                <a16:creationId xmlns:a16="http://schemas.microsoft.com/office/drawing/2014/main" id="{2A82BFCD-9809-4902-8C4D-B690D7625024}"/>
+                <a16:creationId xmlns:a16="http://schemas.microsoft.com/office/drawing/2014/main" id="{D921BBD7-D058-46BE-ADFD-6677F6BD42E5}"/>
               </a:ext>
             </a:extLst>
           </p:cNvPr>
@@ -12437,7 +12550,7 @@
         <p:spPr>
           <a:xfrm xmlns:a="http://schemas.openxmlformats.org/drawingml/2006/main">
             <a:off x="6238800" y="2333520"/>
-            <a:ext cx="266400" cy="266400"/>
+            <a:ext cx="266040" cy="266040"/>
           </a:xfrm>
           <a:prstGeom xmlns:a="http://schemas.openxmlformats.org/drawingml/2006/main" prst="rect">
             <a:avLst/>
@@ -12492,7 +12605,7 @@
           <p:cNvPr id="115" name="">
             <a:extLst xmlns:a="http://schemas.openxmlformats.org/drawingml/2006/main">
               <a:ext uri="{FF2B5EF4-FFF2-40B4-BE49-F238E27FC236}">
-                <a16:creationId xmlns:a16="http://schemas.microsoft.com/office/drawing/2014/main" id="{A9A52EE9-467B-490B-8D29-991EDE969E97}"/>
+                <a16:creationId xmlns:a16="http://schemas.microsoft.com/office/drawing/2014/main" id="{00B9E9D6-704E-4B05-AC7B-2FAEF78B4A0E}"/>
               </a:ext>
             </a:extLst>
           </p:cNvPr>
@@ -12504,7 +12617,7 @@
         <p:spPr>
           <a:xfrm xmlns:a="http://schemas.openxmlformats.org/drawingml/2006/main">
             <a:off x="6620040" y="2314440"/>
-            <a:ext cx="4981320" cy="552240"/>
+            <a:ext cx="4980960" cy="551880"/>
           </a:xfrm>
           <a:prstGeom xmlns:a="http://schemas.openxmlformats.org/drawingml/2006/main" prst="rect">
             <a:avLst/>
@@ -12559,7 +12672,7 @@
           <p:cNvPr id="116" name="">
             <a:extLst xmlns:a="http://schemas.openxmlformats.org/drawingml/2006/main">
               <a:ext uri="{FF2B5EF4-FFF2-40B4-BE49-F238E27FC236}">
-                <a16:creationId xmlns:a16="http://schemas.microsoft.com/office/drawing/2014/main" id="{5BE4FEF7-0F01-49B4-B178-762C95C58025}"/>
+                <a16:creationId xmlns:a16="http://schemas.microsoft.com/office/drawing/2014/main" id="{036C54EC-30EF-4820-8379-469AEA4CC85B}"/>
               </a:ext>
             </a:extLst>
           </p:cNvPr>
@@ -12571,7 +12684,7 @@
         <p:spPr>
           <a:xfrm xmlns:a="http://schemas.openxmlformats.org/drawingml/2006/main">
             <a:off x="6238800" y="3009960"/>
-            <a:ext cx="266400" cy="266400"/>
+            <a:ext cx="266040" cy="266040"/>
           </a:xfrm>
           <a:prstGeom xmlns:a="http://schemas.openxmlformats.org/drawingml/2006/main" prst="rect">
             <a:avLst/>
@@ -12626,7 +12739,7 @@
           <p:cNvPr id="117" name="">
             <a:extLst xmlns:a="http://schemas.openxmlformats.org/drawingml/2006/main">
               <a:ext uri="{FF2B5EF4-FFF2-40B4-BE49-F238E27FC236}">
-                <a16:creationId xmlns:a16="http://schemas.microsoft.com/office/drawing/2014/main" id="{5F031C95-262F-489E-88D1-93B179F4E7D2}"/>
+                <a16:creationId xmlns:a16="http://schemas.microsoft.com/office/drawing/2014/main" id="{65D91795-7872-4EAE-BE92-E59B29D1732F}"/>
               </a:ext>
             </a:extLst>
           </p:cNvPr>
@@ -12638,7 +12751,7 @@
         <p:spPr>
           <a:xfrm xmlns:a="http://schemas.openxmlformats.org/drawingml/2006/main">
             <a:off x="6620040" y="2990880"/>
-            <a:ext cx="4981320" cy="552240"/>
+            <a:ext cx="4980960" cy="551880"/>
           </a:xfrm>
           <a:prstGeom xmlns:a="http://schemas.openxmlformats.org/drawingml/2006/main" prst="rect">
             <a:avLst/>
@@ -12693,7 +12806,7 @@
           <p:cNvPr id="118" name="">
             <a:extLst xmlns:a="http://schemas.openxmlformats.org/drawingml/2006/main">
               <a:ext uri="{FF2B5EF4-FFF2-40B4-BE49-F238E27FC236}">
-                <a16:creationId xmlns:a16="http://schemas.microsoft.com/office/drawing/2014/main" id="{19875E23-F739-4D1E-996F-E42F811561B0}"/>
+                <a16:creationId xmlns:a16="http://schemas.microsoft.com/office/drawing/2014/main" id="{001EB4EC-2D6B-490F-811E-69F8AD1466F9}"/>
               </a:ext>
             </a:extLst>
           </p:cNvPr>
@@ -12705,7 +12818,7 @@
         <p:spPr>
           <a:xfrm xmlns:a="http://schemas.openxmlformats.org/drawingml/2006/main">
             <a:off x="6238800" y="3686040"/>
-            <a:ext cx="266400" cy="266400"/>
+            <a:ext cx="266040" cy="266040"/>
           </a:xfrm>
           <a:prstGeom xmlns:a="http://schemas.openxmlformats.org/drawingml/2006/main" prst="rect">
             <a:avLst/>
@@ -12760,7 +12873,7 @@
           <p:cNvPr id="119" name="">
             <a:extLst xmlns:a="http://schemas.openxmlformats.org/drawingml/2006/main">
               <a:ext uri="{FF2B5EF4-FFF2-40B4-BE49-F238E27FC236}">
-                <a16:creationId xmlns:a16="http://schemas.microsoft.com/office/drawing/2014/main" id="{D7C800F8-8A6D-4649-A766-53B3993CBCC9}"/>
+                <a16:creationId xmlns:a16="http://schemas.microsoft.com/office/drawing/2014/main" id="{18609589-B1F0-4897-8E17-3037521D3612}"/>
               </a:ext>
             </a:extLst>
           </p:cNvPr>
@@ -12772,7 +12885,7 @@
         <p:spPr>
           <a:xfrm xmlns:a="http://schemas.openxmlformats.org/drawingml/2006/main">
             <a:off x="6620040" y="3666960"/>
-            <a:ext cx="4981320" cy="552240"/>
+            <a:ext cx="4980960" cy="551880"/>
           </a:xfrm>
           <a:prstGeom xmlns:a="http://schemas.openxmlformats.org/drawingml/2006/main" prst="rect">
             <a:avLst/>
@@ -12827,7 +12940,7 @@
           <p:cNvPr id="120" name="">
             <a:extLst xmlns:a="http://schemas.openxmlformats.org/drawingml/2006/main">
               <a:ext uri="{FF2B5EF4-FFF2-40B4-BE49-F238E27FC236}">
-                <a16:creationId xmlns:a16="http://schemas.microsoft.com/office/drawing/2014/main" id="{73F83D29-7957-47C6-A867-35943FC60ACB}"/>
+                <a16:creationId xmlns:a16="http://schemas.microsoft.com/office/drawing/2014/main" id="{F39E7E1C-8D63-4962-8524-A0CC80A68FD9}"/>
               </a:ext>
             </a:extLst>
           </p:cNvPr>
@@ -12839,7 +12952,7 @@
         <p:spPr>
           <a:xfrm xmlns:a="http://schemas.openxmlformats.org/drawingml/2006/main">
             <a:off x="6238800" y="4362480"/>
-            <a:ext cx="266400" cy="266400"/>
+            <a:ext cx="266040" cy="266040"/>
           </a:xfrm>
           <a:prstGeom xmlns:a="http://schemas.openxmlformats.org/drawingml/2006/main" prst="rect">
             <a:avLst/>
@@ -12894,7 +13007,7 @@
           <p:cNvPr id="121" name="">
             <a:extLst xmlns:a="http://schemas.openxmlformats.org/drawingml/2006/main">
               <a:ext uri="{FF2B5EF4-FFF2-40B4-BE49-F238E27FC236}">
-                <a16:creationId xmlns:a16="http://schemas.microsoft.com/office/drawing/2014/main" id="{EC41A367-05E9-47D2-B1EA-951C9E6EEEA3}"/>
+                <a16:creationId xmlns:a16="http://schemas.microsoft.com/office/drawing/2014/main" id="{C577F4F4-FE99-4A31-B2B7-BA0101686A03}"/>
               </a:ext>
             </a:extLst>
           </p:cNvPr>
@@ -12906,7 +13019,7 @@
         <p:spPr>
           <a:xfrm xmlns:a="http://schemas.openxmlformats.org/drawingml/2006/main">
             <a:off x="6620040" y="4343400"/>
-            <a:ext cx="4981320" cy="552240"/>
+            <a:ext cx="4980960" cy="551880"/>
           </a:xfrm>
           <a:prstGeom xmlns:a="http://schemas.openxmlformats.org/drawingml/2006/main" prst="rect">
             <a:avLst/>
@@ -12961,7 +13074,7 @@
           <p:cNvPr id="122" name="">
             <a:extLst xmlns:a="http://schemas.openxmlformats.org/drawingml/2006/main">
               <a:ext uri="{FF2B5EF4-FFF2-40B4-BE49-F238E27FC236}">
-                <a16:creationId xmlns:a16="http://schemas.microsoft.com/office/drawing/2014/main" id="{586BD045-6FC8-48D9-AD40-8A15A0939795}"/>
+                <a16:creationId xmlns:a16="http://schemas.microsoft.com/office/drawing/2014/main" id="{7F170901-6E19-43D5-BB11-3B537444FC8F}"/>
               </a:ext>
             </a:extLst>
           </p:cNvPr>
@@ -12973,7 +13086,7 @@
         <p:spPr>
           <a:xfrm xmlns:a="http://schemas.openxmlformats.org/drawingml/2006/main">
             <a:off x="590400" y="5219640"/>
-            <a:ext cx="11010600" cy="875880"/>
+            <a:ext cx="11010240" cy="875520"/>
           </a:xfrm>
           <a:prstGeom xmlns:a="http://schemas.openxmlformats.org/drawingml/2006/main" prst="roundRect">
             <a:avLst>
@@ -13017,7 +13130,7 @@
           <p:cNvPr id="123" name="">
             <a:extLst xmlns:a="http://schemas.openxmlformats.org/drawingml/2006/main">
               <a:ext uri="{FF2B5EF4-FFF2-40B4-BE49-F238E27FC236}">
-                <a16:creationId xmlns:a16="http://schemas.microsoft.com/office/drawing/2014/main" id="{459CA93E-0616-477A-90EF-8C2AED774DA6}"/>
+                <a16:creationId xmlns:a16="http://schemas.microsoft.com/office/drawing/2014/main" id="{3B02B9BF-162D-4DB7-A407-BDE21EA238D4}"/>
               </a:ext>
             </a:extLst>
           </p:cNvPr>
@@ -13029,7 +13142,7 @@
         <p:spPr>
           <a:xfrm xmlns:a="http://schemas.openxmlformats.org/drawingml/2006/main">
             <a:off x="819000" y="5429160"/>
-            <a:ext cx="1618920" cy="209160"/>
+            <a:ext cx="1618560" cy="208800"/>
           </a:xfrm>
           <a:prstGeom xmlns:a="http://schemas.openxmlformats.org/drawingml/2006/main" prst="rect">
             <a:avLst/>
@@ -13084,7 +13197,7 @@
           <p:cNvPr id="124" name="">
             <a:extLst xmlns:a="http://schemas.openxmlformats.org/drawingml/2006/main">
               <a:ext uri="{FF2B5EF4-FFF2-40B4-BE49-F238E27FC236}">
-                <a16:creationId xmlns:a16="http://schemas.microsoft.com/office/drawing/2014/main" id="{B78C64D6-260C-4C4B-9875-09D6256D01CF}"/>
+                <a16:creationId xmlns:a16="http://schemas.microsoft.com/office/drawing/2014/main" id="{03B3991B-E93B-4C59-83A1-B7EBFF114877}"/>
               </a:ext>
             </a:extLst>
           </p:cNvPr>
@@ -13096,7 +13209,7 @@
         <p:spPr>
           <a:xfrm xmlns:a="http://schemas.openxmlformats.org/drawingml/2006/main">
             <a:off x="2428920" y="5353200"/>
-            <a:ext cx="8810280" cy="552240"/>
+            <a:ext cx="8809920" cy="551880"/>
           </a:xfrm>
           <a:prstGeom xmlns:a="http://schemas.openxmlformats.org/drawingml/2006/main" prst="rect">
             <a:avLst/>
@@ -13149,7 +13262,7 @@
     </p:spTree>
     <p:extLst>
       <p:ext uri="{BB962C8B-B14F-4D97-AF65-F5344CB8AC3E}">
-        <p14:creationId xmlns:p14="http://schemas.microsoft.com/office/powerpoint/2010/main" val="1928128257"/>
+        <p14:creationId xmlns:p14="http://schemas.microsoft.com/office/powerpoint/2010/main" val="809838268"/>
       </p:ext>
     </p:extLst>
   </p:cSld>
@@ -13180,7 +13293,7 @@
           <p:cNvPr id="125" name="">
             <a:extLst xmlns:a="http://schemas.openxmlformats.org/drawingml/2006/main">
               <a:ext uri="{FF2B5EF4-FFF2-40B4-BE49-F238E27FC236}">
-                <a16:creationId xmlns:a16="http://schemas.microsoft.com/office/drawing/2014/main" id="{B114BC02-9259-4B98-A2F5-441367FEB353}"/>
+                <a16:creationId xmlns:a16="http://schemas.microsoft.com/office/drawing/2014/main" id="{4326BB17-9EB5-4544-88BE-E43640CC3D61}"/>
               </a:ext>
             </a:extLst>
           </p:cNvPr>
@@ -13192,7 +13305,7 @@
         <p:spPr>
           <a:xfrm xmlns:a="http://schemas.openxmlformats.org/drawingml/2006/main">
             <a:off x="0" y="0"/>
-            <a:ext cx="12191760" cy="47160"/>
+            <a:ext cx="12191400" cy="46800"/>
           </a:xfrm>
           <a:prstGeom xmlns:a="http://schemas.openxmlformats.org/drawingml/2006/main" prst="rect">
             <a:avLst/>
@@ -13232,7 +13345,7 @@
           <p:cNvPr id="126" name="">
             <a:extLst xmlns:a="http://schemas.openxmlformats.org/drawingml/2006/main">
               <a:ext uri="{FF2B5EF4-FFF2-40B4-BE49-F238E27FC236}">
-                <a16:creationId xmlns:a16="http://schemas.microsoft.com/office/drawing/2014/main" id="{993748DF-CD04-42FD-98FC-6629FAF71C10}"/>
+                <a16:creationId xmlns:a16="http://schemas.microsoft.com/office/drawing/2014/main" id="{777889F3-D5B7-4751-8C77-3D5073FF71A2}"/>
               </a:ext>
             </a:extLst>
           </p:cNvPr>
@@ -13244,7 +13357,7 @@
         <p:spPr>
           <a:xfrm xmlns:a="http://schemas.openxmlformats.org/drawingml/2006/main">
             <a:off x="590400" y="266760"/>
-            <a:ext cx="4190760" cy="237600"/>
+            <a:ext cx="4190400" cy="237240"/>
           </a:xfrm>
           <a:prstGeom xmlns:a="http://schemas.openxmlformats.org/drawingml/2006/main" prst="rect">
             <a:avLst/>
@@ -13299,7 +13412,7 @@
           <p:cNvPr id="127" name="">
             <a:extLst xmlns:a="http://schemas.openxmlformats.org/drawingml/2006/main">
               <a:ext uri="{FF2B5EF4-FFF2-40B4-BE49-F238E27FC236}">
-                <a16:creationId xmlns:a16="http://schemas.microsoft.com/office/drawing/2014/main" id="{478ED7AC-AA75-4E07-A602-9B123A210087}"/>
+                <a16:creationId xmlns:a16="http://schemas.microsoft.com/office/drawing/2014/main" id="{8D904F3A-7031-44A1-BB58-38C801D3B2B2}"/>
               </a:ext>
             </a:extLst>
           </p:cNvPr>
@@ -13311,7 +13424,7 @@
         <p:spPr>
           <a:xfrm xmlns:a="http://schemas.openxmlformats.org/drawingml/2006/main">
             <a:off x="11144160" y="266760"/>
-            <a:ext cx="456840" cy="237600"/>
+            <a:ext cx="456480" cy="237240"/>
           </a:xfrm>
           <a:prstGeom xmlns:a="http://schemas.openxmlformats.org/drawingml/2006/main" prst="rect">
             <a:avLst/>
@@ -13366,7 +13479,7 @@
           <p:cNvPr id="128" name="">
             <a:extLst xmlns:a="http://schemas.openxmlformats.org/drawingml/2006/main">
               <a:ext uri="{FF2B5EF4-FFF2-40B4-BE49-F238E27FC236}">
-                <a16:creationId xmlns:a16="http://schemas.microsoft.com/office/drawing/2014/main" id="{9ED09B74-CEA2-4102-AA9D-0AF044A43E01}"/>
+                <a16:creationId xmlns:a16="http://schemas.microsoft.com/office/drawing/2014/main" id="{7386D84D-DA06-42B2-A6D5-2E6A01ECC7F4}"/>
               </a:ext>
             </a:extLst>
           </p:cNvPr>
@@ -13378,7 +13491,7 @@
         <p:spPr>
           <a:xfrm xmlns:a="http://schemas.openxmlformats.org/drawingml/2006/main">
             <a:off x="590400" y="571680"/>
-            <a:ext cx="11010600" cy="9000"/>
+            <a:ext cx="11010240" cy="8640"/>
           </a:xfrm>
           <a:prstGeom xmlns:a="http://schemas.openxmlformats.org/drawingml/2006/main" prst="rect">
             <a:avLst/>
@@ -13418,7 +13531,7 @@
           <p:cNvPr id="129" name="">
             <a:extLst xmlns:a="http://schemas.openxmlformats.org/drawingml/2006/main">
               <a:ext uri="{FF2B5EF4-FFF2-40B4-BE49-F238E27FC236}">
-                <a16:creationId xmlns:a16="http://schemas.microsoft.com/office/drawing/2014/main" id="{0C7FF73E-4EE7-4ED2-8FA4-124CFAE617D5}"/>
+                <a16:creationId xmlns:a16="http://schemas.microsoft.com/office/drawing/2014/main" id="{55AC34B3-602C-4253-AB03-7537E1057746}"/>
               </a:ext>
             </a:extLst>
           </p:cNvPr>
@@ -13430,7 +13543,7 @@
         <p:spPr>
           <a:xfrm xmlns:a="http://schemas.openxmlformats.org/drawingml/2006/main">
             <a:off x="590400" y="781200"/>
-            <a:ext cx="11010600" cy="723600"/>
+            <a:ext cx="11010240" cy="723240"/>
           </a:xfrm>
           <a:prstGeom xmlns:a="http://schemas.openxmlformats.org/drawingml/2006/main" prst="rect">
             <a:avLst/>
@@ -13485,7 +13598,7 @@
           <p:cNvPr id="130" name="">
             <a:extLst xmlns:a="http://schemas.openxmlformats.org/drawingml/2006/main">
               <a:ext uri="{FF2B5EF4-FFF2-40B4-BE49-F238E27FC236}">
-                <a16:creationId xmlns:a16="http://schemas.microsoft.com/office/drawing/2014/main" id="{B271E3BF-7EFA-4AB3-ADDB-FCF6F2DA1A1A}"/>
+                <a16:creationId xmlns:a16="http://schemas.microsoft.com/office/drawing/2014/main" id="{81D027A9-9096-43BE-9281-490651CB649B}"/>
               </a:ext>
             </a:extLst>
           </p:cNvPr>
@@ -13497,7 +13610,7 @@
         <p:spPr>
           <a:xfrm xmlns:a="http://schemas.openxmlformats.org/drawingml/2006/main">
             <a:off x="590400" y="1685880"/>
-            <a:ext cx="4000320" cy="1180800"/>
+            <a:ext cx="3999960" cy="1180440"/>
           </a:xfrm>
           <a:prstGeom xmlns:a="http://schemas.openxmlformats.org/drawingml/2006/main" prst="rect">
             <a:avLst/>
@@ -13552,7 +13665,7 @@
           <p:cNvPr id="131" name="">
             <a:extLst xmlns:a="http://schemas.openxmlformats.org/drawingml/2006/main">
               <a:ext uri="{FF2B5EF4-FFF2-40B4-BE49-F238E27FC236}">
-                <a16:creationId xmlns:a16="http://schemas.microsoft.com/office/drawing/2014/main" id="{DE671786-2E1A-4BBA-B85C-2ED5E1E5001A}"/>
+                <a16:creationId xmlns:a16="http://schemas.microsoft.com/office/drawing/2014/main" id="{7AF1DD9A-5E26-4EDC-8A41-2D67FEC335D8}"/>
               </a:ext>
             </a:extLst>
           </p:cNvPr>
@@ -13564,7 +13677,7 @@
         <p:spPr>
           <a:xfrm xmlns:a="http://schemas.openxmlformats.org/drawingml/2006/main">
             <a:off x="685800" y="2876400"/>
-            <a:ext cx="3714480" cy="666360"/>
+            <a:ext cx="3714120" cy="666000"/>
           </a:xfrm>
           <a:prstGeom xmlns:a="http://schemas.openxmlformats.org/drawingml/2006/main" prst="rect">
             <a:avLst/>
@@ -13646,7 +13759,7 @@
           <p:cNvPr id="132" name="">
             <a:extLst xmlns:a="http://schemas.openxmlformats.org/drawingml/2006/main">
               <a:ext uri="{FF2B5EF4-FFF2-40B4-BE49-F238E27FC236}">
-                <a16:creationId xmlns:a16="http://schemas.microsoft.com/office/drawing/2014/main" id="{59DC9A2C-7221-4EBC-89AC-C090B0FF899F}"/>
+                <a16:creationId xmlns:a16="http://schemas.microsoft.com/office/drawing/2014/main" id="{21849FFF-0118-4597-8E34-FE524294EDC9}"/>
               </a:ext>
             </a:extLst>
           </p:cNvPr>
@@ -13658,7 +13771,7 @@
         <p:spPr>
           <a:xfrm xmlns:a="http://schemas.openxmlformats.org/drawingml/2006/main">
             <a:off x="4857840" y="1714680"/>
-            <a:ext cx="9000" cy="3219120"/>
+            <a:ext cx="8640" cy="3218760"/>
           </a:xfrm>
           <a:prstGeom xmlns:a="http://schemas.openxmlformats.org/drawingml/2006/main" prst="rect">
             <a:avLst/>
@@ -13677,7 +13790,7 @@
           <a:fontRef xmlns:a="http://schemas.openxmlformats.org/drawingml/2006/main" idx="minor"/>
         </p:style>
         <p:txBody>
-          <a:bodyPr xmlns:a="http://schemas.openxmlformats.org/drawingml/2006/main" lIns="90000" tIns="45000" rIns="90000" bIns="45000" anchor="t">
+          <a:bodyPr xmlns:a="http://schemas.openxmlformats.org/drawingml/2006/main" lIns="4320" tIns="45000" rIns="4320" bIns="45000" anchor="t">
             <a:noAutofit/>
           </a:bodyPr>
           <a:lstStyle xmlns:a="http://schemas.openxmlformats.org/drawingml/2006/main"/>
@@ -13698,7 +13811,7 @@
           <p:cNvPr id="133" name="">
             <a:extLst xmlns:a="http://schemas.openxmlformats.org/drawingml/2006/main">
               <a:ext uri="{FF2B5EF4-FFF2-40B4-BE49-F238E27FC236}">
-                <a16:creationId xmlns:a16="http://schemas.microsoft.com/office/drawing/2014/main" id="{C433C648-7D59-4D03-9970-8CD9B0DB2BF3}"/>
+                <a16:creationId xmlns:a16="http://schemas.microsoft.com/office/drawing/2014/main" id="{C0F0E944-423A-4BAB-B1CA-41D084488DC7}"/>
               </a:ext>
             </a:extLst>
           </p:cNvPr>
@@ -13710,7 +13823,7 @@
         <p:spPr>
           <a:xfrm xmlns:a="http://schemas.openxmlformats.org/drawingml/2006/main">
             <a:off x="5286240" y="1695600"/>
-            <a:ext cx="399600" cy="228240"/>
+            <a:ext cx="399240" cy="227880"/>
           </a:xfrm>
           <a:prstGeom xmlns:a="http://schemas.openxmlformats.org/drawingml/2006/main" prst="rect">
             <a:avLst/>
@@ -13765,7 +13878,7 @@
           <p:cNvPr id="134" name="">
             <a:extLst xmlns:a="http://schemas.openxmlformats.org/drawingml/2006/main">
               <a:ext uri="{FF2B5EF4-FFF2-40B4-BE49-F238E27FC236}">
-                <a16:creationId xmlns:a16="http://schemas.microsoft.com/office/drawing/2014/main" id="{FCED853D-9CF1-4E40-A6BB-121B12991E93}"/>
+                <a16:creationId xmlns:a16="http://schemas.microsoft.com/office/drawing/2014/main" id="{6818A76A-7352-4DF7-A226-A74F0DF509CD}"/>
               </a:ext>
             </a:extLst>
           </p:cNvPr>
@@ -13777,7 +13890,7 @@
         <p:spPr>
           <a:xfrm xmlns:a="http://schemas.openxmlformats.org/drawingml/2006/main">
             <a:off x="5810400" y="1666800"/>
-            <a:ext cx="2476080" cy="285480"/>
+            <a:ext cx="2475720" cy="285120"/>
           </a:xfrm>
           <a:prstGeom xmlns:a="http://schemas.openxmlformats.org/drawingml/2006/main" prst="rect">
             <a:avLst/>
@@ -13832,7 +13945,7 @@
           <p:cNvPr id="135" name="">
             <a:extLst xmlns:a="http://schemas.openxmlformats.org/drawingml/2006/main">
               <a:ext uri="{FF2B5EF4-FFF2-40B4-BE49-F238E27FC236}">
-                <a16:creationId xmlns:a16="http://schemas.microsoft.com/office/drawing/2014/main" id="{0C3877CE-3D41-4551-A3EA-0B71930B859D}"/>
+                <a16:creationId xmlns:a16="http://schemas.microsoft.com/office/drawing/2014/main" id="{57157186-5658-49F2-90C9-5E57D1B8B4B2}"/>
               </a:ext>
             </a:extLst>
           </p:cNvPr>
@@ -13844,7 +13957,7 @@
         <p:spPr>
           <a:xfrm xmlns:a="http://schemas.openxmlformats.org/drawingml/2006/main">
             <a:off x="8381880" y="1685880"/>
-            <a:ext cx="3142800" cy="456840"/>
+            <a:ext cx="3142440" cy="456480"/>
           </a:xfrm>
           <a:prstGeom xmlns:a="http://schemas.openxmlformats.org/drawingml/2006/main" prst="rect">
             <a:avLst/>
@@ -13862,7 +13975,7 @@
         </p:style>
         <p:txBody>
           <a:bodyPr xmlns:a="http://schemas.openxmlformats.org/drawingml/2006/main" lIns="0" tIns="0" rIns="0" bIns="0" anchor="t">
-            <a:normAutofit/>
+            <a:normAutofit fontScale="100000"/>
           </a:bodyPr>
           <a:lstStyle xmlns:a="http://schemas.openxmlformats.org/drawingml/2006/main"/>
           <a:p xmlns:a="http://schemas.openxmlformats.org/drawingml/2006/main">
@@ -13881,7 +13994,7 @@
                 <a:ea typeface="Arial"/>
                 <a:cs typeface="Arial"/>
               </a:rPr>
-              <a:t>Blind agent never read Deals or Credit code</a:t>
+              <a:t>Isolated model workspace had no access to Deals or Credit code</a:t>
             </a:r>
             <a:endParaRPr sz="1280" b="0" u="none">
               <a:solidFill>
@@ -13899,7 +14012,7 @@
           <p:cNvPr id="136" name="">
             <a:extLst xmlns:a="http://schemas.openxmlformats.org/drawingml/2006/main">
               <a:ext uri="{FF2B5EF4-FFF2-40B4-BE49-F238E27FC236}">
-                <a16:creationId xmlns:a16="http://schemas.microsoft.com/office/drawing/2014/main" id="{F91E1A2F-D3AE-43EF-B168-48138D8F2C6D}"/>
+                <a16:creationId xmlns:a16="http://schemas.microsoft.com/office/drawing/2014/main" id="{EFA51078-C003-4F38-A32B-AD997D54975B}"/>
               </a:ext>
             </a:extLst>
           </p:cNvPr>
@@ -13911,7 +14024,7 @@
         <p:spPr>
           <a:xfrm xmlns:a="http://schemas.openxmlformats.org/drawingml/2006/main">
             <a:off x="5286240" y="2238480"/>
-            <a:ext cx="6238440" cy="9000"/>
+            <a:ext cx="6238080" cy="8640"/>
           </a:xfrm>
           <a:prstGeom xmlns:a="http://schemas.openxmlformats.org/drawingml/2006/main" prst="rect">
             <a:avLst/>
@@ -13951,7 +14064,7 @@
           <p:cNvPr id="137" name="">
             <a:extLst xmlns:a="http://schemas.openxmlformats.org/drawingml/2006/main">
               <a:ext uri="{FF2B5EF4-FFF2-40B4-BE49-F238E27FC236}">
-                <a16:creationId xmlns:a16="http://schemas.microsoft.com/office/drawing/2014/main" id="{EF1F1D96-C969-4CBA-BE2D-EC6D98A38700}"/>
+                <a16:creationId xmlns:a16="http://schemas.microsoft.com/office/drawing/2014/main" id="{C6E5A48E-0E67-479E-8B47-43066C3B9E8B}"/>
               </a:ext>
             </a:extLst>
           </p:cNvPr>
@@ -13963,7 +14076,7 @@
         <p:spPr>
           <a:xfrm xmlns:a="http://schemas.openxmlformats.org/drawingml/2006/main">
             <a:off x="5286240" y="2495520"/>
-            <a:ext cx="399600" cy="228240"/>
+            <a:ext cx="399240" cy="227880"/>
           </a:xfrm>
           <a:prstGeom xmlns:a="http://schemas.openxmlformats.org/drawingml/2006/main" prst="rect">
             <a:avLst/>
@@ -14018,7 +14131,7 @@
           <p:cNvPr id="138" name="">
             <a:extLst xmlns:a="http://schemas.openxmlformats.org/drawingml/2006/main">
               <a:ext uri="{FF2B5EF4-FFF2-40B4-BE49-F238E27FC236}">
-                <a16:creationId xmlns:a16="http://schemas.microsoft.com/office/drawing/2014/main" id="{848C4BFB-FFC3-4781-8DF9-4196BEF9D81B}"/>
+                <a16:creationId xmlns:a16="http://schemas.microsoft.com/office/drawing/2014/main" id="{255B6EBF-EC46-4C74-B8BD-D00DEFF2E2A9}"/>
               </a:ext>
             </a:extLst>
           </p:cNvPr>
@@ -14030,7 +14143,7 @@
         <p:spPr>
           <a:xfrm xmlns:a="http://schemas.openxmlformats.org/drawingml/2006/main">
             <a:off x="5810400" y="2467080"/>
-            <a:ext cx="2476080" cy="285480"/>
+            <a:ext cx="2475720" cy="285120"/>
           </a:xfrm>
           <a:prstGeom xmlns:a="http://schemas.openxmlformats.org/drawingml/2006/main" prst="rect">
             <a:avLst/>
@@ -14085,7 +14198,7 @@
           <p:cNvPr id="139" name="">
             <a:extLst xmlns:a="http://schemas.openxmlformats.org/drawingml/2006/main">
               <a:ext uri="{FF2B5EF4-FFF2-40B4-BE49-F238E27FC236}">
-                <a16:creationId xmlns:a16="http://schemas.microsoft.com/office/drawing/2014/main" id="{11A64E01-9214-47AE-8176-93130DC92C5D}"/>
+                <a16:creationId xmlns:a16="http://schemas.microsoft.com/office/drawing/2014/main" id="{786053A6-DA4A-4996-892F-15E2A0BFEC9A}"/>
               </a:ext>
             </a:extLst>
           </p:cNvPr>
@@ -14097,7 +14210,7 @@
         <p:spPr>
           <a:xfrm xmlns:a="http://schemas.openxmlformats.org/drawingml/2006/main">
             <a:off x="8381880" y="2486160"/>
-            <a:ext cx="3142800" cy="456840"/>
+            <a:ext cx="3142440" cy="456480"/>
           </a:xfrm>
           <a:prstGeom xmlns:a="http://schemas.openxmlformats.org/drawingml/2006/main" prst="rect">
             <a:avLst/>
@@ -14152,7 +14265,7 @@
           <p:cNvPr id="140" name="">
             <a:extLst xmlns:a="http://schemas.openxmlformats.org/drawingml/2006/main">
               <a:ext uri="{FF2B5EF4-FFF2-40B4-BE49-F238E27FC236}">
-                <a16:creationId xmlns:a16="http://schemas.microsoft.com/office/drawing/2014/main" id="{CC5C8D99-2CB5-4323-8CE5-E5159D475ACE}"/>
+                <a16:creationId xmlns:a16="http://schemas.microsoft.com/office/drawing/2014/main" id="{6E1B2315-94FD-465D-862C-E9C2F4E93470}"/>
               </a:ext>
             </a:extLst>
           </p:cNvPr>
@@ -14164,7 +14277,7 @@
         <p:spPr>
           <a:xfrm xmlns:a="http://schemas.openxmlformats.org/drawingml/2006/main">
             <a:off x="5286240" y="3038400"/>
-            <a:ext cx="6238440" cy="9000"/>
+            <a:ext cx="6238080" cy="8640"/>
           </a:xfrm>
           <a:prstGeom xmlns:a="http://schemas.openxmlformats.org/drawingml/2006/main" prst="rect">
             <a:avLst/>
@@ -14204,7 +14317,7 @@
           <p:cNvPr id="141" name="">
             <a:extLst xmlns:a="http://schemas.openxmlformats.org/drawingml/2006/main">
               <a:ext uri="{FF2B5EF4-FFF2-40B4-BE49-F238E27FC236}">
-                <a16:creationId xmlns:a16="http://schemas.microsoft.com/office/drawing/2014/main" id="{ED66DAE2-65DC-4307-AD53-7CC2A90E58C6}"/>
+                <a16:creationId xmlns:a16="http://schemas.microsoft.com/office/drawing/2014/main" id="{DDE0A65F-BEE4-42E0-8479-D72D21C8F9F9}"/>
               </a:ext>
             </a:extLst>
           </p:cNvPr>
@@ -14216,7 +14329,7 @@
         <p:spPr>
           <a:xfrm xmlns:a="http://schemas.openxmlformats.org/drawingml/2006/main">
             <a:off x="5286240" y="3295800"/>
-            <a:ext cx="399600" cy="228240"/>
+            <a:ext cx="399240" cy="227880"/>
           </a:xfrm>
           <a:prstGeom xmlns:a="http://schemas.openxmlformats.org/drawingml/2006/main" prst="rect">
             <a:avLst/>
@@ -14271,7 +14384,7 @@
           <p:cNvPr id="142" name="">
             <a:extLst xmlns:a="http://schemas.openxmlformats.org/drawingml/2006/main">
               <a:ext uri="{FF2B5EF4-FFF2-40B4-BE49-F238E27FC236}">
-                <a16:creationId xmlns:a16="http://schemas.microsoft.com/office/drawing/2014/main" id="{B6D8A055-993C-42FE-B0B7-0B5F145A25CC}"/>
+                <a16:creationId xmlns:a16="http://schemas.microsoft.com/office/drawing/2014/main" id="{E8DE69D4-1853-4000-B66F-44BC34BECABC}"/>
               </a:ext>
             </a:extLst>
           </p:cNvPr>
@@ -14283,7 +14396,7 @@
         <p:spPr>
           <a:xfrm xmlns:a="http://schemas.openxmlformats.org/drawingml/2006/main">
             <a:off x="5810400" y="3267000"/>
-            <a:ext cx="2476080" cy="285480"/>
+            <a:ext cx="2475720" cy="285120"/>
           </a:xfrm>
           <a:prstGeom xmlns:a="http://schemas.openxmlformats.org/drawingml/2006/main" prst="rect">
             <a:avLst/>
@@ -14338,7 +14451,7 @@
           <p:cNvPr id="143" name="">
             <a:extLst xmlns:a="http://schemas.openxmlformats.org/drawingml/2006/main">
               <a:ext uri="{FF2B5EF4-FFF2-40B4-BE49-F238E27FC236}">
-                <a16:creationId xmlns:a16="http://schemas.microsoft.com/office/drawing/2014/main" id="{9B834645-5C46-472E-B2A7-6248210684AD}"/>
+                <a16:creationId xmlns:a16="http://schemas.microsoft.com/office/drawing/2014/main" id="{58E46745-2972-436B-96C0-1D9E183B7150}"/>
               </a:ext>
             </a:extLst>
           </p:cNvPr>
@@ -14350,7 +14463,7 @@
         <p:spPr>
           <a:xfrm xmlns:a="http://schemas.openxmlformats.org/drawingml/2006/main">
             <a:off x="8381880" y="3286080"/>
-            <a:ext cx="3142800" cy="456840"/>
+            <a:ext cx="3142440" cy="456480"/>
           </a:xfrm>
           <a:prstGeom xmlns:a="http://schemas.openxmlformats.org/drawingml/2006/main" prst="rect">
             <a:avLst/>
@@ -14405,7 +14518,7 @@
           <p:cNvPr id="144" name="">
             <a:extLst xmlns:a="http://schemas.openxmlformats.org/drawingml/2006/main">
               <a:ext uri="{FF2B5EF4-FFF2-40B4-BE49-F238E27FC236}">
-                <a16:creationId xmlns:a16="http://schemas.microsoft.com/office/drawing/2014/main" id="{1B74CEED-36DD-4002-BC5F-EE24A08526AB}"/>
+                <a16:creationId xmlns:a16="http://schemas.microsoft.com/office/drawing/2014/main" id="{AD0E2482-3AE9-42B7-8316-A29887465A8A}"/>
               </a:ext>
             </a:extLst>
           </p:cNvPr>
@@ -14417,7 +14530,7 @@
         <p:spPr>
           <a:xfrm xmlns:a="http://schemas.openxmlformats.org/drawingml/2006/main">
             <a:off x="5286240" y="3838680"/>
-            <a:ext cx="6238440" cy="9000"/>
+            <a:ext cx="6238080" cy="8640"/>
           </a:xfrm>
           <a:prstGeom xmlns:a="http://schemas.openxmlformats.org/drawingml/2006/main" prst="rect">
             <a:avLst/>
@@ -14457,7 +14570,7 @@
           <p:cNvPr id="145" name="">
             <a:extLst xmlns:a="http://schemas.openxmlformats.org/drawingml/2006/main">
               <a:ext uri="{FF2B5EF4-FFF2-40B4-BE49-F238E27FC236}">
-                <a16:creationId xmlns:a16="http://schemas.microsoft.com/office/drawing/2014/main" id="{A3405C53-AD60-40A3-9B8C-1AAB641F99DA}"/>
+                <a16:creationId xmlns:a16="http://schemas.microsoft.com/office/drawing/2014/main" id="{C876B23C-49A3-4F92-A92E-A04F41B7D0E8}"/>
               </a:ext>
             </a:extLst>
           </p:cNvPr>
@@ -14469,7 +14582,7 @@
         <p:spPr>
           <a:xfrm xmlns:a="http://schemas.openxmlformats.org/drawingml/2006/main">
             <a:off x="5286240" y="4095720"/>
-            <a:ext cx="399600" cy="228240"/>
+            <a:ext cx="399240" cy="227880"/>
           </a:xfrm>
           <a:prstGeom xmlns:a="http://schemas.openxmlformats.org/drawingml/2006/main" prst="rect">
             <a:avLst/>
@@ -14524,7 +14637,7 @@
           <p:cNvPr id="146" name="">
             <a:extLst xmlns:a="http://schemas.openxmlformats.org/drawingml/2006/main">
               <a:ext uri="{FF2B5EF4-FFF2-40B4-BE49-F238E27FC236}">
-                <a16:creationId xmlns:a16="http://schemas.microsoft.com/office/drawing/2014/main" id="{4592A63F-7A55-482E-A10F-C15627B49579}"/>
+                <a16:creationId xmlns:a16="http://schemas.microsoft.com/office/drawing/2014/main" id="{BA00EDB5-B039-4354-84D7-DAAFA328F367}"/>
               </a:ext>
             </a:extLst>
           </p:cNvPr>
@@ -14536,7 +14649,7 @@
         <p:spPr>
           <a:xfrm xmlns:a="http://schemas.openxmlformats.org/drawingml/2006/main">
             <a:off x="5810400" y="4067280"/>
-            <a:ext cx="2476080" cy="285480"/>
+            <a:ext cx="2475720" cy="285120"/>
           </a:xfrm>
           <a:prstGeom xmlns:a="http://schemas.openxmlformats.org/drawingml/2006/main" prst="rect">
             <a:avLst/>
@@ -14591,7 +14704,7 @@
           <p:cNvPr id="147" name="">
             <a:extLst xmlns:a="http://schemas.openxmlformats.org/drawingml/2006/main">
               <a:ext uri="{FF2B5EF4-FFF2-40B4-BE49-F238E27FC236}">
-                <a16:creationId xmlns:a16="http://schemas.microsoft.com/office/drawing/2014/main" id="{A62E98E9-72F2-4ED9-AE90-2A82B7FADDE9}"/>
+                <a16:creationId xmlns:a16="http://schemas.microsoft.com/office/drawing/2014/main" id="{7886FDEE-0EB7-44F7-8CD5-F37BD09FE90C}"/>
               </a:ext>
             </a:extLst>
           </p:cNvPr>
@@ -14603,7 +14716,7 @@
         <p:spPr>
           <a:xfrm xmlns:a="http://schemas.openxmlformats.org/drawingml/2006/main">
             <a:off x="8381880" y="4086360"/>
-            <a:ext cx="3142800" cy="456840"/>
+            <a:ext cx="3142440" cy="456480"/>
           </a:xfrm>
           <a:prstGeom xmlns:a="http://schemas.openxmlformats.org/drawingml/2006/main" prst="rect">
             <a:avLst/>
@@ -14658,7 +14771,7 @@
           <p:cNvPr id="148" name="">
             <a:extLst xmlns:a="http://schemas.openxmlformats.org/drawingml/2006/main">
               <a:ext uri="{FF2B5EF4-FFF2-40B4-BE49-F238E27FC236}">
-                <a16:creationId xmlns:a16="http://schemas.microsoft.com/office/drawing/2014/main" id="{C6329664-AA07-40D7-B2E1-DD8B812F638F}"/>
+                <a16:creationId xmlns:a16="http://schemas.microsoft.com/office/drawing/2014/main" id="{6F750339-81F2-44FE-B169-2AC5652606AD}"/>
               </a:ext>
             </a:extLst>
           </p:cNvPr>
@@ -14670,7 +14783,7 @@
         <p:spPr>
           <a:xfrm xmlns:a="http://schemas.openxmlformats.org/drawingml/2006/main">
             <a:off x="590400" y="5191200"/>
-            <a:ext cx="5190840" cy="742680"/>
+            <a:ext cx="5190480" cy="742320"/>
           </a:xfrm>
           <a:prstGeom xmlns:a="http://schemas.openxmlformats.org/drawingml/2006/main" prst="roundRect">
             <a:avLst>
@@ -14714,7 +14827,7 @@
           <p:cNvPr id="149" name="">
             <a:extLst xmlns:a="http://schemas.openxmlformats.org/drawingml/2006/main">
               <a:ext uri="{FF2B5EF4-FFF2-40B4-BE49-F238E27FC236}">
-                <a16:creationId xmlns:a16="http://schemas.microsoft.com/office/drawing/2014/main" id="{7DFD5053-0302-4A07-B7CF-2E32D293B2B1}"/>
+                <a16:creationId xmlns:a16="http://schemas.microsoft.com/office/drawing/2014/main" id="{59F7A37B-B036-425E-9EF4-4A3FA5148632}"/>
               </a:ext>
             </a:extLst>
           </p:cNvPr>
@@ -14726,7 +14839,7 @@
         <p:spPr>
           <a:xfrm xmlns:a="http://schemas.openxmlformats.org/drawingml/2006/main">
             <a:off x="819000" y="5334120"/>
-            <a:ext cx="2381040" cy="266400"/>
+            <a:ext cx="2380680" cy="266040"/>
           </a:xfrm>
           <a:prstGeom xmlns:a="http://schemas.openxmlformats.org/drawingml/2006/main" prst="rect">
             <a:avLst/>
@@ -14781,7 +14894,7 @@
           <p:cNvPr id="150" name="">
             <a:extLst xmlns:a="http://schemas.openxmlformats.org/drawingml/2006/main">
               <a:ext uri="{FF2B5EF4-FFF2-40B4-BE49-F238E27FC236}">
-                <a16:creationId xmlns:a16="http://schemas.microsoft.com/office/drawing/2014/main" id="{0EDD83AA-0159-4A37-8F42-F1C2DE094D36}"/>
+                <a16:creationId xmlns:a16="http://schemas.microsoft.com/office/drawing/2014/main" id="{213E1095-D915-4914-BDAE-92B731B988BE}"/>
               </a:ext>
             </a:extLst>
           </p:cNvPr>
@@ -14793,7 +14906,7 @@
         <p:spPr>
           <a:xfrm xmlns:a="http://schemas.openxmlformats.org/drawingml/2006/main">
             <a:off x="819000" y="5629320"/>
-            <a:ext cx="2381040" cy="190080"/>
+            <a:ext cx="2380680" cy="189720"/>
           </a:xfrm>
           <a:prstGeom xmlns:a="http://schemas.openxmlformats.org/drawingml/2006/main" prst="rect">
             <a:avLst/>
@@ -14848,7 +14961,7 @@
           <p:cNvPr id="151" name="">
             <a:extLst xmlns:a="http://schemas.openxmlformats.org/drawingml/2006/main">
               <a:ext uri="{FF2B5EF4-FFF2-40B4-BE49-F238E27FC236}">
-                <a16:creationId xmlns:a16="http://schemas.microsoft.com/office/drawing/2014/main" id="{AC9E3769-70B7-4021-AFB7-4E05176BED48}"/>
+                <a16:creationId xmlns:a16="http://schemas.microsoft.com/office/drawing/2014/main" id="{C3D9A8D6-177C-4153-AD66-5D49E0B7A3A7}"/>
               </a:ext>
             </a:extLst>
           </p:cNvPr>
@@ -14860,7 +14973,7 @@
         <p:spPr>
           <a:xfrm xmlns:a="http://schemas.openxmlformats.org/drawingml/2006/main">
             <a:off x="6000840" y="5191200"/>
-            <a:ext cx="5600520" cy="742680"/>
+            <a:ext cx="5600160" cy="742320"/>
           </a:xfrm>
           <a:prstGeom xmlns:a="http://schemas.openxmlformats.org/drawingml/2006/main" prst="roundRect">
             <a:avLst>
@@ -14904,7 +15017,7 @@
           <p:cNvPr id="152" name="">
             <a:extLst xmlns:a="http://schemas.openxmlformats.org/drawingml/2006/main">
               <a:ext uri="{FF2B5EF4-FFF2-40B4-BE49-F238E27FC236}">
-                <a16:creationId xmlns:a16="http://schemas.microsoft.com/office/drawing/2014/main" id="{A2FC96E8-3A14-4F14-B603-2685BE907EB7}"/>
+                <a16:creationId xmlns:a16="http://schemas.microsoft.com/office/drawing/2014/main" id="{E65769D9-684B-4DEF-90D0-F551296D0CFD}"/>
               </a:ext>
             </a:extLst>
           </p:cNvPr>
@@ -14916,7 +15029,7 @@
         <p:spPr>
           <a:xfrm xmlns:a="http://schemas.openxmlformats.org/drawingml/2006/main">
             <a:off x="6229440" y="5334120"/>
-            <a:ext cx="2952360" cy="266400"/>
+            <a:ext cx="2952000" cy="266040"/>
           </a:xfrm>
           <a:prstGeom xmlns:a="http://schemas.openxmlformats.org/drawingml/2006/main" prst="rect">
             <a:avLst/>
@@ -14971,7 +15084,7 @@
           <p:cNvPr id="153" name="">
             <a:extLst xmlns:a="http://schemas.openxmlformats.org/drawingml/2006/main">
               <a:ext uri="{FF2B5EF4-FFF2-40B4-BE49-F238E27FC236}">
-                <a16:creationId xmlns:a16="http://schemas.microsoft.com/office/drawing/2014/main" id="{F8102FA8-8896-46C7-AD11-7E36275DD343}"/>
+                <a16:creationId xmlns:a16="http://schemas.microsoft.com/office/drawing/2014/main" id="{939F63BB-E8A0-42C6-ACFA-9D0487703E15}"/>
               </a:ext>
             </a:extLst>
           </p:cNvPr>
@@ -14983,7 +15096,7 @@
         <p:spPr>
           <a:xfrm xmlns:a="http://schemas.openxmlformats.org/drawingml/2006/main">
             <a:off x="6229440" y="5629320"/>
-            <a:ext cx="3142800" cy="190080"/>
+            <a:ext cx="3142440" cy="189720"/>
           </a:xfrm>
           <a:prstGeom xmlns:a="http://schemas.openxmlformats.org/drawingml/2006/main" prst="rect">
             <a:avLst/>
@@ -15038,7 +15151,7 @@
           <p:cNvPr id="154" name="">
             <a:extLst xmlns:a="http://schemas.openxmlformats.org/drawingml/2006/main">
               <a:ext uri="{FF2B5EF4-FFF2-40B4-BE49-F238E27FC236}">
-                <a16:creationId xmlns:a16="http://schemas.microsoft.com/office/drawing/2014/main" id="{3AB106A8-E912-4473-8189-746540E42D66}"/>
+                <a16:creationId xmlns:a16="http://schemas.microsoft.com/office/drawing/2014/main" id="{268BF6EF-BA05-491F-97F5-AA48CF275205}"/>
               </a:ext>
             </a:extLst>
           </p:cNvPr>
@@ -15050,7 +15163,7 @@
         <p:spPr>
           <a:xfrm xmlns:a="http://schemas.openxmlformats.org/drawingml/2006/main">
             <a:off x="590400" y="6219720"/>
-            <a:ext cx="4285800" cy="266400"/>
+            <a:ext cx="4285440" cy="266040"/>
           </a:xfrm>
           <a:prstGeom xmlns:a="http://schemas.openxmlformats.org/drawingml/2006/main" prst="rect">
             <a:avLst/>
@@ -15086,7 +15199,7 @@
                 <a:latin typeface="Arial"/>
                 <a:ea typeface="Arial"/>
                 <a:cs typeface="Arial"/>
-                <a:hlinkClick xmlns:r="http://schemas.openxmlformats.org/officeDocument/2006/relationships" r:id="Rd4df2cd5d8c84960"/>
+                <a:hlinkClick xmlns:r="http://schemas.openxmlformats.org/officeDocument/2006/relationships" r:id="R573d55518fa44920"/>
               </a:rPr>
               <a:t>Open report and manifests ↗</a:t>
             </a:r>
@@ -15106,7 +15219,7 @@
           <p:cNvPr id="155" name="">
             <a:extLst xmlns:a="http://schemas.openxmlformats.org/drawingml/2006/main">
               <a:ext uri="{FF2B5EF4-FFF2-40B4-BE49-F238E27FC236}">
-                <a16:creationId xmlns:a16="http://schemas.microsoft.com/office/drawing/2014/main" id="{C2CCB5C1-7919-4BDB-BF94-8AB2D176A935}"/>
+                <a16:creationId xmlns:a16="http://schemas.microsoft.com/office/drawing/2014/main" id="{4C533E95-140A-4077-9D0B-654A2F3A3191}"/>
               </a:ext>
             </a:extLst>
           </p:cNvPr>
@@ -15118,7 +15231,7 @@
         <p:spPr>
           <a:xfrm xmlns:a="http://schemas.openxmlformats.org/drawingml/2006/main">
             <a:off x="4286160" y="6191280"/>
-            <a:ext cx="7314840" cy="342720"/>
+            <a:ext cx="7314480" cy="342360"/>
           </a:xfrm>
           <a:prstGeom xmlns:a="http://schemas.openxmlformats.org/drawingml/2006/main" prst="rect">
             <a:avLst/>
@@ -15171,7 +15284,7 @@
     </p:spTree>
     <p:extLst>
       <p:ext uri="{BB962C8B-B14F-4D97-AF65-F5344CB8AC3E}">
-        <p14:creationId xmlns:p14="http://schemas.microsoft.com/office/powerpoint/2010/main" val="459645779"/>
+        <p14:creationId xmlns:p14="http://schemas.microsoft.com/office/powerpoint/2010/main" val="1239668783"/>
       </p:ext>
     </p:extLst>
   </p:cSld>
@@ -15202,7 +15315,7 @@
           <p:cNvPr id="156" name="">
             <a:extLst xmlns:a="http://schemas.openxmlformats.org/drawingml/2006/main">
               <a:ext uri="{FF2B5EF4-FFF2-40B4-BE49-F238E27FC236}">
-                <a16:creationId xmlns:a16="http://schemas.microsoft.com/office/drawing/2014/main" id="{C1F3ABB4-A7B6-425D-A0F7-7A6F900CDCA2}"/>
+                <a16:creationId xmlns:a16="http://schemas.microsoft.com/office/drawing/2014/main" id="{FD5459A8-2128-4C07-B884-7B74CFCE9CC1}"/>
               </a:ext>
             </a:extLst>
           </p:cNvPr>
@@ -15214,7 +15327,7 @@
         <p:spPr>
           <a:xfrm xmlns:a="http://schemas.openxmlformats.org/drawingml/2006/main">
             <a:off x="0" y="0"/>
-            <a:ext cx="12191760" cy="47160"/>
+            <a:ext cx="12191400" cy="46800"/>
           </a:xfrm>
           <a:prstGeom xmlns:a="http://schemas.openxmlformats.org/drawingml/2006/main" prst="rect">
             <a:avLst/>
@@ -15254,7 +15367,7 @@
           <p:cNvPr id="157" name="">
             <a:extLst xmlns:a="http://schemas.openxmlformats.org/drawingml/2006/main">
               <a:ext uri="{FF2B5EF4-FFF2-40B4-BE49-F238E27FC236}">
-                <a16:creationId xmlns:a16="http://schemas.microsoft.com/office/drawing/2014/main" id="{E2D22196-5153-450F-9900-4CC6AB0E016E}"/>
+                <a16:creationId xmlns:a16="http://schemas.microsoft.com/office/drawing/2014/main" id="{C75C6C08-FCDD-42A5-BE1C-A801FE9B124B}"/>
               </a:ext>
             </a:extLst>
           </p:cNvPr>
@@ -15266,7 +15379,7 @@
         <p:spPr>
           <a:xfrm xmlns:a="http://schemas.openxmlformats.org/drawingml/2006/main">
             <a:off x="590400" y="266760"/>
-            <a:ext cx="4190760" cy="237600"/>
+            <a:ext cx="4190400" cy="237240"/>
           </a:xfrm>
           <a:prstGeom xmlns:a="http://schemas.openxmlformats.org/drawingml/2006/main" prst="rect">
             <a:avLst/>
@@ -15321,7 +15434,7 @@
           <p:cNvPr id="158" name="">
             <a:extLst xmlns:a="http://schemas.openxmlformats.org/drawingml/2006/main">
               <a:ext uri="{FF2B5EF4-FFF2-40B4-BE49-F238E27FC236}">
-                <a16:creationId xmlns:a16="http://schemas.microsoft.com/office/drawing/2014/main" id="{D3FA0D1A-CCAE-45C0-9C39-71F0968B67CC}"/>
+                <a16:creationId xmlns:a16="http://schemas.microsoft.com/office/drawing/2014/main" id="{9E35C3CE-019E-4B3B-8D10-9306BA23BEE6}"/>
               </a:ext>
             </a:extLst>
           </p:cNvPr>
@@ -15333,7 +15446,7 @@
         <p:spPr>
           <a:xfrm xmlns:a="http://schemas.openxmlformats.org/drawingml/2006/main">
             <a:off x="11144160" y="266760"/>
-            <a:ext cx="456840" cy="237600"/>
+            <a:ext cx="456480" cy="237240"/>
           </a:xfrm>
           <a:prstGeom xmlns:a="http://schemas.openxmlformats.org/drawingml/2006/main" prst="rect">
             <a:avLst/>
@@ -15388,7 +15501,7 @@
           <p:cNvPr id="159" name="">
             <a:extLst xmlns:a="http://schemas.openxmlformats.org/drawingml/2006/main">
               <a:ext uri="{FF2B5EF4-FFF2-40B4-BE49-F238E27FC236}">
-                <a16:creationId xmlns:a16="http://schemas.microsoft.com/office/drawing/2014/main" id="{08DCC4B0-8644-476C-ABFC-8561130C5971}"/>
+                <a16:creationId xmlns:a16="http://schemas.microsoft.com/office/drawing/2014/main" id="{C1A46855-BE33-4159-A7F9-A4F84A24918B}"/>
               </a:ext>
             </a:extLst>
           </p:cNvPr>
@@ -15400,7 +15513,7 @@
         <p:spPr>
           <a:xfrm xmlns:a="http://schemas.openxmlformats.org/drawingml/2006/main">
             <a:off x="590400" y="571680"/>
-            <a:ext cx="11010600" cy="9000"/>
+            <a:ext cx="11010240" cy="8640"/>
           </a:xfrm>
           <a:prstGeom xmlns:a="http://schemas.openxmlformats.org/drawingml/2006/main" prst="rect">
             <a:avLst/>
@@ -15440,7 +15553,7 @@
           <p:cNvPr id="160" name="">
             <a:extLst xmlns:a="http://schemas.openxmlformats.org/drawingml/2006/main">
               <a:ext uri="{FF2B5EF4-FFF2-40B4-BE49-F238E27FC236}">
-                <a16:creationId xmlns:a16="http://schemas.microsoft.com/office/drawing/2014/main" id="{F28D625C-A4FB-4134-858A-C51D1B08A1B9}"/>
+                <a16:creationId xmlns:a16="http://schemas.microsoft.com/office/drawing/2014/main" id="{27B08DE5-6DEA-4B84-90C9-FDADA38D882A}"/>
               </a:ext>
             </a:extLst>
           </p:cNvPr>
@@ -15452,7 +15565,7 @@
         <p:spPr>
           <a:xfrm xmlns:a="http://schemas.openxmlformats.org/drawingml/2006/main">
             <a:off x="590400" y="781200"/>
-            <a:ext cx="11010600" cy="723600"/>
+            <a:ext cx="11010240" cy="723240"/>
           </a:xfrm>
           <a:prstGeom xmlns:a="http://schemas.openxmlformats.org/drawingml/2006/main" prst="rect">
             <a:avLst/>
@@ -15507,7 +15620,7 @@
           <p:cNvPr id="161" name="">
             <a:extLst xmlns:a="http://schemas.openxmlformats.org/drawingml/2006/main">
               <a:ext uri="{FF2B5EF4-FFF2-40B4-BE49-F238E27FC236}">
-                <a16:creationId xmlns:a16="http://schemas.microsoft.com/office/drawing/2014/main" id="{332DC81F-C9E5-46BC-9F9B-DBE361C62A86}"/>
+                <a16:creationId xmlns:a16="http://schemas.microsoft.com/office/drawing/2014/main" id="{FD53C459-593E-477C-B026-8947B5E9FE0E}"/>
               </a:ext>
             </a:extLst>
           </p:cNvPr>
@@ -15519,7 +15632,7 @@
         <p:spPr>
           <a:xfrm xmlns:a="http://schemas.openxmlformats.org/drawingml/2006/main">
             <a:off x="590400" y="1600200"/>
-            <a:ext cx="3333240" cy="1999800"/>
+            <a:ext cx="3332880" cy="1999440"/>
           </a:xfrm>
           <a:prstGeom xmlns:a="http://schemas.openxmlformats.org/drawingml/2006/main" prst="rect">
             <a:avLst/>
@@ -15574,7 +15687,7 @@
           <p:cNvPr id="162" name="">
             <a:extLst xmlns:a="http://schemas.openxmlformats.org/drawingml/2006/main">
               <a:ext uri="{FF2B5EF4-FFF2-40B4-BE49-F238E27FC236}">
-                <a16:creationId xmlns:a16="http://schemas.microsoft.com/office/drawing/2014/main" id="{DD37FF4A-89B5-44D7-8AEE-1AEDC70BD2EC}"/>
+                <a16:creationId xmlns:a16="http://schemas.microsoft.com/office/drawing/2014/main" id="{B13AC856-C938-4C9D-BEA6-A45E4EE5F202}"/>
               </a:ext>
             </a:extLst>
           </p:cNvPr>
@@ -15586,7 +15699,7 @@
         <p:spPr>
           <a:xfrm xmlns:a="http://schemas.openxmlformats.org/drawingml/2006/main">
             <a:off x="704880" y="3333600"/>
-            <a:ext cx="3047760" cy="323640"/>
+            <a:ext cx="3047400" cy="323280"/>
           </a:xfrm>
           <a:prstGeom xmlns:a="http://schemas.openxmlformats.org/drawingml/2006/main" prst="rect">
             <a:avLst/>
@@ -15641,7 +15754,7 @@
           <p:cNvPr id="163" name="">
             <a:extLst xmlns:a="http://schemas.openxmlformats.org/drawingml/2006/main">
               <a:ext uri="{FF2B5EF4-FFF2-40B4-BE49-F238E27FC236}">
-                <a16:creationId xmlns:a16="http://schemas.microsoft.com/office/drawing/2014/main" id="{9A5833A7-094D-4D6B-80B4-13FA6A7902E0}"/>
+                <a16:creationId xmlns:a16="http://schemas.microsoft.com/office/drawing/2014/main" id="{76BEE26D-65B9-4EFD-AF6B-733C3EAC9A44}"/>
               </a:ext>
             </a:extLst>
           </p:cNvPr>
@@ -15653,7 +15766,7 @@
         <p:spPr>
           <a:xfrm xmlns:a="http://schemas.openxmlformats.org/drawingml/2006/main">
             <a:off x="704880" y="3753000"/>
-            <a:ext cx="3428640" cy="285480"/>
+            <a:ext cx="3428280" cy="285120"/>
           </a:xfrm>
           <a:prstGeom xmlns:a="http://schemas.openxmlformats.org/drawingml/2006/main" prst="rect">
             <a:avLst/>
@@ -15708,7 +15821,7 @@
           <p:cNvPr id="164" name="">
             <a:extLst xmlns:a="http://schemas.openxmlformats.org/drawingml/2006/main">
               <a:ext uri="{FF2B5EF4-FFF2-40B4-BE49-F238E27FC236}">
-                <a16:creationId xmlns:a16="http://schemas.microsoft.com/office/drawing/2014/main" id="{023840FF-52C2-4844-971E-D52B6F011DA0}"/>
+                <a16:creationId xmlns:a16="http://schemas.microsoft.com/office/drawing/2014/main" id="{E8FAA459-3E4A-4885-B20E-711066BD42C1}"/>
               </a:ext>
             </a:extLst>
           </p:cNvPr>
@@ -15720,7 +15833,7 @@
         <p:spPr>
           <a:xfrm xmlns:a="http://schemas.openxmlformats.org/drawingml/2006/main">
             <a:off x="4381560" y="1695600"/>
-            <a:ext cx="9000" cy="3085920"/>
+            <a:ext cx="8640" cy="3085560"/>
           </a:xfrm>
           <a:prstGeom xmlns:a="http://schemas.openxmlformats.org/drawingml/2006/main" prst="rect">
             <a:avLst/>
@@ -15739,7 +15852,7 @@
           <a:fontRef xmlns:a="http://schemas.openxmlformats.org/drawingml/2006/main" idx="minor"/>
         </p:style>
         <p:txBody>
-          <a:bodyPr xmlns:a="http://schemas.openxmlformats.org/drawingml/2006/main" lIns="90000" tIns="45000" rIns="90000" bIns="45000" anchor="t">
+          <a:bodyPr xmlns:a="http://schemas.openxmlformats.org/drawingml/2006/main" lIns="4320" tIns="45000" rIns="4320" bIns="45000" anchor="t">
             <a:noAutofit/>
           </a:bodyPr>
           <a:lstStyle xmlns:a="http://schemas.openxmlformats.org/drawingml/2006/main"/>
@@ -15760,7 +15873,7 @@
           <p:cNvPr id="165" name="">
             <a:extLst xmlns:a="http://schemas.openxmlformats.org/drawingml/2006/main">
               <a:ext uri="{FF2B5EF4-FFF2-40B4-BE49-F238E27FC236}">
-                <a16:creationId xmlns:a16="http://schemas.microsoft.com/office/drawing/2014/main" id="{D82BD4BF-193B-481B-B918-FCBCD092F726}"/>
+                <a16:creationId xmlns:a16="http://schemas.microsoft.com/office/drawing/2014/main" id="{77319E99-2831-48F9-97B8-0AC75BBE5D3D}"/>
               </a:ext>
             </a:extLst>
           </p:cNvPr>
@@ -15772,7 +15885,7 @@
         <p:spPr>
           <a:xfrm xmlns:a="http://schemas.openxmlformats.org/drawingml/2006/main">
             <a:off x="4905360" y="1752480"/>
-            <a:ext cx="6095520" cy="418680"/>
+            <a:ext cx="6095160" cy="418320"/>
           </a:xfrm>
           <a:prstGeom xmlns:a="http://schemas.openxmlformats.org/drawingml/2006/main" prst="rect">
             <a:avLst/>
@@ -15827,7 +15940,7 @@
           <p:cNvPr id="166" name="">
             <a:extLst xmlns:a="http://schemas.openxmlformats.org/drawingml/2006/main">
               <a:ext uri="{FF2B5EF4-FFF2-40B4-BE49-F238E27FC236}">
-                <a16:creationId xmlns:a16="http://schemas.microsoft.com/office/drawing/2014/main" id="{923642EB-F8C1-455D-ABD7-BCCFCD4517BC}"/>
+                <a16:creationId xmlns:a16="http://schemas.microsoft.com/office/drawing/2014/main" id="{03AD0421-7B31-49EA-9981-CDE641C5F4F2}"/>
               </a:ext>
             </a:extLst>
           </p:cNvPr>
@@ -15839,7 +15952,7 @@
         <p:spPr>
           <a:xfrm xmlns:a="http://schemas.openxmlformats.org/drawingml/2006/main">
             <a:off x="4905360" y="2352600"/>
-            <a:ext cx="6190920" cy="837720"/>
+            <a:ext cx="6190560" cy="837360"/>
           </a:xfrm>
           <a:prstGeom xmlns:a="http://schemas.openxmlformats.org/drawingml/2006/main" prst="rect">
             <a:avLst/>
@@ -15894,7 +16007,7 @@
           <p:cNvPr id="167" name="">
             <a:extLst xmlns:a="http://schemas.openxmlformats.org/drawingml/2006/main">
               <a:ext uri="{FF2B5EF4-FFF2-40B4-BE49-F238E27FC236}">
-                <a16:creationId xmlns:a16="http://schemas.microsoft.com/office/drawing/2014/main" id="{B8715AF6-B4FE-4D1C-85AE-2E32BD2B3BE7}"/>
+                <a16:creationId xmlns:a16="http://schemas.microsoft.com/office/drawing/2014/main" id="{FBB6C78B-6246-4488-9309-98A532A6AB93}"/>
               </a:ext>
             </a:extLst>
           </p:cNvPr>
@@ -15906,7 +16019,7 @@
         <p:spPr>
           <a:xfrm xmlns:a="http://schemas.openxmlformats.org/drawingml/2006/main">
             <a:off x="4905360" y="3476520"/>
-            <a:ext cx="6190920" cy="1076040"/>
+            <a:ext cx="6190560" cy="1075680"/>
           </a:xfrm>
           <a:prstGeom xmlns:a="http://schemas.openxmlformats.org/drawingml/2006/main" prst="roundRect">
             <a:avLst>
@@ -15950,7 +16063,7 @@
           <p:cNvPr id="168" name="">
             <a:extLst xmlns:a="http://schemas.openxmlformats.org/drawingml/2006/main">
               <a:ext uri="{FF2B5EF4-FFF2-40B4-BE49-F238E27FC236}">
-                <a16:creationId xmlns:a16="http://schemas.microsoft.com/office/drawing/2014/main" id="{94144F77-7C24-4067-AC23-A4A7E826095F}"/>
+                <a16:creationId xmlns:a16="http://schemas.microsoft.com/office/drawing/2014/main" id="{BBAC377E-EA0A-430C-9D09-2544D278949D}"/>
               </a:ext>
             </a:extLst>
           </p:cNvPr>
@@ -15962,7 +16075,7 @@
         <p:spPr>
           <a:xfrm xmlns:a="http://schemas.openxmlformats.org/drawingml/2006/main">
             <a:off x="5143680" y="3600360"/>
-            <a:ext cx="2190240" cy="228240"/>
+            <a:ext cx="2189880" cy="227880"/>
           </a:xfrm>
           <a:prstGeom xmlns:a="http://schemas.openxmlformats.org/drawingml/2006/main" prst="rect">
             <a:avLst/>
@@ -16017,7 +16130,7 @@
           <p:cNvPr id="169" name="">
             <a:extLst xmlns:a="http://schemas.openxmlformats.org/drawingml/2006/main">
               <a:ext uri="{FF2B5EF4-FFF2-40B4-BE49-F238E27FC236}">
-                <a16:creationId xmlns:a16="http://schemas.microsoft.com/office/drawing/2014/main" id="{368BE616-D6FE-40D4-9B8E-4C3328E03171}"/>
+                <a16:creationId xmlns:a16="http://schemas.microsoft.com/office/drawing/2014/main" id="{36547709-668B-4822-95F9-04FFB93C3153}"/>
               </a:ext>
             </a:extLst>
           </p:cNvPr>
@@ -16029,7 +16142,7 @@
         <p:spPr>
           <a:xfrm xmlns:a="http://schemas.openxmlformats.org/drawingml/2006/main">
             <a:off x="5143680" y="3933720"/>
-            <a:ext cx="5619240" cy="418680"/>
+            <a:ext cx="5618880" cy="418320"/>
           </a:xfrm>
           <a:prstGeom xmlns:a="http://schemas.openxmlformats.org/drawingml/2006/main" prst="rect">
             <a:avLst/>
@@ -16084,7 +16197,7 @@
           <p:cNvPr id="170" name="">
             <a:extLst xmlns:a="http://schemas.openxmlformats.org/drawingml/2006/main">
               <a:ext uri="{FF2B5EF4-FFF2-40B4-BE49-F238E27FC236}">
-                <a16:creationId xmlns:a16="http://schemas.microsoft.com/office/drawing/2014/main" id="{AAFAB220-6D5A-49A2-9895-DD5C4851AE93}"/>
+                <a16:creationId xmlns:a16="http://schemas.microsoft.com/office/drawing/2014/main" id="{0AB88541-A7FA-4101-A5E8-CE05254CC1E5}"/>
               </a:ext>
             </a:extLst>
           </p:cNvPr>
@@ -16096,7 +16209,7 @@
         <p:spPr>
           <a:xfrm xmlns:a="http://schemas.openxmlformats.org/drawingml/2006/main">
             <a:off x="590400" y="5372280"/>
-            <a:ext cx="11010600" cy="533160"/>
+            <a:ext cx="11010240" cy="532800"/>
           </a:xfrm>
           <a:prstGeom xmlns:a="http://schemas.openxmlformats.org/drawingml/2006/main" prst="rect">
             <a:avLst/>
@@ -16151,7 +16264,7 @@
           <p:cNvPr id="171" name="">
             <a:extLst xmlns:a="http://schemas.openxmlformats.org/drawingml/2006/main">
               <a:ext uri="{FF2B5EF4-FFF2-40B4-BE49-F238E27FC236}">
-                <a16:creationId xmlns:a16="http://schemas.microsoft.com/office/drawing/2014/main" id="{12553B49-AA0B-43F6-990E-C371BC6CD7C6}"/>
+                <a16:creationId xmlns:a16="http://schemas.microsoft.com/office/drawing/2014/main" id="{81107C7E-1D51-48C3-8CC5-08A55AF7E0EC}"/>
               </a:ext>
             </a:extLst>
           </p:cNvPr>
@@ -16163,7 +16276,7 @@
         <p:spPr>
           <a:xfrm xmlns:a="http://schemas.openxmlformats.org/drawingml/2006/main">
             <a:off x="590400" y="6153120"/>
-            <a:ext cx="4000320" cy="247320"/>
+            <a:ext cx="3999960" cy="246960"/>
           </a:xfrm>
           <a:prstGeom xmlns:a="http://schemas.openxmlformats.org/drawingml/2006/main" prst="rect">
             <a:avLst/>
@@ -16199,7 +16312,7 @@
                 <a:latin typeface="Arial"/>
                 <a:ea typeface="Arial"/>
                 <a:cs typeface="Arial"/>
-                <a:hlinkClick xmlns:r="http://schemas.openxmlformats.org/officeDocument/2006/relationships" r:id="R0ee4f2f42203441a"/>
+                <a:hlinkClick xmlns:r="http://schemas.openxmlformats.org/officeDocument/2006/relationships" r:id="Rd6da856e1f9e4f32"/>
               </a:rPr>
               <a:t>Inspect the S6 coverage matrix ↗</a:t>
             </a:r>
@@ -16217,7 +16330,7 @@
     </p:spTree>
     <p:extLst>
       <p:ext uri="{BB962C8B-B14F-4D97-AF65-F5344CB8AC3E}">
-        <p14:creationId xmlns:p14="http://schemas.microsoft.com/office/powerpoint/2010/main" val="1645592086"/>
+        <p14:creationId xmlns:p14="http://schemas.microsoft.com/office/powerpoint/2010/main" val="1642437679"/>
       </p:ext>
     </p:extLst>
   </p:cSld>
@@ -16248,7 +16361,7 @@
           <p:cNvPr id="172" name="">
             <a:extLst xmlns:a="http://schemas.openxmlformats.org/drawingml/2006/main">
               <a:ext uri="{FF2B5EF4-FFF2-40B4-BE49-F238E27FC236}">
-                <a16:creationId xmlns:a16="http://schemas.microsoft.com/office/drawing/2014/main" id="{DAD6F190-29F7-47D6-9F42-6D34B5FA2139}"/>
+                <a16:creationId xmlns:a16="http://schemas.microsoft.com/office/drawing/2014/main" id="{99033B64-AF1C-45F8-9FA1-B0AD47C17B40}"/>
               </a:ext>
             </a:extLst>
           </p:cNvPr>
@@ -16260,7 +16373,7 @@
         <p:spPr>
           <a:xfrm xmlns:a="http://schemas.openxmlformats.org/drawingml/2006/main">
             <a:off x="0" y="0"/>
-            <a:ext cx="12191760" cy="47160"/>
+            <a:ext cx="12191400" cy="46800"/>
           </a:xfrm>
           <a:prstGeom xmlns:a="http://schemas.openxmlformats.org/drawingml/2006/main" prst="rect">
             <a:avLst/>
@@ -16300,7 +16413,7 @@
           <p:cNvPr id="173" name="">
             <a:extLst xmlns:a="http://schemas.openxmlformats.org/drawingml/2006/main">
               <a:ext uri="{FF2B5EF4-FFF2-40B4-BE49-F238E27FC236}">
-                <a16:creationId xmlns:a16="http://schemas.microsoft.com/office/drawing/2014/main" id="{1F6E5731-7736-4F5D-8B48-44F617DE40DF}"/>
+                <a16:creationId xmlns:a16="http://schemas.microsoft.com/office/drawing/2014/main" id="{2A735365-6CA4-4047-B592-F706235E382F}"/>
               </a:ext>
             </a:extLst>
           </p:cNvPr>
@@ -16312,7 +16425,7 @@
         <p:spPr>
           <a:xfrm xmlns:a="http://schemas.openxmlformats.org/drawingml/2006/main">
             <a:off x="590400" y="266760"/>
-            <a:ext cx="4190760" cy="237600"/>
+            <a:ext cx="4190400" cy="237240"/>
           </a:xfrm>
           <a:prstGeom xmlns:a="http://schemas.openxmlformats.org/drawingml/2006/main" prst="rect">
             <a:avLst/>
@@ -16367,7 +16480,7 @@
           <p:cNvPr id="174" name="">
             <a:extLst xmlns:a="http://schemas.openxmlformats.org/drawingml/2006/main">
               <a:ext uri="{FF2B5EF4-FFF2-40B4-BE49-F238E27FC236}">
-                <a16:creationId xmlns:a16="http://schemas.microsoft.com/office/drawing/2014/main" id="{D36C2E78-B7B5-40DB-B3F6-D16CE727E3E0}"/>
+                <a16:creationId xmlns:a16="http://schemas.microsoft.com/office/drawing/2014/main" id="{0D9A7D84-AFD1-474A-BE72-732459EE99F5}"/>
               </a:ext>
             </a:extLst>
           </p:cNvPr>
@@ -16379,7 +16492,7 @@
         <p:spPr>
           <a:xfrm xmlns:a="http://schemas.openxmlformats.org/drawingml/2006/main">
             <a:off x="11144160" y="266760"/>
-            <a:ext cx="456840" cy="237600"/>
+            <a:ext cx="456480" cy="237240"/>
           </a:xfrm>
           <a:prstGeom xmlns:a="http://schemas.openxmlformats.org/drawingml/2006/main" prst="rect">
             <a:avLst/>
@@ -16434,7 +16547,7 @@
           <p:cNvPr id="175" name="">
             <a:extLst xmlns:a="http://schemas.openxmlformats.org/drawingml/2006/main">
               <a:ext uri="{FF2B5EF4-FFF2-40B4-BE49-F238E27FC236}">
-                <a16:creationId xmlns:a16="http://schemas.microsoft.com/office/drawing/2014/main" id="{3D697F58-AA38-4572-9493-ED754850F025}"/>
+                <a16:creationId xmlns:a16="http://schemas.microsoft.com/office/drawing/2014/main" id="{7B99B99B-5237-4C82-9151-6D76C05C326A}"/>
               </a:ext>
             </a:extLst>
           </p:cNvPr>
@@ -16446,7 +16559,7 @@
         <p:spPr>
           <a:xfrm xmlns:a="http://schemas.openxmlformats.org/drawingml/2006/main">
             <a:off x="590400" y="571680"/>
-            <a:ext cx="11010600" cy="9000"/>
+            <a:ext cx="11010240" cy="8640"/>
           </a:xfrm>
           <a:prstGeom xmlns:a="http://schemas.openxmlformats.org/drawingml/2006/main" prst="rect">
             <a:avLst/>
@@ -16486,7 +16599,7 @@
           <p:cNvPr id="176" name="">
             <a:extLst xmlns:a="http://schemas.openxmlformats.org/drawingml/2006/main">
               <a:ext uri="{FF2B5EF4-FFF2-40B4-BE49-F238E27FC236}">
-                <a16:creationId xmlns:a16="http://schemas.microsoft.com/office/drawing/2014/main" id="{31CA6622-E0D6-4F8A-A141-078C09B4AF69}"/>
+                <a16:creationId xmlns:a16="http://schemas.microsoft.com/office/drawing/2014/main" id="{6F6F099E-AA0C-49F6-9C45-30D9B33352DD}"/>
               </a:ext>
             </a:extLst>
           </p:cNvPr>
@@ -16498,7 +16611,7 @@
         <p:spPr>
           <a:xfrm xmlns:a="http://schemas.openxmlformats.org/drawingml/2006/main">
             <a:off x="590400" y="781200"/>
-            <a:ext cx="11010600" cy="723600"/>
+            <a:ext cx="11010240" cy="723240"/>
           </a:xfrm>
           <a:prstGeom xmlns:a="http://schemas.openxmlformats.org/drawingml/2006/main" prst="rect">
             <a:avLst/>
@@ -16553,7 +16666,7 @@
           <p:cNvPr id="177" name="">
             <a:extLst xmlns:a="http://schemas.openxmlformats.org/drawingml/2006/main">
               <a:ext uri="{FF2B5EF4-FFF2-40B4-BE49-F238E27FC236}">
-                <a16:creationId xmlns:a16="http://schemas.microsoft.com/office/drawing/2014/main" id="{DB04C38A-C45A-4F38-B181-3790F9B38D20}"/>
+                <a16:creationId xmlns:a16="http://schemas.microsoft.com/office/drawing/2014/main" id="{BBA4CF23-15C1-4A87-A1E1-5C9D8BD6EF2D}"/>
               </a:ext>
             </a:extLst>
           </p:cNvPr>
@@ -16565,7 +16678,7 @@
         <p:spPr>
           <a:xfrm xmlns:a="http://schemas.openxmlformats.org/drawingml/2006/main">
             <a:off x="590400" y="1790640"/>
-            <a:ext cx="3095280" cy="47160"/>
+            <a:ext cx="3094920" cy="46800"/>
           </a:xfrm>
           <a:prstGeom xmlns:a="http://schemas.openxmlformats.org/drawingml/2006/main" prst="rect">
             <a:avLst/>
@@ -16605,7 +16718,7 @@
           <p:cNvPr id="178" name="">
             <a:extLst xmlns:a="http://schemas.openxmlformats.org/drawingml/2006/main">
               <a:ext uri="{FF2B5EF4-FFF2-40B4-BE49-F238E27FC236}">
-                <a16:creationId xmlns:a16="http://schemas.microsoft.com/office/drawing/2014/main" id="{62270FF3-B341-48E5-AE10-6ED5BE750B09}"/>
+                <a16:creationId xmlns:a16="http://schemas.microsoft.com/office/drawing/2014/main" id="{943C8993-41D0-40A1-8F95-5958087C846C}"/>
               </a:ext>
             </a:extLst>
           </p:cNvPr>
@@ -16617,7 +16730,7 @@
         <p:spPr>
           <a:xfrm xmlns:a="http://schemas.openxmlformats.org/drawingml/2006/main">
             <a:off x="590400" y="2038320"/>
-            <a:ext cx="3095280" cy="228240"/>
+            <a:ext cx="3094920" cy="227880"/>
           </a:xfrm>
           <a:prstGeom xmlns:a="http://schemas.openxmlformats.org/drawingml/2006/main" prst="rect">
             <a:avLst/>
@@ -16672,7 +16785,7 @@
           <p:cNvPr id="179" name="">
             <a:extLst xmlns:a="http://schemas.openxmlformats.org/drawingml/2006/main">
               <a:ext uri="{FF2B5EF4-FFF2-40B4-BE49-F238E27FC236}">
-                <a16:creationId xmlns:a16="http://schemas.microsoft.com/office/drawing/2014/main" id="{4B9CC516-EEEF-44EB-A29E-B54247645F49}"/>
+                <a16:creationId xmlns:a16="http://schemas.microsoft.com/office/drawing/2014/main" id="{A08009C7-CFB6-40E4-B4F2-8ABD5E24621E}"/>
               </a:ext>
             </a:extLst>
           </p:cNvPr>
@@ -16684,7 +16797,7 @@
         <p:spPr>
           <a:xfrm xmlns:a="http://schemas.openxmlformats.org/drawingml/2006/main">
             <a:off x="590400" y="2505240"/>
-            <a:ext cx="3095280" cy="1866600"/>
+            <a:ext cx="3094920" cy="1866240"/>
           </a:xfrm>
           <a:prstGeom xmlns:a="http://schemas.openxmlformats.org/drawingml/2006/main" prst="rect">
             <a:avLst/>
@@ -16827,7 +16940,7 @@
           <p:cNvPr id="180" name="">
             <a:extLst xmlns:a="http://schemas.openxmlformats.org/drawingml/2006/main">
               <a:ext uri="{FF2B5EF4-FFF2-40B4-BE49-F238E27FC236}">
-                <a16:creationId xmlns:a16="http://schemas.microsoft.com/office/drawing/2014/main" id="{18BDB053-2763-4FAF-880F-5881B22A65CD}"/>
+                <a16:creationId xmlns:a16="http://schemas.microsoft.com/office/drawing/2014/main" id="{8B7A712D-3F31-4D4F-9840-2A31910E4CE0}"/>
               </a:ext>
             </a:extLst>
           </p:cNvPr>
@@ -16839,7 +16952,7 @@
         <p:spPr>
           <a:xfrm xmlns:a="http://schemas.openxmlformats.org/drawingml/2006/main">
             <a:off x="4334040" y="1790640"/>
-            <a:ext cx="3095280" cy="47160"/>
+            <a:ext cx="3094920" cy="46800"/>
           </a:xfrm>
           <a:prstGeom xmlns:a="http://schemas.openxmlformats.org/drawingml/2006/main" prst="rect">
             <a:avLst/>
@@ -16879,7 +16992,7 @@
           <p:cNvPr id="181" name="">
             <a:extLst xmlns:a="http://schemas.openxmlformats.org/drawingml/2006/main">
               <a:ext uri="{FF2B5EF4-FFF2-40B4-BE49-F238E27FC236}">
-                <a16:creationId xmlns:a16="http://schemas.microsoft.com/office/drawing/2014/main" id="{8049D798-F2DE-4166-A1E0-C5FA496220EA}"/>
+                <a16:creationId xmlns:a16="http://schemas.microsoft.com/office/drawing/2014/main" id="{D509DC74-B1A2-4118-9317-37DA02BA8411}"/>
               </a:ext>
             </a:extLst>
           </p:cNvPr>
@@ -16891,7 +17004,7 @@
         <p:spPr>
           <a:xfrm xmlns:a="http://schemas.openxmlformats.org/drawingml/2006/main">
             <a:off x="4334040" y="2038320"/>
-            <a:ext cx="3095280" cy="228240"/>
+            <a:ext cx="3094920" cy="227880"/>
           </a:xfrm>
           <a:prstGeom xmlns:a="http://schemas.openxmlformats.org/drawingml/2006/main" prst="rect">
             <a:avLst/>
@@ -16946,7 +17059,7 @@
           <p:cNvPr id="182" name="">
             <a:extLst xmlns:a="http://schemas.openxmlformats.org/drawingml/2006/main">
               <a:ext uri="{FF2B5EF4-FFF2-40B4-BE49-F238E27FC236}">
-                <a16:creationId xmlns:a16="http://schemas.microsoft.com/office/drawing/2014/main" id="{67EAABC0-39FD-4B1F-ABB2-F0B727D3A385}"/>
+                <a16:creationId xmlns:a16="http://schemas.microsoft.com/office/drawing/2014/main" id="{9332B517-7F93-4A7A-9777-77B04CDD3AFC}"/>
               </a:ext>
             </a:extLst>
           </p:cNvPr>
@@ -16958,7 +17071,7 @@
         <p:spPr>
           <a:xfrm xmlns:a="http://schemas.openxmlformats.org/drawingml/2006/main">
             <a:off x="4334040" y="2505240"/>
-            <a:ext cx="3095280" cy="1866600"/>
+            <a:ext cx="3094920" cy="1866240"/>
           </a:xfrm>
           <a:prstGeom xmlns:a="http://schemas.openxmlformats.org/drawingml/2006/main" prst="rect">
             <a:avLst/>
@@ -17013,7 +17126,7 @@
           <p:cNvPr id="183" name="">
             <a:extLst xmlns:a="http://schemas.openxmlformats.org/drawingml/2006/main">
               <a:ext uri="{FF2B5EF4-FFF2-40B4-BE49-F238E27FC236}">
-                <a16:creationId xmlns:a16="http://schemas.microsoft.com/office/drawing/2014/main" id="{C451DD28-CAE9-4E5D-9F6F-377C1870C177}"/>
+                <a16:creationId xmlns:a16="http://schemas.microsoft.com/office/drawing/2014/main" id="{8B55DB1B-C825-4F3D-B34D-ECE52FFC73C3}"/>
               </a:ext>
             </a:extLst>
           </p:cNvPr>
@@ -17025,7 +17138,7 @@
         <p:spPr>
           <a:xfrm xmlns:a="http://schemas.openxmlformats.org/drawingml/2006/main">
             <a:off x="8077320" y="1790640"/>
-            <a:ext cx="3095280" cy="47160"/>
+            <a:ext cx="3094920" cy="46800"/>
           </a:xfrm>
           <a:prstGeom xmlns:a="http://schemas.openxmlformats.org/drawingml/2006/main" prst="rect">
             <a:avLst/>
@@ -17065,7 +17178,7 @@
           <p:cNvPr id="184" name="">
             <a:extLst xmlns:a="http://schemas.openxmlformats.org/drawingml/2006/main">
               <a:ext uri="{FF2B5EF4-FFF2-40B4-BE49-F238E27FC236}">
-                <a16:creationId xmlns:a16="http://schemas.microsoft.com/office/drawing/2014/main" id="{1289BB2D-4C28-4206-93E9-410D1EDA6EBB}"/>
+                <a16:creationId xmlns:a16="http://schemas.microsoft.com/office/drawing/2014/main" id="{B49018E9-4BB6-4544-8B3E-C41B6CD222FB}"/>
               </a:ext>
             </a:extLst>
           </p:cNvPr>
@@ -17077,7 +17190,7 @@
         <p:spPr>
           <a:xfrm xmlns:a="http://schemas.openxmlformats.org/drawingml/2006/main">
             <a:off x="8077320" y="2038320"/>
-            <a:ext cx="3095280" cy="228240"/>
+            <a:ext cx="3094920" cy="227880"/>
           </a:xfrm>
           <a:prstGeom xmlns:a="http://schemas.openxmlformats.org/drawingml/2006/main" prst="rect">
             <a:avLst/>
@@ -17132,7 +17245,7 @@
           <p:cNvPr id="185" name="">
             <a:extLst xmlns:a="http://schemas.openxmlformats.org/drawingml/2006/main">
               <a:ext uri="{FF2B5EF4-FFF2-40B4-BE49-F238E27FC236}">
-                <a16:creationId xmlns:a16="http://schemas.microsoft.com/office/drawing/2014/main" id="{C51F060E-F03E-49FB-A169-35871C1587C9}"/>
+                <a16:creationId xmlns:a16="http://schemas.microsoft.com/office/drawing/2014/main" id="{ABF10E87-9E09-4681-B696-ED83BC70C8F9}"/>
               </a:ext>
             </a:extLst>
           </p:cNvPr>
@@ -17144,7 +17257,7 @@
         <p:spPr>
           <a:xfrm xmlns:a="http://schemas.openxmlformats.org/drawingml/2006/main">
             <a:off x="8077320" y="2505240"/>
-            <a:ext cx="3095280" cy="1866600"/>
+            <a:ext cx="3094920" cy="1866240"/>
           </a:xfrm>
           <a:prstGeom xmlns:a="http://schemas.openxmlformats.org/drawingml/2006/main" prst="rect">
             <a:avLst/>
@@ -17287,7 +17400,7 @@
           <p:cNvPr id="186" name="">
             <a:extLst xmlns:a="http://schemas.openxmlformats.org/drawingml/2006/main">
               <a:ext uri="{FF2B5EF4-FFF2-40B4-BE49-F238E27FC236}">
-                <a16:creationId xmlns:a16="http://schemas.microsoft.com/office/drawing/2014/main" id="{DE8F4915-607C-4121-BE90-0C71EDA45C53}"/>
+                <a16:creationId xmlns:a16="http://schemas.microsoft.com/office/drawing/2014/main" id="{ECE092BD-06AE-4286-B3E2-D3A696065800}"/>
               </a:ext>
             </a:extLst>
           </p:cNvPr>
@@ -17299,7 +17412,7 @@
         <p:spPr>
           <a:xfrm xmlns:a="http://schemas.openxmlformats.org/drawingml/2006/main">
             <a:off x="590400" y="4781520"/>
-            <a:ext cx="11010600" cy="914040"/>
+            <a:ext cx="11010240" cy="913680"/>
           </a:xfrm>
           <a:prstGeom xmlns:a="http://schemas.openxmlformats.org/drawingml/2006/main" prst="roundRect">
             <a:avLst>
@@ -17343,7 +17456,7 @@
           <p:cNvPr id="187" name="">
             <a:extLst xmlns:a="http://schemas.openxmlformats.org/drawingml/2006/main">
               <a:ext uri="{FF2B5EF4-FFF2-40B4-BE49-F238E27FC236}">
-                <a16:creationId xmlns:a16="http://schemas.microsoft.com/office/drawing/2014/main" id="{B15DCAA2-E577-4A5E-9A16-A5148D7F5E58}"/>
+                <a16:creationId xmlns:a16="http://schemas.microsoft.com/office/drawing/2014/main" id="{8391A9F1-425E-4E07-BABC-21E6060920AA}"/>
               </a:ext>
             </a:extLst>
           </p:cNvPr>
@@ -17355,7 +17468,7 @@
         <p:spPr>
           <a:xfrm xmlns:a="http://schemas.openxmlformats.org/drawingml/2006/main">
             <a:off x="819000" y="4781520"/>
-            <a:ext cx="1714320" cy="914040"/>
+            <a:ext cx="1713960" cy="913680"/>
           </a:xfrm>
           <a:prstGeom xmlns:a="http://schemas.openxmlformats.org/drawingml/2006/main" prst="rect">
             <a:avLst/>
@@ -17410,7 +17523,7 @@
           <p:cNvPr id="188" name="">
             <a:extLst xmlns:a="http://schemas.openxmlformats.org/drawingml/2006/main">
               <a:ext uri="{FF2B5EF4-FFF2-40B4-BE49-F238E27FC236}">
-                <a16:creationId xmlns:a16="http://schemas.microsoft.com/office/drawing/2014/main" id="{95340344-4848-4F4E-9AE6-EC031BD305F3}"/>
+                <a16:creationId xmlns:a16="http://schemas.microsoft.com/office/drawing/2014/main" id="{4232C70E-466D-4F32-BA11-BD2AFF8D4A13}"/>
               </a:ext>
             </a:extLst>
           </p:cNvPr>
@@ -17422,7 +17535,7 @@
         <p:spPr>
           <a:xfrm xmlns:a="http://schemas.openxmlformats.org/drawingml/2006/main">
             <a:off x="2523960" y="4781520"/>
-            <a:ext cx="8714880" cy="914040"/>
+            <a:ext cx="8714520" cy="913680"/>
           </a:xfrm>
           <a:prstGeom xmlns:a="http://schemas.openxmlformats.org/drawingml/2006/main" prst="rect">
             <a:avLst/>
@@ -17477,7 +17590,7 @@
           <p:cNvPr id="189" name="">
             <a:extLst xmlns:a="http://schemas.openxmlformats.org/drawingml/2006/main">
               <a:ext uri="{FF2B5EF4-FFF2-40B4-BE49-F238E27FC236}">
-                <a16:creationId xmlns:a16="http://schemas.microsoft.com/office/drawing/2014/main" id="{7EF98607-FAA5-4D49-B2C4-E9A29339D0F7}"/>
+                <a16:creationId xmlns:a16="http://schemas.microsoft.com/office/drawing/2014/main" id="{25B91181-FDF4-4F9F-90BB-5094FBBA10C0}"/>
               </a:ext>
             </a:extLst>
           </p:cNvPr>
@@ -17489,7 +17602,7 @@
         <p:spPr>
           <a:xfrm xmlns:a="http://schemas.openxmlformats.org/drawingml/2006/main">
             <a:off x="590400" y="6114960"/>
-            <a:ext cx="7238520" cy="285480"/>
+            <a:ext cx="7238160" cy="285120"/>
           </a:xfrm>
           <a:prstGeom xmlns:a="http://schemas.openxmlformats.org/drawingml/2006/main" prst="rect">
             <a:avLst/>
@@ -17525,7 +17638,7 @@
                 <a:latin typeface="Arial"/>
                 <a:ea typeface="Arial"/>
                 <a:cs typeface="Arial"/>
-                <a:hlinkClick xmlns:r="http://schemas.openxmlformats.org/officeDocument/2006/relationships" r:id="Reeba5084923c4dac"/>
+                <a:hlinkClick xmlns:r="http://schemas.openxmlformats.org/officeDocument/2006/relationships" r:id="R008692ed749d4a85"/>
               </a:rPr>
               <a:t>Precompile findings ↗</a:t>
             </a:r>
@@ -17548,7 +17661,7 @@
                 <a:latin typeface="Arial"/>
                 <a:ea typeface="Arial"/>
                 <a:cs typeface="Arial"/>
-                <a:hlinkClick xmlns:r="http://schemas.openxmlformats.org/officeDocument/2006/relationships" r:id="Rb44188eae17640db"/>
+                <a:hlinkClick xmlns:r="http://schemas.openxmlformats.org/officeDocument/2006/relationships" r:id="Rc3371b947de14928"/>
               </a:rPr>
               <a:t>Attestcoin integration ↗</a:t>
             </a:r>
@@ -17566,7 +17679,7 @@
     </p:spTree>
     <p:extLst>
       <p:ext uri="{BB962C8B-B14F-4D97-AF65-F5344CB8AC3E}">
-        <p14:creationId xmlns:p14="http://schemas.microsoft.com/office/powerpoint/2010/main" val="456229828"/>
+        <p14:creationId xmlns:p14="http://schemas.microsoft.com/office/powerpoint/2010/main" val="1886662064"/>
       </p:ext>
     </p:extLst>
   </p:cSld>
@@ -17597,7 +17710,7 @@
           <p:cNvPr id="190" name="">
             <a:extLst xmlns:a="http://schemas.openxmlformats.org/drawingml/2006/main">
               <a:ext uri="{FF2B5EF4-FFF2-40B4-BE49-F238E27FC236}">
-                <a16:creationId xmlns:a16="http://schemas.microsoft.com/office/drawing/2014/main" id="{CA1259BA-7214-4CE4-8C7D-69202E39F40B}"/>
+                <a16:creationId xmlns:a16="http://schemas.microsoft.com/office/drawing/2014/main" id="{95A96E58-7AA7-4C2D-B86C-A0F9F52C913A}"/>
               </a:ext>
             </a:extLst>
           </p:cNvPr>
@@ -17609,7 +17722,7 @@
         <p:spPr>
           <a:xfrm xmlns:a="http://schemas.openxmlformats.org/drawingml/2006/main">
             <a:off x="0" y="0"/>
-            <a:ext cx="12191760" cy="47160"/>
+            <a:ext cx="12191400" cy="46800"/>
           </a:xfrm>
           <a:prstGeom xmlns:a="http://schemas.openxmlformats.org/drawingml/2006/main" prst="rect">
             <a:avLst/>
@@ -17649,7 +17762,7 @@
           <p:cNvPr id="191" name="">
             <a:extLst xmlns:a="http://schemas.openxmlformats.org/drawingml/2006/main">
               <a:ext uri="{FF2B5EF4-FFF2-40B4-BE49-F238E27FC236}">
-                <a16:creationId xmlns:a16="http://schemas.microsoft.com/office/drawing/2014/main" id="{E569C072-3742-47B9-8508-C0FF032FE9FD}"/>
+                <a16:creationId xmlns:a16="http://schemas.microsoft.com/office/drawing/2014/main" id="{DF36D59D-6E36-446F-832F-EA0EF3840906}"/>
               </a:ext>
             </a:extLst>
           </p:cNvPr>
@@ -17661,7 +17774,7 @@
         <p:spPr>
           <a:xfrm xmlns:a="http://schemas.openxmlformats.org/drawingml/2006/main">
             <a:off x="590400" y="266760"/>
-            <a:ext cx="4190760" cy="237600"/>
+            <a:ext cx="4190400" cy="237240"/>
           </a:xfrm>
           <a:prstGeom xmlns:a="http://schemas.openxmlformats.org/drawingml/2006/main" prst="rect">
             <a:avLst/>
@@ -17716,7 +17829,7 @@
           <p:cNvPr id="192" name="">
             <a:extLst xmlns:a="http://schemas.openxmlformats.org/drawingml/2006/main">
               <a:ext uri="{FF2B5EF4-FFF2-40B4-BE49-F238E27FC236}">
-                <a16:creationId xmlns:a16="http://schemas.microsoft.com/office/drawing/2014/main" id="{1184585D-AD99-4675-B6AA-C497EC4D2DB8}"/>
+                <a16:creationId xmlns:a16="http://schemas.microsoft.com/office/drawing/2014/main" id="{14617761-96DC-44D6-AEE7-04723227D70C}"/>
               </a:ext>
             </a:extLst>
           </p:cNvPr>
@@ -17728,7 +17841,7 @@
         <p:spPr>
           <a:xfrm xmlns:a="http://schemas.openxmlformats.org/drawingml/2006/main">
             <a:off x="11144160" y="266760"/>
-            <a:ext cx="456840" cy="237600"/>
+            <a:ext cx="456480" cy="237240"/>
           </a:xfrm>
           <a:prstGeom xmlns:a="http://schemas.openxmlformats.org/drawingml/2006/main" prst="rect">
             <a:avLst/>
@@ -17783,7 +17896,7 @@
           <p:cNvPr id="193" name="">
             <a:extLst xmlns:a="http://schemas.openxmlformats.org/drawingml/2006/main">
               <a:ext uri="{FF2B5EF4-FFF2-40B4-BE49-F238E27FC236}">
-                <a16:creationId xmlns:a16="http://schemas.microsoft.com/office/drawing/2014/main" id="{777B6D5E-2855-451A-B1B6-2FD55964A246}"/>
+                <a16:creationId xmlns:a16="http://schemas.microsoft.com/office/drawing/2014/main" id="{5A44EA40-8651-4BDC-931F-EB4116506EB2}"/>
               </a:ext>
             </a:extLst>
           </p:cNvPr>
@@ -17795,7 +17908,7 @@
         <p:spPr>
           <a:xfrm xmlns:a="http://schemas.openxmlformats.org/drawingml/2006/main">
             <a:off x="590400" y="571680"/>
-            <a:ext cx="11010600" cy="9000"/>
+            <a:ext cx="11010240" cy="8640"/>
           </a:xfrm>
           <a:prstGeom xmlns:a="http://schemas.openxmlformats.org/drawingml/2006/main" prst="rect">
             <a:avLst/>
@@ -17835,7 +17948,7 @@
           <p:cNvPr id="194" name="">
             <a:extLst xmlns:a="http://schemas.openxmlformats.org/drawingml/2006/main">
               <a:ext uri="{FF2B5EF4-FFF2-40B4-BE49-F238E27FC236}">
-                <a16:creationId xmlns:a16="http://schemas.microsoft.com/office/drawing/2014/main" id="{C4A30DD5-2D4F-461E-B080-22994CA2DA89}"/>
+                <a16:creationId xmlns:a16="http://schemas.microsoft.com/office/drawing/2014/main" id="{BBE9F87B-6C34-43FA-9669-E384A9A34DF4}"/>
               </a:ext>
             </a:extLst>
           </p:cNvPr>
@@ -17847,7 +17960,7 @@
         <p:spPr>
           <a:xfrm xmlns:a="http://schemas.openxmlformats.org/drawingml/2006/main">
             <a:off x="590400" y="781200"/>
-            <a:ext cx="11010600" cy="723600"/>
+            <a:ext cx="11010240" cy="723240"/>
           </a:xfrm>
           <a:prstGeom xmlns:a="http://schemas.openxmlformats.org/drawingml/2006/main" prst="rect">
             <a:avLst/>
@@ -17902,7 +18015,7 @@
           <p:cNvPr id="195" name="">
             <a:extLst xmlns:a="http://schemas.openxmlformats.org/drawingml/2006/main">
               <a:ext uri="{FF2B5EF4-FFF2-40B4-BE49-F238E27FC236}">
-                <a16:creationId xmlns:a16="http://schemas.microsoft.com/office/drawing/2014/main" id="{E74595B9-EC58-4479-92BF-6172A31C0F81}"/>
+                <a16:creationId xmlns:a16="http://schemas.microsoft.com/office/drawing/2014/main" id="{5843CD36-F16E-4712-AEB5-0998AF277B52}"/>
               </a:ext>
             </a:extLst>
           </p:cNvPr>
@@ -17914,7 +18027,7 @@
         <p:spPr>
           <a:xfrm xmlns:a="http://schemas.openxmlformats.org/drawingml/2006/main">
             <a:off x="743040" y="1714680"/>
-            <a:ext cx="2228400" cy="228240"/>
+            <a:ext cx="2228040" cy="227880"/>
           </a:xfrm>
           <a:prstGeom xmlns:a="http://schemas.openxmlformats.org/drawingml/2006/main" prst="rect">
             <a:avLst/>
@@ -17969,7 +18082,7 @@
           <p:cNvPr id="196" name="">
             <a:extLst xmlns:a="http://schemas.openxmlformats.org/drawingml/2006/main">
               <a:ext uri="{FF2B5EF4-FFF2-40B4-BE49-F238E27FC236}">
-                <a16:creationId xmlns:a16="http://schemas.microsoft.com/office/drawing/2014/main" id="{A3289B66-AC2B-4A56-A53F-A11A87E1CD69}"/>
+                <a16:creationId xmlns:a16="http://schemas.microsoft.com/office/drawing/2014/main" id="{7FB69F8D-5621-4FE7-8252-8E20E997578C}"/>
               </a:ext>
             </a:extLst>
           </p:cNvPr>
@@ -17981,7 +18094,7 @@
         <p:spPr>
           <a:xfrm xmlns:a="http://schemas.openxmlformats.org/drawingml/2006/main">
             <a:off x="3238560" y="1714680"/>
-            <a:ext cx="2304720" cy="228240"/>
+            <a:ext cx="2304360" cy="227880"/>
           </a:xfrm>
           <a:prstGeom xmlns:a="http://schemas.openxmlformats.org/drawingml/2006/main" prst="rect">
             <a:avLst/>
@@ -18036,7 +18149,7 @@
           <p:cNvPr id="197" name="">
             <a:extLst xmlns:a="http://schemas.openxmlformats.org/drawingml/2006/main">
               <a:ext uri="{FF2B5EF4-FFF2-40B4-BE49-F238E27FC236}">
-                <a16:creationId xmlns:a16="http://schemas.microsoft.com/office/drawing/2014/main" id="{02804C6B-A468-45CB-99D9-D2355FAF8139}"/>
+                <a16:creationId xmlns:a16="http://schemas.microsoft.com/office/drawing/2014/main" id="{C527B0FC-8237-451E-B61E-C5DA9B4768C7}"/>
               </a:ext>
             </a:extLst>
           </p:cNvPr>
@@ -18048,7 +18161,7 @@
         <p:spPr>
           <a:xfrm xmlns:a="http://schemas.openxmlformats.org/drawingml/2006/main">
             <a:off x="5810400" y="1714680"/>
-            <a:ext cx="2838240" cy="228240"/>
+            <a:ext cx="2837880" cy="227880"/>
           </a:xfrm>
           <a:prstGeom xmlns:a="http://schemas.openxmlformats.org/drawingml/2006/main" prst="rect">
             <a:avLst/>
@@ -18103,7 +18216,7 @@
           <p:cNvPr id="198" name="">
             <a:extLst xmlns:a="http://schemas.openxmlformats.org/drawingml/2006/main">
               <a:ext uri="{FF2B5EF4-FFF2-40B4-BE49-F238E27FC236}">
-                <a16:creationId xmlns:a16="http://schemas.microsoft.com/office/drawing/2014/main" id="{0EAD1E2F-05AE-4A27-8336-21E326DD3E38}"/>
+                <a16:creationId xmlns:a16="http://schemas.microsoft.com/office/drawing/2014/main" id="{F4F47BA7-C7BC-4D13-9B40-5B61BCF00BD6}"/>
               </a:ext>
             </a:extLst>
           </p:cNvPr>
@@ -18115,7 +18228,7 @@
         <p:spPr>
           <a:xfrm xmlns:a="http://schemas.openxmlformats.org/drawingml/2006/main">
             <a:off x="8915400" y="1714680"/>
-            <a:ext cx="2685600" cy="228240"/>
+            <a:ext cx="2685240" cy="227880"/>
           </a:xfrm>
           <a:prstGeom xmlns:a="http://schemas.openxmlformats.org/drawingml/2006/main" prst="rect">
             <a:avLst/>
@@ -18170,7 +18283,7 @@
           <p:cNvPr id="199" name="">
             <a:extLst xmlns:a="http://schemas.openxmlformats.org/drawingml/2006/main">
               <a:ext uri="{FF2B5EF4-FFF2-40B4-BE49-F238E27FC236}">
-                <a16:creationId xmlns:a16="http://schemas.microsoft.com/office/drawing/2014/main" id="{45297690-4A4F-4EDF-8104-A49B1721B8C2}"/>
+                <a16:creationId xmlns:a16="http://schemas.microsoft.com/office/drawing/2014/main" id="{A02B91E0-716D-4D96-8E7D-1840C36758AF}"/>
               </a:ext>
             </a:extLst>
           </p:cNvPr>
@@ -18182,7 +18295,7 @@
         <p:spPr>
           <a:xfrm xmlns:a="http://schemas.openxmlformats.org/drawingml/2006/main">
             <a:off x="590400" y="2000160"/>
-            <a:ext cx="11010600" cy="18720"/>
+            <a:ext cx="11010240" cy="18360"/>
           </a:xfrm>
           <a:prstGeom xmlns:a="http://schemas.openxmlformats.org/drawingml/2006/main" prst="rect">
             <a:avLst/>
@@ -18222,7 +18335,7 @@
           <p:cNvPr id="200" name="">
             <a:extLst xmlns:a="http://schemas.openxmlformats.org/drawingml/2006/main">
               <a:ext uri="{FF2B5EF4-FFF2-40B4-BE49-F238E27FC236}">
-                <a16:creationId xmlns:a16="http://schemas.microsoft.com/office/drawing/2014/main" id="{66C94669-657F-4C1E-9CDE-9C7F8BA556AD}"/>
+                <a16:creationId xmlns:a16="http://schemas.microsoft.com/office/drawing/2014/main" id="{4B283DED-2B47-42FE-8B79-30E425755B0F}"/>
               </a:ext>
             </a:extLst>
           </p:cNvPr>
@@ -18234,7 +18347,7 @@
         <p:spPr>
           <a:xfrm xmlns:a="http://schemas.openxmlformats.org/drawingml/2006/main">
             <a:off x="590400" y="2076480"/>
-            <a:ext cx="11010600" cy="618840"/>
+            <a:ext cx="11010240" cy="618480"/>
           </a:xfrm>
           <a:prstGeom xmlns:a="http://schemas.openxmlformats.org/drawingml/2006/main" prst="rect">
             <a:avLst/>
@@ -18274,7 +18387,7 @@
           <p:cNvPr id="201" name="">
             <a:extLst xmlns:a="http://schemas.openxmlformats.org/drawingml/2006/main">
               <a:ext uri="{FF2B5EF4-FFF2-40B4-BE49-F238E27FC236}">
-                <a16:creationId xmlns:a16="http://schemas.microsoft.com/office/drawing/2014/main" id="{711A7388-3548-457A-8866-D481B46ECB78}"/>
+                <a16:creationId xmlns:a16="http://schemas.microsoft.com/office/drawing/2014/main" id="{1A159035-3A03-45A5-97CE-3D66A9D4BDC3}"/>
               </a:ext>
             </a:extLst>
           </p:cNvPr>
@@ -18286,7 +18399,7 @@
         <p:spPr>
           <a:xfrm xmlns:a="http://schemas.openxmlformats.org/drawingml/2006/main">
             <a:off x="743040" y="2143080"/>
-            <a:ext cx="2133360" cy="495000"/>
+            <a:ext cx="2133000" cy="494640"/>
           </a:xfrm>
           <a:prstGeom xmlns:a="http://schemas.openxmlformats.org/drawingml/2006/main" prst="rect">
             <a:avLst/>
@@ -18341,7 +18454,7 @@
           <p:cNvPr id="202" name="">
             <a:extLst xmlns:a="http://schemas.openxmlformats.org/drawingml/2006/main">
               <a:ext uri="{FF2B5EF4-FFF2-40B4-BE49-F238E27FC236}">
-                <a16:creationId xmlns:a16="http://schemas.microsoft.com/office/drawing/2014/main" id="{0401EBB9-536A-4129-88B0-2D5255DE58AE}"/>
+                <a16:creationId xmlns:a16="http://schemas.microsoft.com/office/drawing/2014/main" id="{B980EB37-C7AD-4222-8B19-7D716BE6BB73}"/>
               </a:ext>
             </a:extLst>
           </p:cNvPr>
@@ -18353,7 +18466,7 @@
         <p:spPr>
           <a:xfrm xmlns:a="http://schemas.openxmlformats.org/drawingml/2006/main">
             <a:off x="3238560" y="2143080"/>
-            <a:ext cx="2209320" cy="495000"/>
+            <a:ext cx="2208960" cy="494640"/>
           </a:xfrm>
           <a:prstGeom xmlns:a="http://schemas.openxmlformats.org/drawingml/2006/main" prst="rect">
             <a:avLst/>
@@ -18408,7 +18521,7 @@
           <p:cNvPr id="203" name="">
             <a:extLst xmlns:a="http://schemas.openxmlformats.org/drawingml/2006/main">
               <a:ext uri="{FF2B5EF4-FFF2-40B4-BE49-F238E27FC236}">
-                <a16:creationId xmlns:a16="http://schemas.microsoft.com/office/drawing/2014/main" id="{F3C13FD8-2404-46E0-B2B3-F248AD4BB587}"/>
+                <a16:creationId xmlns:a16="http://schemas.microsoft.com/office/drawing/2014/main" id="{D5F79572-C96C-4023-B14A-4CCFF3B55B32}"/>
               </a:ext>
             </a:extLst>
           </p:cNvPr>
@@ -18420,7 +18533,7 @@
         <p:spPr>
           <a:xfrm xmlns:a="http://schemas.openxmlformats.org/drawingml/2006/main">
             <a:off x="5810400" y="2143080"/>
-            <a:ext cx="2742840" cy="495000"/>
+            <a:ext cx="2742480" cy="494640"/>
           </a:xfrm>
           <a:prstGeom xmlns:a="http://schemas.openxmlformats.org/drawingml/2006/main" prst="rect">
             <a:avLst/>
@@ -18475,7 +18588,7 @@
           <p:cNvPr id="204" name="">
             <a:extLst xmlns:a="http://schemas.openxmlformats.org/drawingml/2006/main">
               <a:ext uri="{FF2B5EF4-FFF2-40B4-BE49-F238E27FC236}">
-                <a16:creationId xmlns:a16="http://schemas.microsoft.com/office/drawing/2014/main" id="{9B863BFE-BBA7-47D8-8976-73B8D82DACCF}"/>
+                <a16:creationId xmlns:a16="http://schemas.microsoft.com/office/drawing/2014/main" id="{1361ECD8-91C9-4128-B451-0455B6E0399C}"/>
               </a:ext>
             </a:extLst>
           </p:cNvPr>
@@ -18487,7 +18600,7 @@
         <p:spPr>
           <a:xfrm xmlns:a="http://schemas.openxmlformats.org/drawingml/2006/main">
             <a:off x="8915400" y="2143080"/>
-            <a:ext cx="2590560" cy="495000"/>
+            <a:ext cx="2590200" cy="494640"/>
           </a:xfrm>
           <a:prstGeom xmlns:a="http://schemas.openxmlformats.org/drawingml/2006/main" prst="rect">
             <a:avLst/>
@@ -18542,7 +18655,7 @@
           <p:cNvPr id="205" name="">
             <a:extLst xmlns:a="http://schemas.openxmlformats.org/drawingml/2006/main">
               <a:ext uri="{FF2B5EF4-FFF2-40B4-BE49-F238E27FC236}">
-                <a16:creationId xmlns:a16="http://schemas.microsoft.com/office/drawing/2014/main" id="{5BE439C6-470B-4962-B15C-907DE90541D4}"/>
+                <a16:creationId xmlns:a16="http://schemas.microsoft.com/office/drawing/2014/main" id="{0FD2F22A-C153-4CE4-B3BF-EF8108B778F2}"/>
               </a:ext>
             </a:extLst>
           </p:cNvPr>
@@ -18554,7 +18667,7 @@
         <p:spPr>
           <a:xfrm xmlns:a="http://schemas.openxmlformats.org/drawingml/2006/main">
             <a:off x="743040" y="2838600"/>
-            <a:ext cx="2133360" cy="495000"/>
+            <a:ext cx="2133000" cy="494640"/>
           </a:xfrm>
           <a:prstGeom xmlns:a="http://schemas.openxmlformats.org/drawingml/2006/main" prst="rect">
             <a:avLst/>
@@ -18609,7 +18722,7 @@
           <p:cNvPr id="206" name="">
             <a:extLst xmlns:a="http://schemas.openxmlformats.org/drawingml/2006/main">
               <a:ext uri="{FF2B5EF4-FFF2-40B4-BE49-F238E27FC236}">
-                <a16:creationId xmlns:a16="http://schemas.microsoft.com/office/drawing/2014/main" id="{6F7D42D3-0829-441B-9AA2-D08DEC72F208}"/>
+                <a16:creationId xmlns:a16="http://schemas.microsoft.com/office/drawing/2014/main" id="{BF776E90-D989-461C-A196-D7779CF604D5}"/>
               </a:ext>
             </a:extLst>
           </p:cNvPr>
@@ -18621,7 +18734,7 @@
         <p:spPr>
           <a:xfrm xmlns:a="http://schemas.openxmlformats.org/drawingml/2006/main">
             <a:off x="3238560" y="2838600"/>
-            <a:ext cx="2209320" cy="495000"/>
+            <a:ext cx="2208960" cy="494640"/>
           </a:xfrm>
           <a:prstGeom xmlns:a="http://schemas.openxmlformats.org/drawingml/2006/main" prst="rect">
             <a:avLst/>
@@ -18676,7 +18789,7 @@
           <p:cNvPr id="207" name="">
             <a:extLst xmlns:a="http://schemas.openxmlformats.org/drawingml/2006/main">
               <a:ext uri="{FF2B5EF4-FFF2-40B4-BE49-F238E27FC236}">
-                <a16:creationId xmlns:a16="http://schemas.microsoft.com/office/drawing/2014/main" id="{20A0CEB0-1DD8-42AF-8F55-46CBF3BFEB99}"/>
+                <a16:creationId xmlns:a16="http://schemas.microsoft.com/office/drawing/2014/main" id="{A2E34F6F-FF44-4B57-AA3F-AF57E3EDCA37}"/>
               </a:ext>
             </a:extLst>
           </p:cNvPr>
@@ -18688,7 +18801,7 @@
         <p:spPr>
           <a:xfrm xmlns:a="http://schemas.openxmlformats.org/drawingml/2006/main">
             <a:off x="5810400" y="2838600"/>
-            <a:ext cx="2742840" cy="495000"/>
+            <a:ext cx="2742480" cy="494640"/>
           </a:xfrm>
           <a:prstGeom xmlns:a="http://schemas.openxmlformats.org/drawingml/2006/main" prst="rect">
             <a:avLst/>
@@ -18743,7 +18856,7 @@
           <p:cNvPr id="208" name="">
             <a:extLst xmlns:a="http://schemas.openxmlformats.org/drawingml/2006/main">
               <a:ext uri="{FF2B5EF4-FFF2-40B4-BE49-F238E27FC236}">
-                <a16:creationId xmlns:a16="http://schemas.microsoft.com/office/drawing/2014/main" id="{9CD5E9D8-4CA9-4303-8DD1-2596053966F0}"/>
+                <a16:creationId xmlns:a16="http://schemas.microsoft.com/office/drawing/2014/main" id="{DEF77EA0-AEE3-4516-974A-16EF3E41B61E}"/>
               </a:ext>
             </a:extLst>
           </p:cNvPr>
@@ -18755,7 +18868,7 @@
         <p:spPr>
           <a:xfrm xmlns:a="http://schemas.openxmlformats.org/drawingml/2006/main">
             <a:off x="8915400" y="2838600"/>
-            <a:ext cx="2590560" cy="495000"/>
+            <a:ext cx="2590200" cy="494640"/>
           </a:xfrm>
           <a:prstGeom xmlns:a="http://schemas.openxmlformats.org/drawingml/2006/main" prst="rect">
             <a:avLst/>
@@ -18810,7 +18923,7 @@
           <p:cNvPr id="209" name="">
             <a:extLst xmlns:a="http://schemas.openxmlformats.org/drawingml/2006/main">
               <a:ext uri="{FF2B5EF4-FFF2-40B4-BE49-F238E27FC236}">
-                <a16:creationId xmlns:a16="http://schemas.microsoft.com/office/drawing/2014/main" id="{9AD4ABB3-7EF4-4F68-A21E-F496A1230CCD}"/>
+                <a16:creationId xmlns:a16="http://schemas.microsoft.com/office/drawing/2014/main" id="{0550D92A-203F-4C1F-A0DE-F031F3D847A2}"/>
               </a:ext>
             </a:extLst>
           </p:cNvPr>
@@ -18822,7 +18935,7 @@
         <p:spPr>
           <a:xfrm xmlns:a="http://schemas.openxmlformats.org/drawingml/2006/main">
             <a:off x="590400" y="3467160"/>
-            <a:ext cx="11010600" cy="618840"/>
+            <a:ext cx="11010240" cy="618480"/>
           </a:xfrm>
           <a:prstGeom xmlns:a="http://schemas.openxmlformats.org/drawingml/2006/main" prst="rect">
             <a:avLst/>
@@ -18862,7 +18975,7 @@
           <p:cNvPr id="210" name="">
             <a:extLst xmlns:a="http://schemas.openxmlformats.org/drawingml/2006/main">
               <a:ext uri="{FF2B5EF4-FFF2-40B4-BE49-F238E27FC236}">
-                <a16:creationId xmlns:a16="http://schemas.microsoft.com/office/drawing/2014/main" id="{C2055018-B2D9-4398-A2D0-220C03BF38AF}"/>
+                <a16:creationId xmlns:a16="http://schemas.microsoft.com/office/drawing/2014/main" id="{093F6E67-7A76-4F83-9D06-2E16003EF42B}"/>
               </a:ext>
             </a:extLst>
           </p:cNvPr>
@@ -18874,7 +18987,7 @@
         <p:spPr>
           <a:xfrm xmlns:a="http://schemas.openxmlformats.org/drawingml/2006/main">
             <a:off x="743040" y="3533760"/>
-            <a:ext cx="2133360" cy="495000"/>
+            <a:ext cx="2133000" cy="494640"/>
           </a:xfrm>
           <a:prstGeom xmlns:a="http://schemas.openxmlformats.org/drawingml/2006/main" prst="rect">
             <a:avLst/>
@@ -18929,7 +19042,7 @@
           <p:cNvPr id="211" name="">
             <a:extLst xmlns:a="http://schemas.openxmlformats.org/drawingml/2006/main">
               <a:ext uri="{FF2B5EF4-FFF2-40B4-BE49-F238E27FC236}">
-                <a16:creationId xmlns:a16="http://schemas.microsoft.com/office/drawing/2014/main" id="{D65D98AB-B1F5-440B-9845-74CF79CFA366}"/>
+                <a16:creationId xmlns:a16="http://schemas.microsoft.com/office/drawing/2014/main" id="{3EFE002B-6BAA-49ED-8D45-5FC030FA276C}"/>
               </a:ext>
             </a:extLst>
           </p:cNvPr>
@@ -18941,7 +19054,7 @@
         <p:spPr>
           <a:xfrm xmlns:a="http://schemas.openxmlformats.org/drawingml/2006/main">
             <a:off x="3238560" y="3533760"/>
-            <a:ext cx="2209320" cy="495000"/>
+            <a:ext cx="2208960" cy="494640"/>
           </a:xfrm>
           <a:prstGeom xmlns:a="http://schemas.openxmlformats.org/drawingml/2006/main" prst="rect">
             <a:avLst/>
@@ -18996,7 +19109,7 @@
           <p:cNvPr id="212" name="">
             <a:extLst xmlns:a="http://schemas.openxmlformats.org/drawingml/2006/main">
               <a:ext uri="{FF2B5EF4-FFF2-40B4-BE49-F238E27FC236}">
-                <a16:creationId xmlns:a16="http://schemas.microsoft.com/office/drawing/2014/main" id="{9AC7A055-9C40-46B2-81F7-CE4F3D420B0E}"/>
+                <a16:creationId xmlns:a16="http://schemas.microsoft.com/office/drawing/2014/main" id="{7E54C43D-B61F-4AED-BB35-F2FBBBC89544}"/>
               </a:ext>
             </a:extLst>
           </p:cNvPr>
@@ -19008,7 +19121,7 @@
         <p:spPr>
           <a:xfrm xmlns:a="http://schemas.openxmlformats.org/drawingml/2006/main">
             <a:off x="5810400" y="3533760"/>
-            <a:ext cx="2742840" cy="495000"/>
+            <a:ext cx="2742480" cy="494640"/>
           </a:xfrm>
           <a:prstGeom xmlns:a="http://schemas.openxmlformats.org/drawingml/2006/main" prst="rect">
             <a:avLst/>
@@ -19063,7 +19176,7 @@
           <p:cNvPr id="213" name="">
             <a:extLst xmlns:a="http://schemas.openxmlformats.org/drawingml/2006/main">
               <a:ext uri="{FF2B5EF4-FFF2-40B4-BE49-F238E27FC236}">
-                <a16:creationId xmlns:a16="http://schemas.microsoft.com/office/drawing/2014/main" id="{56D25CC0-EF1D-425B-8871-4398F2246062}"/>
+                <a16:creationId xmlns:a16="http://schemas.microsoft.com/office/drawing/2014/main" id="{42D02C72-A69D-4DC7-A4A2-1588A6C2920D}"/>
               </a:ext>
             </a:extLst>
           </p:cNvPr>
@@ -19075,7 +19188,7 @@
         <p:spPr>
           <a:xfrm xmlns:a="http://schemas.openxmlformats.org/drawingml/2006/main">
             <a:off x="8915400" y="3533760"/>
-            <a:ext cx="2590560" cy="495000"/>
+            <a:ext cx="2590200" cy="494640"/>
           </a:xfrm>
           <a:prstGeom xmlns:a="http://schemas.openxmlformats.org/drawingml/2006/main" prst="rect">
             <a:avLst/>
@@ -19130,7 +19243,7 @@
           <p:cNvPr id="214" name="">
             <a:extLst xmlns:a="http://schemas.openxmlformats.org/drawingml/2006/main">
               <a:ext uri="{FF2B5EF4-FFF2-40B4-BE49-F238E27FC236}">
-                <a16:creationId xmlns:a16="http://schemas.microsoft.com/office/drawing/2014/main" id="{2598663B-5300-4CED-89E1-779CAFF354E8}"/>
+                <a16:creationId xmlns:a16="http://schemas.microsoft.com/office/drawing/2014/main" id="{072F3230-A8E7-4ED7-8F4E-7563A423C6E2}"/>
               </a:ext>
             </a:extLst>
           </p:cNvPr>
@@ -19142,7 +19255,7 @@
         <p:spPr>
           <a:xfrm xmlns:a="http://schemas.openxmlformats.org/drawingml/2006/main">
             <a:off x="743040" y="4229280"/>
-            <a:ext cx="2133360" cy="495000"/>
+            <a:ext cx="2133000" cy="494640"/>
           </a:xfrm>
           <a:prstGeom xmlns:a="http://schemas.openxmlformats.org/drawingml/2006/main" prst="rect">
             <a:avLst/>
@@ -19197,7 +19310,7 @@
           <p:cNvPr id="215" name="">
             <a:extLst xmlns:a="http://schemas.openxmlformats.org/drawingml/2006/main">
               <a:ext uri="{FF2B5EF4-FFF2-40B4-BE49-F238E27FC236}">
-                <a16:creationId xmlns:a16="http://schemas.microsoft.com/office/drawing/2014/main" id="{815BBD35-447C-4488-A4F8-C46F06E5F7D4}"/>
+                <a16:creationId xmlns:a16="http://schemas.microsoft.com/office/drawing/2014/main" id="{910891C4-625C-4237-903B-705A4DA6CCCE}"/>
               </a:ext>
             </a:extLst>
           </p:cNvPr>
@@ -19209,7 +19322,7 @@
         <p:spPr>
           <a:xfrm xmlns:a="http://schemas.openxmlformats.org/drawingml/2006/main">
             <a:off x="3238560" y="4229280"/>
-            <a:ext cx="2209320" cy="495000"/>
+            <a:ext cx="2208960" cy="494640"/>
           </a:xfrm>
           <a:prstGeom xmlns:a="http://schemas.openxmlformats.org/drawingml/2006/main" prst="rect">
             <a:avLst/>
@@ -19264,7 +19377,7 @@
           <p:cNvPr id="216" name="">
             <a:extLst xmlns:a="http://schemas.openxmlformats.org/drawingml/2006/main">
               <a:ext uri="{FF2B5EF4-FFF2-40B4-BE49-F238E27FC236}">
-                <a16:creationId xmlns:a16="http://schemas.microsoft.com/office/drawing/2014/main" id="{9DCF2F9E-43F0-481A-9477-1BFFBA3FCB6D}"/>
+                <a16:creationId xmlns:a16="http://schemas.microsoft.com/office/drawing/2014/main" id="{746FB8CB-A570-4991-B47E-3846721FDD27}"/>
               </a:ext>
             </a:extLst>
           </p:cNvPr>
@@ -19276,7 +19389,7 @@
         <p:spPr>
           <a:xfrm xmlns:a="http://schemas.openxmlformats.org/drawingml/2006/main">
             <a:off x="5810400" y="4229280"/>
-            <a:ext cx="2742840" cy="495000"/>
+            <a:ext cx="2742480" cy="494640"/>
           </a:xfrm>
           <a:prstGeom xmlns:a="http://schemas.openxmlformats.org/drawingml/2006/main" prst="rect">
             <a:avLst/>
@@ -19331,7 +19444,7 @@
           <p:cNvPr id="217" name="">
             <a:extLst xmlns:a="http://schemas.openxmlformats.org/drawingml/2006/main">
               <a:ext uri="{FF2B5EF4-FFF2-40B4-BE49-F238E27FC236}">
-                <a16:creationId xmlns:a16="http://schemas.microsoft.com/office/drawing/2014/main" id="{CAD0B703-BB9C-4B5E-9AAF-505863384C06}"/>
+                <a16:creationId xmlns:a16="http://schemas.microsoft.com/office/drawing/2014/main" id="{CA7BA010-4806-4BD7-B39D-B2A49F6494CB}"/>
               </a:ext>
             </a:extLst>
           </p:cNvPr>
@@ -19343,7 +19456,7 @@
         <p:spPr>
           <a:xfrm xmlns:a="http://schemas.openxmlformats.org/drawingml/2006/main">
             <a:off x="8915400" y="4229280"/>
-            <a:ext cx="2590560" cy="495000"/>
+            <a:ext cx="2590200" cy="494640"/>
           </a:xfrm>
           <a:prstGeom xmlns:a="http://schemas.openxmlformats.org/drawingml/2006/main" prst="rect">
             <a:avLst/>
@@ -19398,7 +19511,7 @@
           <p:cNvPr id="218" name="">
             <a:extLst xmlns:a="http://schemas.openxmlformats.org/drawingml/2006/main">
               <a:ext uri="{FF2B5EF4-FFF2-40B4-BE49-F238E27FC236}">
-                <a16:creationId xmlns:a16="http://schemas.microsoft.com/office/drawing/2014/main" id="{2C410F90-CD0F-4B5E-8483-04552DD45E59}"/>
+                <a16:creationId xmlns:a16="http://schemas.microsoft.com/office/drawing/2014/main" id="{1C207B19-3165-4F4A-AE45-A8311B5B7D87}"/>
               </a:ext>
             </a:extLst>
           </p:cNvPr>
@@ -19410,7 +19523,7 @@
         <p:spPr>
           <a:xfrm xmlns:a="http://schemas.openxmlformats.org/drawingml/2006/main">
             <a:off x="590400" y="4857840"/>
-            <a:ext cx="11010600" cy="618840"/>
+            <a:ext cx="11010240" cy="618480"/>
           </a:xfrm>
           <a:prstGeom xmlns:a="http://schemas.openxmlformats.org/drawingml/2006/main" prst="rect">
             <a:avLst/>
@@ -19450,7 +19563,7 @@
           <p:cNvPr id="219" name="">
             <a:extLst xmlns:a="http://schemas.openxmlformats.org/drawingml/2006/main">
               <a:ext uri="{FF2B5EF4-FFF2-40B4-BE49-F238E27FC236}">
-                <a16:creationId xmlns:a16="http://schemas.microsoft.com/office/drawing/2014/main" id="{1E543281-2544-47BE-809F-9888AF4450D5}"/>
+                <a16:creationId xmlns:a16="http://schemas.microsoft.com/office/drawing/2014/main" id="{27AF9E54-93E8-4081-A2CC-FB071FBA7488}"/>
               </a:ext>
             </a:extLst>
           </p:cNvPr>
@@ -19462,7 +19575,7 @@
         <p:spPr>
           <a:xfrm xmlns:a="http://schemas.openxmlformats.org/drawingml/2006/main">
             <a:off x="743040" y="4924440"/>
-            <a:ext cx="2133360" cy="495000"/>
+            <a:ext cx="2133000" cy="494640"/>
           </a:xfrm>
           <a:prstGeom xmlns:a="http://schemas.openxmlformats.org/drawingml/2006/main" prst="rect">
             <a:avLst/>
@@ -19517,7 +19630,7 @@
           <p:cNvPr id="220" name="">
             <a:extLst xmlns:a="http://schemas.openxmlformats.org/drawingml/2006/main">
               <a:ext uri="{FF2B5EF4-FFF2-40B4-BE49-F238E27FC236}">
-                <a16:creationId xmlns:a16="http://schemas.microsoft.com/office/drawing/2014/main" id="{6FF58C4A-9B2B-428B-ADA8-004296B3F8AD}"/>
+                <a16:creationId xmlns:a16="http://schemas.microsoft.com/office/drawing/2014/main" id="{2D8E3C2B-A698-43F6-97D7-472EB125CD3B}"/>
               </a:ext>
             </a:extLst>
           </p:cNvPr>
@@ -19529,7 +19642,7 @@
         <p:spPr>
           <a:xfrm xmlns:a="http://schemas.openxmlformats.org/drawingml/2006/main">
             <a:off x="3238560" y="4924440"/>
-            <a:ext cx="2209320" cy="495000"/>
+            <a:ext cx="2208960" cy="494640"/>
           </a:xfrm>
           <a:prstGeom xmlns:a="http://schemas.openxmlformats.org/drawingml/2006/main" prst="rect">
             <a:avLst/>
@@ -19584,7 +19697,7 @@
           <p:cNvPr id="221" name="">
             <a:extLst xmlns:a="http://schemas.openxmlformats.org/drawingml/2006/main">
               <a:ext uri="{FF2B5EF4-FFF2-40B4-BE49-F238E27FC236}">
-                <a16:creationId xmlns:a16="http://schemas.microsoft.com/office/drawing/2014/main" id="{63D23C26-B6F7-46C9-B1F0-5D6BC47535E4}"/>
+                <a16:creationId xmlns:a16="http://schemas.microsoft.com/office/drawing/2014/main" id="{37952B2C-88D8-4D05-825F-C95C6884E40F}"/>
               </a:ext>
             </a:extLst>
           </p:cNvPr>
@@ -19596,7 +19709,7 @@
         <p:spPr>
           <a:xfrm xmlns:a="http://schemas.openxmlformats.org/drawingml/2006/main">
             <a:off x="5810400" y="4924440"/>
-            <a:ext cx="2742840" cy="495000"/>
+            <a:ext cx="2742480" cy="494640"/>
           </a:xfrm>
           <a:prstGeom xmlns:a="http://schemas.openxmlformats.org/drawingml/2006/main" prst="rect">
             <a:avLst/>
@@ -19651,7 +19764,7 @@
           <p:cNvPr id="222" name="">
             <a:extLst xmlns:a="http://schemas.openxmlformats.org/drawingml/2006/main">
               <a:ext uri="{FF2B5EF4-FFF2-40B4-BE49-F238E27FC236}">
-                <a16:creationId xmlns:a16="http://schemas.microsoft.com/office/drawing/2014/main" id="{B53AD797-2E63-4CF7-BBC2-4AFA21454428}"/>
+                <a16:creationId xmlns:a16="http://schemas.microsoft.com/office/drawing/2014/main" id="{F9B2DE4B-C13B-4DDF-A39B-1BB32F0772A4}"/>
               </a:ext>
             </a:extLst>
           </p:cNvPr>
@@ -19663,7 +19776,7 @@
         <p:spPr>
           <a:xfrm xmlns:a="http://schemas.openxmlformats.org/drawingml/2006/main">
             <a:off x="8915400" y="4924440"/>
-            <a:ext cx="2590560" cy="495000"/>
+            <a:ext cx="2590200" cy="494640"/>
           </a:xfrm>
           <a:prstGeom xmlns:a="http://schemas.openxmlformats.org/drawingml/2006/main" prst="rect">
             <a:avLst/>
@@ -19718,7 +19831,7 @@
           <p:cNvPr id="223" name="">
             <a:extLst xmlns:a="http://schemas.openxmlformats.org/drawingml/2006/main">
               <a:ext uri="{FF2B5EF4-FFF2-40B4-BE49-F238E27FC236}">
-                <a16:creationId xmlns:a16="http://schemas.microsoft.com/office/drawing/2014/main" id="{1C8FE5CD-9FC2-40BF-86DD-C7571642F5F4}"/>
+                <a16:creationId xmlns:a16="http://schemas.microsoft.com/office/drawing/2014/main" id="{FF4C3463-1E20-494F-A1BA-303E977BC0E9}"/>
               </a:ext>
             </a:extLst>
           </p:cNvPr>
@@ -19730,7 +19843,7 @@
         <p:spPr>
           <a:xfrm xmlns:a="http://schemas.openxmlformats.org/drawingml/2006/main">
             <a:off x="590400" y="5676840"/>
-            <a:ext cx="11010600" cy="9000"/>
+            <a:ext cx="11010240" cy="8640"/>
           </a:xfrm>
           <a:prstGeom xmlns:a="http://schemas.openxmlformats.org/drawingml/2006/main" prst="rect">
             <a:avLst/>
@@ -19770,7 +19883,7 @@
           <p:cNvPr id="224" name="">
             <a:extLst xmlns:a="http://schemas.openxmlformats.org/drawingml/2006/main">
               <a:ext uri="{FF2B5EF4-FFF2-40B4-BE49-F238E27FC236}">
-                <a16:creationId xmlns:a16="http://schemas.microsoft.com/office/drawing/2014/main" id="{A8F817C3-8435-4F06-BA94-557F9DE2CFE5}"/>
+                <a16:creationId xmlns:a16="http://schemas.microsoft.com/office/drawing/2014/main" id="{90E92DBB-26EA-47D1-A45F-1C2DA51B6215}"/>
               </a:ext>
             </a:extLst>
           </p:cNvPr>
@@ -19782,7 +19895,7 @@
         <p:spPr>
           <a:xfrm xmlns:a="http://schemas.openxmlformats.org/drawingml/2006/main">
             <a:off x="590400" y="5905440"/>
-            <a:ext cx="11010600" cy="418680"/>
+            <a:ext cx="11010240" cy="418320"/>
           </a:xfrm>
           <a:prstGeom xmlns:a="http://schemas.openxmlformats.org/drawingml/2006/main" prst="rect">
             <a:avLst/>
@@ -19835,7 +19948,7 @@
     </p:spTree>
     <p:extLst>
       <p:ext uri="{BB962C8B-B14F-4D97-AF65-F5344CB8AC3E}">
-        <p14:creationId xmlns:p14="http://schemas.microsoft.com/office/powerpoint/2010/main" val="1511771205"/>
+        <p14:creationId xmlns:p14="http://schemas.microsoft.com/office/powerpoint/2010/main" val="527125021"/>
       </p:ext>
     </p:extLst>
   </p:cSld>
@@ -19843,9 +19956,9 @@
 </file>
 
 <file path=ppt/theme/theme1.xml><?xml version="1.0" encoding="utf-8"?>
-<a:theme xmlns:a="http://schemas.openxmlformats.org/drawingml/2006/main" name="ChatGPT">
+<a:theme xmlns:a="http://schemas.openxmlformats.org/drawingml/2006/main" name="Cr3dX">
   <a:themeElements>
-    <a:clrScheme name="ChatGPT">
+    <a:clrScheme name="Cr3dX">
       <a:dk1>
         <a:srgbClr val="000000"/>
       </a:dk1>
@@ -19895,7 +20008,7 @@
         <a:cs typeface="Calibri"/>
       </a:minorFont>
     </a:fontScheme>
-    <a:fmtScheme name="ChatGPT">
+    <a:fmtScheme name="Cr3dX">
       <a:fillStyleLst>
         <a:solidFill>
           <a:schemeClr val="phClr"/>

--- a/assets/Cr3dX_RWA_Deck_v1.pptx
+++ b/assets/Cr3dX_RWA_Deck_v1.pptx
@@ -580,7 +580,7 @@
                 <a:ea typeface="Arial"/>
                 <a:cs typeface="Arial"/>
               </a:rPr>
-              <a:t>- Measured S6 evidence: https://github.com/Vastargazing/Cr3dX/blob/main/docs/STATUS.md</a:t>
+              <a:t>- Measured S6 evidence: https://github.com/Vastargazing/Cr3dX/blob/main/docs/STATUS_EN.md</a:t>
             </a:r>
             <a:endParaRPr sz="2000" b="0" u="none">
               <a:solidFill>
@@ -1075,7 +1075,7 @@
                 <a:ea typeface="Arial"/>
                 <a:cs typeface="Arial"/>
               </a:rPr>
-              <a:t>- Accepted live evidence: https://github.com/Vastargazing/Cr3dX/blob/main/docs/STATUS.md</a:t>
+              <a:t>- Accepted live evidence: https://github.com/Vastargazing/Cr3dX/blob/main/docs/STATUS_EN.md</a:t>
             </a:r>
             <a:endParaRPr sz="2000" b="0" u="none">
               <a:solidFill>
@@ -1510,7 +1510,7 @@
                 <a:ea typeface="Arial"/>
                 <a:cs typeface="Arial"/>
               </a:rPr>
-              <a:t>- S6 live evidence: https://github.com/Vastargazing/Cr3dX/blob/main/docs/STATUS.md</a:t>
+              <a:t>- S6 live evidence: https://github.com/Vastargazing/Cr3dX/blob/main/docs/STATUS_EN.md</a:t>
             </a:r>
             <a:endParaRPr sz="2000" b="0" u="none">
               <a:solidFill>

--- a/assets/Cr3dX_RWA_Deck_v1.pptx
+++ b/assets/Cr3dX_RWA_Deck_v1.pptx
@@ -3549,7 +3549,7 @@
                 <a:cs typeface="Arial"/>
                 <a:hlinkClick xmlns:r="http://schemas.openxmlformats.org/officeDocument/2006/relationships" r:id="R0478b1120a2448dd"/>
               </a:rPr>
-              <a:t>Repository ↗</a:t>
+              <a:t>Repository »</a:t>
             </a:r>
             <a:r>
               <a:rPr sz="1350" b="0" u="none">
@@ -3572,7 +3572,7 @@
                 <a:cs typeface="Arial"/>
                 <a:hlinkClick xmlns:r="http://schemas.openxmlformats.org/officeDocument/2006/relationships" r:id="Rbb113e3cecb04702"/>
               </a:rPr>
-              <a:t>Live dashboard ↗</a:t>
+              <a:t>Live dashboard »</a:t>
             </a:r>
             <a:endParaRPr sz="1350" b="0" u="none">
               <a:solidFill>
@@ -6377,7 +6377,7 @@
                 <a:cs typeface="Arial"/>
                 <a:hlinkClick xmlns:r="http://schemas.openxmlformats.org/officeDocument/2006/relationships" r:id="R651bae81764a4f23"/>
               </a:rPr>
-              <a:t>Live dashboard ↗</a:t>
+              <a:t>Live dashboard »</a:t>
             </a:r>
             <a:r>
               <a:rPr sz="1280" b="0" u="none">
@@ -6400,7 +6400,7 @@
                 <a:cs typeface="Arial"/>
                 <a:hlinkClick xmlns:r="http://schemas.openxmlformats.org/officeDocument/2006/relationships" r:id="Rf60d481bf79d48e5"/>
               </a:rPr>
-              <a:t>Repository ↗</a:t>
+              <a:t>Repository »</a:t>
             </a:r>
             <a:r>
               <a:rPr sz="1280" b="0" u="none">
@@ -6423,7 +6423,7 @@
                 <a:cs typeface="Arial"/>
                 <a:hlinkClick xmlns:r="http://schemas.openxmlformats.org/officeDocument/2006/relationships" r:id="R79b87ce370594a16"/>
               </a:rPr>
-              <a:t>Phase B manifests ↗</a:t>
+              <a:t>Phase B manifests »</a:t>
             </a:r>
             <a:endParaRPr sz="1280" b="0" u="none">
               <a:solidFill>
@@ -6544,7 +6544,7 @@
                 <a:cs typeface="Arial"/>
                 <a:hlinkClick xmlns:r="http://schemas.openxmlformats.org/officeDocument/2006/relationships" r:id="R9237434f52b14aaa"/>
               </a:rPr>
-              <a:t>S5 live runbook ↗</a:t>
+              <a:t>S5 live runbook »</a:t>
             </a:r>
             <a:r>
               <a:rPr sz="1280" b="0" u="none">
@@ -6567,7 +6567,7 @@
                 <a:cs typeface="Arial"/>
                 <a:hlinkClick xmlns:r="http://schemas.openxmlformats.org/officeDocument/2006/relationships" r:id="R9922704af3ca4538"/>
               </a:rPr>
-              <a:t>S6 worker runbook ↗</a:t>
+              <a:t>S6 worker runbook »</a:t>
             </a:r>
             <a:endParaRPr sz="1280" b="0" u="none">
               <a:solidFill>
@@ -11007,7 +11007,7 @@
                 <a:cs typeface="Arial"/>
                 <a:hlinkClick xmlns:r="http://schemas.openxmlformats.org/officeDocument/2006/relationships" r:id="R1fb809a102f341f9"/>
               </a:rPr>
-              <a:t>a626556e…55657 ↗</a:t>
+              <a:t>a626556e…55657 »</a:t>
             </a:r>
             <a:endParaRPr sz="980" b="0" u="none">
               <a:solidFill>
@@ -11142,7 +11142,7 @@
                 <a:cs typeface="Arial"/>
                 <a:hlinkClick xmlns:r="http://schemas.openxmlformats.org/officeDocument/2006/relationships" r:id="R4d7e43b2c1a54e8e"/>
               </a:rPr>
-              <a:t>c740cf0e…822ad ↗</a:t>
+              <a:t>c740cf0e…822ad »</a:t>
             </a:r>
             <a:endParaRPr sz="980" b="0" u="none">
               <a:solidFill>
@@ -11277,7 +11277,7 @@
                 <a:cs typeface="Arial"/>
                 <a:hlinkClick xmlns:r="http://schemas.openxmlformats.org/officeDocument/2006/relationships" r:id="R1acadc2743294224"/>
               </a:rPr>
-              <a:t>a0c24a10…b13b6 ↗</a:t>
+              <a:t>a0c24a10…b13b6 »</a:t>
             </a:r>
             <a:endParaRPr sz="980" b="0" u="none">
               <a:solidFill>
@@ -11412,7 +11412,7 @@
                 <a:cs typeface="Arial"/>
                 <a:hlinkClick xmlns:r="http://schemas.openxmlformats.org/officeDocument/2006/relationships" r:id="Rf4cdc9222ee54d8b"/>
               </a:rPr>
-              <a:t>8d859033…840c2 ↗</a:t>
+              <a:t>8d859033…840c2 »</a:t>
             </a:r>
             <a:endParaRPr sz="980" b="0" u="none">
               <a:solidFill>
@@ -15201,7 +15201,7 @@
                 <a:cs typeface="Arial"/>
                 <a:hlinkClick xmlns:r="http://schemas.openxmlformats.org/officeDocument/2006/relationships" r:id="R573d55518fa44920"/>
               </a:rPr>
-              <a:t>Open report and manifests ↗</a:t>
+              <a:t>Open report and manifests »</a:t>
             </a:r>
             <a:endParaRPr sz="1200" b="0" u="none">
               <a:solidFill>
@@ -16314,7 +16314,7 @@
                 <a:cs typeface="Arial"/>
                 <a:hlinkClick xmlns:r="http://schemas.openxmlformats.org/officeDocument/2006/relationships" r:id="Rd6da856e1f9e4f32"/>
               </a:rPr>
-              <a:t>Inspect the S6 coverage matrix ↗</a:t>
+              <a:t>Inspect the S6 coverage matrix »</a:t>
             </a:r>
             <a:endParaRPr sz="1200" b="0" u="none">
               <a:solidFill>
@@ -17640,7 +17640,7 @@
                 <a:cs typeface="Arial"/>
                 <a:hlinkClick xmlns:r="http://schemas.openxmlformats.org/officeDocument/2006/relationships" r:id="R008692ed749d4a85"/>
               </a:rPr>
-              <a:t>Precompile findings ↗</a:t>
+              <a:t>Precompile findings »</a:t>
             </a:r>
             <a:r>
               <a:rPr sz="1200" b="0" u="none">
@@ -17663,7 +17663,7 @@
                 <a:cs typeface="Arial"/>
                 <a:hlinkClick xmlns:r="http://schemas.openxmlformats.org/officeDocument/2006/relationships" r:id="Rc3371b947de14928"/>
               </a:rPr>
-              <a:t>Attestcoin integration ↗</a:t>
+              <a:t>Attestcoin integration »</a:t>
             </a:r>
             <a:endParaRPr sz="1200" b="0" u="none">
               <a:solidFill>
